--- a/Figures/figures.pptx
+++ b/Figures/figures.pptx
@@ -2,19 +2,18 @@
 <file path=ppt/presentation.xml><?xml version="1.0" encoding="utf-8"?>
 <p:presentation xmlns:a="http://schemas.openxmlformats.org/drawingml/2006/main" xmlns:r="http://schemas.openxmlformats.org/officeDocument/2006/relationships" xmlns:p="http://schemas.openxmlformats.org/presentationml/2006/main" saveSubsetFonts="1">
   <p:sldMasterIdLst>
-    <p:sldMasterId id="2147483648" r:id="rId1"/>
+    <p:sldMasterId id="2147483660" r:id="rId1"/>
   </p:sldMasterIdLst>
   <p:sldIdLst>
     <p:sldId id="256" r:id="rId2"/>
-    <p:sldId id="257" r:id="rId3"/>
   </p:sldIdLst>
-  <p:sldSz cx="12192000" cy="6858000"/>
+  <p:sldSz cx="12239625" cy="12239625"/>
   <p:notesSz cx="6858000" cy="9144000"/>
   <p:defaultTextStyle>
     <a:defPPr>
       <a:defRPr lang="en-US"/>
     </a:defPPr>
-    <a:lvl1pPr marL="0" algn="l" defTabSz="914400" rtl="0" eaLnBrk="1" latinLnBrk="0" hangingPunct="1">
+    <a:lvl1pPr marL="0" algn="l" defTabSz="457200" rtl="0" eaLnBrk="1" latinLnBrk="0" hangingPunct="1">
       <a:defRPr sz="1800" kern="1200">
         <a:solidFill>
           <a:schemeClr val="tx1"/>
@@ -24,7 +23,7 @@
         <a:cs typeface="+mn-cs"/>
       </a:defRPr>
     </a:lvl1pPr>
-    <a:lvl2pPr marL="457200" algn="l" defTabSz="914400" rtl="0" eaLnBrk="1" latinLnBrk="0" hangingPunct="1">
+    <a:lvl2pPr marL="457200" algn="l" defTabSz="457200" rtl="0" eaLnBrk="1" latinLnBrk="0" hangingPunct="1">
       <a:defRPr sz="1800" kern="1200">
         <a:solidFill>
           <a:schemeClr val="tx1"/>
@@ -34,7 +33,7 @@
         <a:cs typeface="+mn-cs"/>
       </a:defRPr>
     </a:lvl2pPr>
-    <a:lvl3pPr marL="914400" algn="l" defTabSz="914400" rtl="0" eaLnBrk="1" latinLnBrk="0" hangingPunct="1">
+    <a:lvl3pPr marL="914400" algn="l" defTabSz="457200" rtl="0" eaLnBrk="1" latinLnBrk="0" hangingPunct="1">
       <a:defRPr sz="1800" kern="1200">
         <a:solidFill>
           <a:schemeClr val="tx1"/>
@@ -44,7 +43,7 @@
         <a:cs typeface="+mn-cs"/>
       </a:defRPr>
     </a:lvl3pPr>
-    <a:lvl4pPr marL="1371600" algn="l" defTabSz="914400" rtl="0" eaLnBrk="1" latinLnBrk="0" hangingPunct="1">
+    <a:lvl4pPr marL="1371600" algn="l" defTabSz="457200" rtl="0" eaLnBrk="1" latinLnBrk="0" hangingPunct="1">
       <a:defRPr sz="1800" kern="1200">
         <a:solidFill>
           <a:schemeClr val="tx1"/>
@@ -54,7 +53,7 @@
         <a:cs typeface="+mn-cs"/>
       </a:defRPr>
     </a:lvl4pPr>
-    <a:lvl5pPr marL="1828800" algn="l" defTabSz="914400" rtl="0" eaLnBrk="1" latinLnBrk="0" hangingPunct="1">
+    <a:lvl5pPr marL="1828800" algn="l" defTabSz="457200" rtl="0" eaLnBrk="1" latinLnBrk="0" hangingPunct="1">
       <a:defRPr sz="1800" kern="1200">
         <a:solidFill>
           <a:schemeClr val="tx1"/>
@@ -64,7 +63,7 @@
         <a:cs typeface="+mn-cs"/>
       </a:defRPr>
     </a:lvl5pPr>
-    <a:lvl6pPr marL="2286000" algn="l" defTabSz="914400" rtl="0" eaLnBrk="1" latinLnBrk="0" hangingPunct="1">
+    <a:lvl6pPr marL="2286000" algn="l" defTabSz="457200" rtl="0" eaLnBrk="1" latinLnBrk="0" hangingPunct="1">
       <a:defRPr sz="1800" kern="1200">
         <a:solidFill>
           <a:schemeClr val="tx1"/>
@@ -74,7 +73,7 @@
         <a:cs typeface="+mn-cs"/>
       </a:defRPr>
     </a:lvl6pPr>
-    <a:lvl7pPr marL="2743200" algn="l" defTabSz="914400" rtl="0" eaLnBrk="1" latinLnBrk="0" hangingPunct="1">
+    <a:lvl7pPr marL="2743200" algn="l" defTabSz="457200" rtl="0" eaLnBrk="1" latinLnBrk="0" hangingPunct="1">
       <a:defRPr sz="1800" kern="1200">
         <a:solidFill>
           <a:schemeClr val="tx1"/>
@@ -84,7 +83,7 @@
         <a:cs typeface="+mn-cs"/>
       </a:defRPr>
     </a:lvl7pPr>
-    <a:lvl8pPr marL="3200400" algn="l" defTabSz="914400" rtl="0" eaLnBrk="1" latinLnBrk="0" hangingPunct="1">
+    <a:lvl8pPr marL="3200400" algn="l" defTabSz="457200" rtl="0" eaLnBrk="1" latinLnBrk="0" hangingPunct="1">
       <a:defRPr sz="1800" kern="1200">
         <a:solidFill>
           <a:schemeClr val="tx1"/>
@@ -94,7 +93,7 @@
         <a:cs typeface="+mn-cs"/>
       </a:defRPr>
     </a:lvl8pPr>
-    <a:lvl9pPr marL="3657600" algn="l" defTabSz="914400" rtl="0" eaLnBrk="1" latinLnBrk="0" hangingPunct="1">
+    <a:lvl9pPr marL="3657600" algn="l" defTabSz="457200" rtl="0" eaLnBrk="1" latinLnBrk="0" hangingPunct="1">
       <a:defRPr sz="1800" kern="1200">
         <a:solidFill>
           <a:schemeClr val="tx1"/>
@@ -132,13 +131,7 @@
       </p:grpSpPr>
       <p:sp>
         <p:nvSpPr>
-          <p:cNvPr id="2" name="Title 1">
-            <a:extLst>
-              <a:ext uri="{FF2B5EF4-FFF2-40B4-BE49-F238E27FC236}">
-                <a16:creationId xmlns:a16="http://schemas.microsoft.com/office/drawing/2014/main" id="{2309738F-79E9-DC23-AA5E-9F3495A550BA}"/>
-              </a:ext>
-            </a:extLst>
-          </p:cNvPr>
+          <p:cNvPr id="2" name="Title 1"/>
           <p:cNvSpPr>
             <a:spLocks noGrp="1"/>
           </p:cNvSpPr>
@@ -148,15 +141,15 @@
         </p:nvSpPr>
         <p:spPr>
           <a:xfrm>
-            <a:off x="1524000" y="1122363"/>
-            <a:ext cx="9144000" cy="2387600"/>
+            <a:off x="917972" y="2003106"/>
+            <a:ext cx="10403681" cy="4261203"/>
           </a:xfrm>
         </p:spPr>
         <p:txBody>
           <a:bodyPr anchor="b"/>
           <a:lstStyle>
             <a:lvl1pPr algn="ctr">
-              <a:defRPr sz="6000"/>
+              <a:defRPr sz="8031"/>
             </a:lvl1pPr>
           </a:lstStyle>
           <a:p>
@@ -164,18 +157,13 @@
               <a:rPr lang="en-GB"/>
               <a:t>Click to edit Master title style</a:t>
             </a:r>
-          </a:p>
-        </p:txBody>
-      </p:sp>
-      <p:sp>
-        <p:nvSpPr>
-          <p:cNvPr id="3" name="Subtitle 2">
-            <a:extLst>
-              <a:ext uri="{FF2B5EF4-FFF2-40B4-BE49-F238E27FC236}">
-                <a16:creationId xmlns:a16="http://schemas.microsoft.com/office/drawing/2014/main" id="{2C18215A-2F49-6307-B1C4-03479855D407}"/>
-              </a:ext>
-            </a:extLst>
-          </p:cNvPr>
+            <a:endParaRPr lang="en-US" dirty="0"/>
+          </a:p>
+        </p:txBody>
+      </p:sp>
+      <p:sp>
+        <p:nvSpPr>
+          <p:cNvPr id="3" name="Subtitle 2"/>
           <p:cNvSpPr>
             <a:spLocks noGrp="1"/>
           </p:cNvSpPr>
@@ -185,8 +173,8 @@
         </p:nvSpPr>
         <p:spPr>
           <a:xfrm>
-            <a:off x="1524000" y="3602038"/>
-            <a:ext cx="9144000" cy="1655762"/>
+            <a:off x="1529953" y="6428637"/>
+            <a:ext cx="9179719" cy="2955075"/>
           </a:xfrm>
         </p:spPr>
         <p:txBody>
@@ -194,39 +182,39 @@
           <a:lstStyle>
             <a:lvl1pPr marL="0" indent="0" algn="ctr">
               <a:buNone/>
-              <a:defRPr sz="2400"/>
+              <a:defRPr sz="3212"/>
             </a:lvl1pPr>
-            <a:lvl2pPr marL="457200" indent="0" algn="ctr">
+            <a:lvl2pPr marL="611962" indent="0" algn="ctr">
               <a:buNone/>
-              <a:defRPr sz="2000"/>
+              <a:defRPr sz="2677"/>
             </a:lvl2pPr>
-            <a:lvl3pPr marL="914400" indent="0" algn="ctr">
+            <a:lvl3pPr marL="1223924" indent="0" algn="ctr">
               <a:buNone/>
-              <a:defRPr sz="1800"/>
+              <a:defRPr sz="2409"/>
             </a:lvl3pPr>
-            <a:lvl4pPr marL="1371600" indent="0" algn="ctr">
+            <a:lvl4pPr marL="1835887" indent="0" algn="ctr">
               <a:buNone/>
-              <a:defRPr sz="1600"/>
+              <a:defRPr sz="2142"/>
             </a:lvl4pPr>
-            <a:lvl5pPr marL="1828800" indent="0" algn="ctr">
+            <a:lvl5pPr marL="2447849" indent="0" algn="ctr">
               <a:buNone/>
-              <a:defRPr sz="1600"/>
+              <a:defRPr sz="2142"/>
             </a:lvl5pPr>
-            <a:lvl6pPr marL="2286000" indent="0" algn="ctr">
+            <a:lvl6pPr marL="3059811" indent="0" algn="ctr">
               <a:buNone/>
-              <a:defRPr sz="1600"/>
+              <a:defRPr sz="2142"/>
             </a:lvl6pPr>
-            <a:lvl7pPr marL="2743200" indent="0" algn="ctr">
+            <a:lvl7pPr marL="3671773" indent="0" algn="ctr">
               <a:buNone/>
-              <a:defRPr sz="1600"/>
+              <a:defRPr sz="2142"/>
             </a:lvl7pPr>
-            <a:lvl8pPr marL="3200400" indent="0" algn="ctr">
+            <a:lvl8pPr marL="4283735" indent="0" algn="ctr">
               <a:buNone/>
-              <a:defRPr sz="1600"/>
+              <a:defRPr sz="2142"/>
             </a:lvl8pPr>
-            <a:lvl9pPr marL="3657600" indent="0" algn="ctr">
+            <a:lvl9pPr marL="4895698" indent="0" algn="ctr">
               <a:buNone/>
-              <a:defRPr sz="1600"/>
+              <a:defRPr sz="2142"/>
             </a:lvl9pPr>
           </a:lstStyle>
           <a:p>
@@ -234,18 +222,13 @@
               <a:rPr lang="en-GB"/>
               <a:t>Click to edit Master subtitle style</a:t>
             </a:r>
-          </a:p>
-        </p:txBody>
-      </p:sp>
-      <p:sp>
-        <p:nvSpPr>
-          <p:cNvPr id="4" name="Date Placeholder 3">
-            <a:extLst>
-              <a:ext uri="{FF2B5EF4-FFF2-40B4-BE49-F238E27FC236}">
-                <a16:creationId xmlns:a16="http://schemas.microsoft.com/office/drawing/2014/main" id="{1F9C5E30-5E00-71C9-1C1D-7D535267BDA0}"/>
-              </a:ext>
-            </a:extLst>
-          </p:cNvPr>
+            <a:endParaRPr lang="en-US" dirty="0"/>
+          </a:p>
+        </p:txBody>
+      </p:sp>
+      <p:sp>
+        <p:nvSpPr>
+          <p:cNvPr id="4" name="Date Placeholder 3"/>
           <p:cNvSpPr>
             <a:spLocks noGrp="1"/>
           </p:cNvSpPr>
@@ -260,7 +243,7 @@
           <a:p>
             <a:fld id="{435879AB-E60A-4261-98DA-0C718B428030}" type="datetimeFigureOut">
               <a:rPr lang="en-GB" smtClean="0"/>
-              <a:t>11/04/2026</a:t>
+              <a:t>17/04/2026</a:t>
             </a:fld>
             <a:endParaRPr lang="en-GB"/>
           </a:p>
@@ -268,13 +251,7 @@
       </p:sp>
       <p:sp>
         <p:nvSpPr>
-          <p:cNvPr id="5" name="Footer Placeholder 4">
-            <a:extLst>
-              <a:ext uri="{FF2B5EF4-FFF2-40B4-BE49-F238E27FC236}">
-                <a16:creationId xmlns:a16="http://schemas.microsoft.com/office/drawing/2014/main" id="{FDE1BD58-AAEC-B6E2-5D81-04101F95656D}"/>
-              </a:ext>
-            </a:extLst>
-          </p:cNvPr>
+          <p:cNvPr id="5" name="Footer Placeholder 4"/>
           <p:cNvSpPr>
             <a:spLocks noGrp="1"/>
           </p:cNvSpPr>
@@ -293,13 +270,7 @@
       </p:sp>
       <p:sp>
         <p:nvSpPr>
-          <p:cNvPr id="6" name="Slide Number Placeholder 5">
-            <a:extLst>
-              <a:ext uri="{FF2B5EF4-FFF2-40B4-BE49-F238E27FC236}">
-                <a16:creationId xmlns:a16="http://schemas.microsoft.com/office/drawing/2014/main" id="{D5B2A54B-00F2-F61A-19AA-A0F167D48117}"/>
-              </a:ext>
-            </a:extLst>
-          </p:cNvPr>
+          <p:cNvPr id="6" name="Slide Number Placeholder 5"/>
           <p:cNvSpPr>
             <a:spLocks noGrp="1"/>
           </p:cNvSpPr>
@@ -323,7 +294,7 @@
     </p:spTree>
     <p:extLst>
       <p:ext uri="{BB962C8B-B14F-4D97-AF65-F5344CB8AC3E}">
-        <p14:creationId xmlns:p14="http://schemas.microsoft.com/office/powerpoint/2010/main" val="2000489941"/>
+        <p14:creationId xmlns:p14="http://schemas.microsoft.com/office/powerpoint/2010/main" val="2475784752"/>
       </p:ext>
     </p:extLst>
   </p:cSld>
@@ -352,13 +323,7 @@
       </p:grpSpPr>
       <p:sp>
         <p:nvSpPr>
-          <p:cNvPr id="2" name="Title 1">
-            <a:extLst>
-              <a:ext uri="{FF2B5EF4-FFF2-40B4-BE49-F238E27FC236}">
-                <a16:creationId xmlns:a16="http://schemas.microsoft.com/office/drawing/2014/main" id="{56271B9C-F2C9-62AA-95AB-7F489363E732}"/>
-              </a:ext>
-            </a:extLst>
-          </p:cNvPr>
+          <p:cNvPr id="2" name="Title 1"/>
           <p:cNvSpPr>
             <a:spLocks noGrp="1"/>
           </p:cNvSpPr>
@@ -375,18 +340,13 @@
               <a:rPr lang="en-GB"/>
               <a:t>Click to edit Master title style</a:t>
             </a:r>
-          </a:p>
-        </p:txBody>
-      </p:sp>
-      <p:sp>
-        <p:nvSpPr>
-          <p:cNvPr id="3" name="Vertical Text Placeholder 2">
-            <a:extLst>
-              <a:ext uri="{FF2B5EF4-FFF2-40B4-BE49-F238E27FC236}">
-                <a16:creationId xmlns:a16="http://schemas.microsoft.com/office/drawing/2014/main" id="{7B7527DC-CCA2-8941-1C5F-BA870279E3ED}"/>
-              </a:ext>
-            </a:extLst>
-          </p:cNvPr>
+            <a:endParaRPr lang="en-US" dirty="0"/>
+          </a:p>
+        </p:txBody>
+      </p:sp>
+      <p:sp>
+        <p:nvSpPr>
+          <p:cNvPr id="3" name="Vertical Text Placeholder 2"/>
           <p:cNvSpPr>
             <a:spLocks noGrp="1"/>
           </p:cNvSpPr>
@@ -432,18 +392,13 @@
               <a:rPr lang="en-GB"/>
               <a:t>Fifth level</a:t>
             </a:r>
-          </a:p>
-        </p:txBody>
-      </p:sp>
-      <p:sp>
-        <p:nvSpPr>
-          <p:cNvPr id="4" name="Date Placeholder 3">
-            <a:extLst>
-              <a:ext uri="{FF2B5EF4-FFF2-40B4-BE49-F238E27FC236}">
-                <a16:creationId xmlns:a16="http://schemas.microsoft.com/office/drawing/2014/main" id="{8FB9AF07-616A-FBFE-2CC6-77676BBE3749}"/>
-              </a:ext>
-            </a:extLst>
-          </p:cNvPr>
+            <a:endParaRPr lang="en-US" dirty="0"/>
+          </a:p>
+        </p:txBody>
+      </p:sp>
+      <p:sp>
+        <p:nvSpPr>
+          <p:cNvPr id="4" name="Date Placeholder 3"/>
           <p:cNvSpPr>
             <a:spLocks noGrp="1"/>
           </p:cNvSpPr>
@@ -458,7 +413,7 @@
           <a:p>
             <a:fld id="{435879AB-E60A-4261-98DA-0C718B428030}" type="datetimeFigureOut">
               <a:rPr lang="en-GB" smtClean="0"/>
-              <a:t>11/04/2026</a:t>
+              <a:t>17/04/2026</a:t>
             </a:fld>
             <a:endParaRPr lang="en-GB"/>
           </a:p>
@@ -466,13 +421,7 @@
       </p:sp>
       <p:sp>
         <p:nvSpPr>
-          <p:cNvPr id="5" name="Footer Placeholder 4">
-            <a:extLst>
-              <a:ext uri="{FF2B5EF4-FFF2-40B4-BE49-F238E27FC236}">
-                <a16:creationId xmlns:a16="http://schemas.microsoft.com/office/drawing/2014/main" id="{DA35A7A6-0F29-DF7E-461A-75F3E81D5D80}"/>
-              </a:ext>
-            </a:extLst>
-          </p:cNvPr>
+          <p:cNvPr id="5" name="Footer Placeholder 4"/>
           <p:cNvSpPr>
             <a:spLocks noGrp="1"/>
           </p:cNvSpPr>
@@ -491,13 +440,7 @@
       </p:sp>
       <p:sp>
         <p:nvSpPr>
-          <p:cNvPr id="6" name="Slide Number Placeholder 5">
-            <a:extLst>
-              <a:ext uri="{FF2B5EF4-FFF2-40B4-BE49-F238E27FC236}">
-                <a16:creationId xmlns:a16="http://schemas.microsoft.com/office/drawing/2014/main" id="{AF08B662-82F4-1587-314A-F39B28CA9569}"/>
-              </a:ext>
-            </a:extLst>
-          </p:cNvPr>
+          <p:cNvPr id="6" name="Slide Number Placeholder 5"/>
           <p:cNvSpPr>
             <a:spLocks noGrp="1"/>
           </p:cNvSpPr>
@@ -521,7 +464,7 @@
     </p:spTree>
     <p:extLst>
       <p:ext uri="{BB962C8B-B14F-4D97-AF65-F5344CB8AC3E}">
-        <p14:creationId xmlns:p14="http://schemas.microsoft.com/office/powerpoint/2010/main" val="3845649826"/>
+        <p14:creationId xmlns:p14="http://schemas.microsoft.com/office/powerpoint/2010/main" val="2166804065"/>
       </p:ext>
     </p:extLst>
   </p:cSld>
@@ -550,13 +493,7 @@
       </p:grpSpPr>
       <p:sp>
         <p:nvSpPr>
-          <p:cNvPr id="2" name="Vertical Title 1">
-            <a:extLst>
-              <a:ext uri="{FF2B5EF4-FFF2-40B4-BE49-F238E27FC236}">
-                <a16:creationId xmlns:a16="http://schemas.microsoft.com/office/drawing/2014/main" id="{FEE8C2AD-73BC-5549-E53D-921C8D107AEE}"/>
-              </a:ext>
-            </a:extLst>
-          </p:cNvPr>
+          <p:cNvPr id="2" name="Vertical Title 1"/>
           <p:cNvSpPr>
             <a:spLocks noGrp="1"/>
           </p:cNvSpPr>
@@ -566,8 +503,8 @@
         </p:nvSpPr>
         <p:spPr>
           <a:xfrm>
-            <a:off x="8724900" y="365125"/>
-            <a:ext cx="2628900" cy="5811838"/>
+            <a:off x="8758982" y="651647"/>
+            <a:ext cx="2639169" cy="10372516"/>
           </a:xfrm>
         </p:spPr>
         <p:txBody>
@@ -578,18 +515,13 @@
               <a:rPr lang="en-GB"/>
               <a:t>Click to edit Master title style</a:t>
             </a:r>
-          </a:p>
-        </p:txBody>
-      </p:sp>
-      <p:sp>
-        <p:nvSpPr>
-          <p:cNvPr id="3" name="Vertical Text Placeholder 2">
-            <a:extLst>
-              <a:ext uri="{FF2B5EF4-FFF2-40B4-BE49-F238E27FC236}">
-                <a16:creationId xmlns:a16="http://schemas.microsoft.com/office/drawing/2014/main" id="{B1802CCA-6458-3B57-D580-EC63204F246A}"/>
-              </a:ext>
-            </a:extLst>
-          </p:cNvPr>
+            <a:endParaRPr lang="en-US" dirty="0"/>
+          </a:p>
+        </p:txBody>
+      </p:sp>
+      <p:sp>
+        <p:nvSpPr>
+          <p:cNvPr id="3" name="Vertical Text Placeholder 2"/>
           <p:cNvSpPr>
             <a:spLocks noGrp="1"/>
           </p:cNvSpPr>
@@ -599,8 +531,8 @@
         </p:nvSpPr>
         <p:spPr>
           <a:xfrm>
-            <a:off x="838200" y="365125"/>
-            <a:ext cx="7734300" cy="5811838"/>
+            <a:off x="841475" y="651647"/>
+            <a:ext cx="7764512" cy="10372516"/>
           </a:xfrm>
         </p:spPr>
         <p:txBody>
@@ -640,18 +572,13 @@
               <a:rPr lang="en-GB"/>
               <a:t>Fifth level</a:t>
             </a:r>
-          </a:p>
-        </p:txBody>
-      </p:sp>
-      <p:sp>
-        <p:nvSpPr>
-          <p:cNvPr id="4" name="Date Placeholder 3">
-            <a:extLst>
-              <a:ext uri="{FF2B5EF4-FFF2-40B4-BE49-F238E27FC236}">
-                <a16:creationId xmlns:a16="http://schemas.microsoft.com/office/drawing/2014/main" id="{F19C8D69-8124-125C-7440-4ED12C2F6B49}"/>
-              </a:ext>
-            </a:extLst>
-          </p:cNvPr>
+            <a:endParaRPr lang="en-US" dirty="0"/>
+          </a:p>
+        </p:txBody>
+      </p:sp>
+      <p:sp>
+        <p:nvSpPr>
+          <p:cNvPr id="4" name="Date Placeholder 3"/>
           <p:cNvSpPr>
             <a:spLocks noGrp="1"/>
           </p:cNvSpPr>
@@ -666,7 +593,7 @@
           <a:p>
             <a:fld id="{435879AB-E60A-4261-98DA-0C718B428030}" type="datetimeFigureOut">
               <a:rPr lang="en-GB" smtClean="0"/>
-              <a:t>11/04/2026</a:t>
+              <a:t>17/04/2026</a:t>
             </a:fld>
             <a:endParaRPr lang="en-GB"/>
           </a:p>
@@ -674,13 +601,7 @@
       </p:sp>
       <p:sp>
         <p:nvSpPr>
-          <p:cNvPr id="5" name="Footer Placeholder 4">
-            <a:extLst>
-              <a:ext uri="{FF2B5EF4-FFF2-40B4-BE49-F238E27FC236}">
-                <a16:creationId xmlns:a16="http://schemas.microsoft.com/office/drawing/2014/main" id="{AD5A44B8-78A3-2BEF-D792-3C84B4DE57D4}"/>
-              </a:ext>
-            </a:extLst>
-          </p:cNvPr>
+          <p:cNvPr id="5" name="Footer Placeholder 4"/>
           <p:cNvSpPr>
             <a:spLocks noGrp="1"/>
           </p:cNvSpPr>
@@ -699,13 +620,7 @@
       </p:sp>
       <p:sp>
         <p:nvSpPr>
-          <p:cNvPr id="6" name="Slide Number Placeholder 5">
-            <a:extLst>
-              <a:ext uri="{FF2B5EF4-FFF2-40B4-BE49-F238E27FC236}">
-                <a16:creationId xmlns:a16="http://schemas.microsoft.com/office/drawing/2014/main" id="{B03E80BE-247B-2D67-CCBA-D810CD5E7150}"/>
-              </a:ext>
-            </a:extLst>
-          </p:cNvPr>
+          <p:cNvPr id="6" name="Slide Number Placeholder 5"/>
           <p:cNvSpPr>
             <a:spLocks noGrp="1"/>
           </p:cNvSpPr>
@@ -729,7 +644,7 @@
     </p:spTree>
     <p:extLst>
       <p:ext uri="{BB962C8B-B14F-4D97-AF65-F5344CB8AC3E}">
-        <p14:creationId xmlns:p14="http://schemas.microsoft.com/office/powerpoint/2010/main" val="2778388299"/>
+        <p14:creationId xmlns:p14="http://schemas.microsoft.com/office/powerpoint/2010/main" val="2304183223"/>
       </p:ext>
     </p:extLst>
   </p:cSld>
@@ -758,13 +673,7 @@
       </p:grpSpPr>
       <p:sp>
         <p:nvSpPr>
-          <p:cNvPr id="2" name="Title 1">
-            <a:extLst>
-              <a:ext uri="{FF2B5EF4-FFF2-40B4-BE49-F238E27FC236}">
-                <a16:creationId xmlns:a16="http://schemas.microsoft.com/office/drawing/2014/main" id="{01650908-4EFA-BEDD-6A42-EE6616EA8B4C}"/>
-              </a:ext>
-            </a:extLst>
-          </p:cNvPr>
+          <p:cNvPr id="2" name="Title 1"/>
           <p:cNvSpPr>
             <a:spLocks noGrp="1"/>
           </p:cNvSpPr>
@@ -781,18 +690,13 @@
               <a:rPr lang="en-GB"/>
               <a:t>Click to edit Master title style</a:t>
             </a:r>
-          </a:p>
-        </p:txBody>
-      </p:sp>
-      <p:sp>
-        <p:nvSpPr>
-          <p:cNvPr id="3" name="Content Placeholder 2">
-            <a:extLst>
-              <a:ext uri="{FF2B5EF4-FFF2-40B4-BE49-F238E27FC236}">
-                <a16:creationId xmlns:a16="http://schemas.microsoft.com/office/drawing/2014/main" id="{6370C701-9908-8AFE-0C94-DBBFF14F55C1}"/>
-              </a:ext>
-            </a:extLst>
-          </p:cNvPr>
+            <a:endParaRPr lang="en-US" dirty="0"/>
+          </a:p>
+        </p:txBody>
+      </p:sp>
+      <p:sp>
+        <p:nvSpPr>
+          <p:cNvPr id="3" name="Content Placeholder 2"/>
           <p:cNvSpPr>
             <a:spLocks noGrp="1"/>
           </p:cNvSpPr>
@@ -838,18 +742,13 @@
               <a:rPr lang="en-GB"/>
               <a:t>Fifth level</a:t>
             </a:r>
-          </a:p>
-        </p:txBody>
-      </p:sp>
-      <p:sp>
-        <p:nvSpPr>
-          <p:cNvPr id="4" name="Date Placeholder 3">
-            <a:extLst>
-              <a:ext uri="{FF2B5EF4-FFF2-40B4-BE49-F238E27FC236}">
-                <a16:creationId xmlns:a16="http://schemas.microsoft.com/office/drawing/2014/main" id="{6E3688F9-D130-BA0B-4C8C-6E90F74450AB}"/>
-              </a:ext>
-            </a:extLst>
-          </p:cNvPr>
+            <a:endParaRPr lang="en-US" dirty="0"/>
+          </a:p>
+        </p:txBody>
+      </p:sp>
+      <p:sp>
+        <p:nvSpPr>
+          <p:cNvPr id="4" name="Date Placeholder 3"/>
           <p:cNvSpPr>
             <a:spLocks noGrp="1"/>
           </p:cNvSpPr>
@@ -864,7 +763,7 @@
           <a:p>
             <a:fld id="{435879AB-E60A-4261-98DA-0C718B428030}" type="datetimeFigureOut">
               <a:rPr lang="en-GB" smtClean="0"/>
-              <a:t>11/04/2026</a:t>
+              <a:t>17/04/2026</a:t>
             </a:fld>
             <a:endParaRPr lang="en-GB"/>
           </a:p>
@@ -872,13 +771,7 @@
       </p:sp>
       <p:sp>
         <p:nvSpPr>
-          <p:cNvPr id="5" name="Footer Placeholder 4">
-            <a:extLst>
-              <a:ext uri="{FF2B5EF4-FFF2-40B4-BE49-F238E27FC236}">
-                <a16:creationId xmlns:a16="http://schemas.microsoft.com/office/drawing/2014/main" id="{21E56531-3F0D-A119-4A8A-A260D0896DC4}"/>
-              </a:ext>
-            </a:extLst>
-          </p:cNvPr>
+          <p:cNvPr id="5" name="Footer Placeholder 4"/>
           <p:cNvSpPr>
             <a:spLocks noGrp="1"/>
           </p:cNvSpPr>
@@ -897,13 +790,7 @@
       </p:sp>
       <p:sp>
         <p:nvSpPr>
-          <p:cNvPr id="6" name="Slide Number Placeholder 5">
-            <a:extLst>
-              <a:ext uri="{FF2B5EF4-FFF2-40B4-BE49-F238E27FC236}">
-                <a16:creationId xmlns:a16="http://schemas.microsoft.com/office/drawing/2014/main" id="{BD104BE0-F783-D07D-B54A-AA80F0553323}"/>
-              </a:ext>
-            </a:extLst>
-          </p:cNvPr>
+          <p:cNvPr id="6" name="Slide Number Placeholder 5"/>
           <p:cNvSpPr>
             <a:spLocks noGrp="1"/>
           </p:cNvSpPr>
@@ -927,7 +814,7 @@
     </p:spTree>
     <p:extLst>
       <p:ext uri="{BB962C8B-B14F-4D97-AF65-F5344CB8AC3E}">
-        <p14:creationId xmlns:p14="http://schemas.microsoft.com/office/powerpoint/2010/main" val="451477056"/>
+        <p14:creationId xmlns:p14="http://schemas.microsoft.com/office/powerpoint/2010/main" val="3053013093"/>
       </p:ext>
     </p:extLst>
   </p:cSld>
@@ -956,13 +843,7 @@
       </p:grpSpPr>
       <p:sp>
         <p:nvSpPr>
-          <p:cNvPr id="2" name="Title 1">
-            <a:extLst>
-              <a:ext uri="{FF2B5EF4-FFF2-40B4-BE49-F238E27FC236}">
-                <a16:creationId xmlns:a16="http://schemas.microsoft.com/office/drawing/2014/main" id="{ADA3AC62-9F5A-3EF8-F778-750E674418CF}"/>
-              </a:ext>
-            </a:extLst>
-          </p:cNvPr>
+          <p:cNvPr id="2" name="Title 1"/>
           <p:cNvSpPr>
             <a:spLocks noGrp="1"/>
           </p:cNvSpPr>
@@ -972,15 +853,15 @@
         </p:nvSpPr>
         <p:spPr>
           <a:xfrm>
-            <a:off x="831850" y="1709738"/>
-            <a:ext cx="10515600" cy="2852737"/>
+            <a:off x="835100" y="3051410"/>
+            <a:ext cx="10556677" cy="5091343"/>
           </a:xfrm>
         </p:spPr>
         <p:txBody>
           <a:bodyPr anchor="b"/>
           <a:lstStyle>
             <a:lvl1pPr>
-              <a:defRPr sz="6000"/>
+              <a:defRPr sz="8031"/>
             </a:lvl1pPr>
           </a:lstStyle>
           <a:p>
@@ -988,18 +869,13 @@
               <a:rPr lang="en-GB"/>
               <a:t>Click to edit Master title style</a:t>
             </a:r>
-          </a:p>
-        </p:txBody>
-      </p:sp>
-      <p:sp>
-        <p:nvSpPr>
-          <p:cNvPr id="3" name="Text Placeholder 2">
-            <a:extLst>
-              <a:ext uri="{FF2B5EF4-FFF2-40B4-BE49-F238E27FC236}">
-                <a16:creationId xmlns:a16="http://schemas.microsoft.com/office/drawing/2014/main" id="{CF152820-5F71-8F7D-E2DF-A85DCFB15868}"/>
-              </a:ext>
-            </a:extLst>
-          </p:cNvPr>
+            <a:endParaRPr lang="en-US" dirty="0"/>
+          </a:p>
+        </p:txBody>
+      </p:sp>
+      <p:sp>
+        <p:nvSpPr>
+          <p:cNvPr id="3" name="Text Placeholder 2"/>
           <p:cNvSpPr>
             <a:spLocks noGrp="1"/>
           </p:cNvSpPr>
@@ -1009,8 +885,8 @@
         </p:nvSpPr>
         <p:spPr>
           <a:xfrm>
-            <a:off x="831850" y="4589463"/>
-            <a:ext cx="10515600" cy="1500187"/>
+            <a:off x="835100" y="8190919"/>
+            <a:ext cx="10556677" cy="2677417"/>
           </a:xfrm>
         </p:spPr>
         <p:txBody>
@@ -1018,7 +894,7 @@
           <a:lstStyle>
             <a:lvl1pPr marL="0" indent="0">
               <a:buNone/>
-              <a:defRPr sz="2400">
+              <a:defRPr sz="3212">
                 <a:solidFill>
                   <a:schemeClr val="tx1">
                     <a:tint val="82000"/>
@@ -1026,9 +902,9 @@
                 </a:solidFill>
               </a:defRPr>
             </a:lvl1pPr>
-            <a:lvl2pPr marL="457200" indent="0">
+            <a:lvl2pPr marL="611962" indent="0">
               <a:buNone/>
-              <a:defRPr sz="2000">
+              <a:defRPr sz="2677">
                 <a:solidFill>
                   <a:schemeClr val="tx1">
                     <a:tint val="82000"/>
@@ -1036,9 +912,9 @@
                 </a:solidFill>
               </a:defRPr>
             </a:lvl2pPr>
-            <a:lvl3pPr marL="914400" indent="0">
+            <a:lvl3pPr marL="1223924" indent="0">
               <a:buNone/>
-              <a:defRPr sz="1800">
+              <a:defRPr sz="2409">
                 <a:solidFill>
                   <a:schemeClr val="tx1">
                     <a:tint val="82000"/>
@@ -1046,9 +922,9 @@
                 </a:solidFill>
               </a:defRPr>
             </a:lvl3pPr>
-            <a:lvl4pPr marL="1371600" indent="0">
+            <a:lvl4pPr marL="1835887" indent="0">
               <a:buNone/>
-              <a:defRPr sz="1600">
+              <a:defRPr sz="2142">
                 <a:solidFill>
                   <a:schemeClr val="tx1">
                     <a:tint val="82000"/>
@@ -1056,9 +932,9 @@
                 </a:solidFill>
               </a:defRPr>
             </a:lvl4pPr>
-            <a:lvl5pPr marL="1828800" indent="0">
+            <a:lvl5pPr marL="2447849" indent="0">
               <a:buNone/>
-              <a:defRPr sz="1600">
+              <a:defRPr sz="2142">
                 <a:solidFill>
                   <a:schemeClr val="tx1">
                     <a:tint val="82000"/>
@@ -1066,9 +942,9 @@
                 </a:solidFill>
               </a:defRPr>
             </a:lvl5pPr>
-            <a:lvl6pPr marL="2286000" indent="0">
+            <a:lvl6pPr marL="3059811" indent="0">
               <a:buNone/>
-              <a:defRPr sz="1600">
+              <a:defRPr sz="2142">
                 <a:solidFill>
                   <a:schemeClr val="tx1">
                     <a:tint val="82000"/>
@@ -1076,9 +952,9 @@
                 </a:solidFill>
               </a:defRPr>
             </a:lvl6pPr>
-            <a:lvl7pPr marL="2743200" indent="0">
+            <a:lvl7pPr marL="3671773" indent="0">
               <a:buNone/>
-              <a:defRPr sz="1600">
+              <a:defRPr sz="2142">
                 <a:solidFill>
                   <a:schemeClr val="tx1">
                     <a:tint val="82000"/>
@@ -1086,9 +962,9 @@
                 </a:solidFill>
               </a:defRPr>
             </a:lvl7pPr>
-            <a:lvl8pPr marL="3200400" indent="0">
+            <a:lvl8pPr marL="4283735" indent="0">
               <a:buNone/>
-              <a:defRPr sz="1600">
+              <a:defRPr sz="2142">
                 <a:solidFill>
                   <a:schemeClr val="tx1">
                     <a:tint val="82000"/>
@@ -1096,9 +972,9 @@
                 </a:solidFill>
               </a:defRPr>
             </a:lvl8pPr>
-            <a:lvl9pPr marL="3657600" indent="0">
+            <a:lvl9pPr marL="4895698" indent="0">
               <a:buNone/>
-              <a:defRPr sz="1600">
+              <a:defRPr sz="2142">
                 <a:solidFill>
                   <a:schemeClr val="tx1">
                     <a:tint val="82000"/>
@@ -1118,13 +994,7 @@
       </p:sp>
       <p:sp>
         <p:nvSpPr>
-          <p:cNvPr id="4" name="Date Placeholder 3">
-            <a:extLst>
-              <a:ext uri="{FF2B5EF4-FFF2-40B4-BE49-F238E27FC236}">
-                <a16:creationId xmlns:a16="http://schemas.microsoft.com/office/drawing/2014/main" id="{0E259D12-3BF2-758A-DDF0-FC4873097493}"/>
-              </a:ext>
-            </a:extLst>
-          </p:cNvPr>
+          <p:cNvPr id="4" name="Date Placeholder 3"/>
           <p:cNvSpPr>
             <a:spLocks noGrp="1"/>
           </p:cNvSpPr>
@@ -1139,7 +1009,7 @@
           <a:p>
             <a:fld id="{435879AB-E60A-4261-98DA-0C718B428030}" type="datetimeFigureOut">
               <a:rPr lang="en-GB" smtClean="0"/>
-              <a:t>11/04/2026</a:t>
+              <a:t>17/04/2026</a:t>
             </a:fld>
             <a:endParaRPr lang="en-GB"/>
           </a:p>
@@ -1147,13 +1017,7 @@
       </p:sp>
       <p:sp>
         <p:nvSpPr>
-          <p:cNvPr id="5" name="Footer Placeholder 4">
-            <a:extLst>
-              <a:ext uri="{FF2B5EF4-FFF2-40B4-BE49-F238E27FC236}">
-                <a16:creationId xmlns:a16="http://schemas.microsoft.com/office/drawing/2014/main" id="{E4BDE824-49EA-DAE4-7C03-2BD90B7F236D}"/>
-              </a:ext>
-            </a:extLst>
-          </p:cNvPr>
+          <p:cNvPr id="5" name="Footer Placeholder 4"/>
           <p:cNvSpPr>
             <a:spLocks noGrp="1"/>
           </p:cNvSpPr>
@@ -1172,13 +1036,7 @@
       </p:sp>
       <p:sp>
         <p:nvSpPr>
-          <p:cNvPr id="6" name="Slide Number Placeholder 5">
-            <a:extLst>
-              <a:ext uri="{FF2B5EF4-FFF2-40B4-BE49-F238E27FC236}">
-                <a16:creationId xmlns:a16="http://schemas.microsoft.com/office/drawing/2014/main" id="{638513C0-3433-23AD-1544-979A2D121342}"/>
-              </a:ext>
-            </a:extLst>
-          </p:cNvPr>
+          <p:cNvPr id="6" name="Slide Number Placeholder 5"/>
           <p:cNvSpPr>
             <a:spLocks noGrp="1"/>
           </p:cNvSpPr>
@@ -1202,7 +1060,7 @@
     </p:spTree>
     <p:extLst>
       <p:ext uri="{BB962C8B-B14F-4D97-AF65-F5344CB8AC3E}">
-        <p14:creationId xmlns:p14="http://schemas.microsoft.com/office/powerpoint/2010/main" val="1636928845"/>
+        <p14:creationId xmlns:p14="http://schemas.microsoft.com/office/powerpoint/2010/main" val="1920720085"/>
       </p:ext>
     </p:extLst>
   </p:cSld>
@@ -1231,13 +1089,7 @@
       </p:grpSpPr>
       <p:sp>
         <p:nvSpPr>
-          <p:cNvPr id="2" name="Title 1">
-            <a:extLst>
-              <a:ext uri="{FF2B5EF4-FFF2-40B4-BE49-F238E27FC236}">
-                <a16:creationId xmlns:a16="http://schemas.microsoft.com/office/drawing/2014/main" id="{1F390BF4-69BC-281A-DDFD-E922AC86A23A}"/>
-              </a:ext>
-            </a:extLst>
-          </p:cNvPr>
+          <p:cNvPr id="2" name="Title 1"/>
           <p:cNvSpPr>
             <a:spLocks noGrp="1"/>
           </p:cNvSpPr>
@@ -1254,18 +1106,13 @@
               <a:rPr lang="en-GB"/>
               <a:t>Click to edit Master title style</a:t>
             </a:r>
-          </a:p>
-        </p:txBody>
-      </p:sp>
-      <p:sp>
-        <p:nvSpPr>
-          <p:cNvPr id="3" name="Content Placeholder 2">
-            <a:extLst>
-              <a:ext uri="{FF2B5EF4-FFF2-40B4-BE49-F238E27FC236}">
-                <a16:creationId xmlns:a16="http://schemas.microsoft.com/office/drawing/2014/main" id="{B834F1D1-FD29-D7B6-12F3-1C45C0B36C8B}"/>
-              </a:ext>
-            </a:extLst>
-          </p:cNvPr>
+            <a:endParaRPr lang="en-US" dirty="0"/>
+          </a:p>
+        </p:txBody>
+      </p:sp>
+      <p:sp>
+        <p:nvSpPr>
+          <p:cNvPr id="3" name="Content Placeholder 2"/>
           <p:cNvSpPr>
             <a:spLocks noGrp="1"/>
           </p:cNvSpPr>
@@ -1275,8 +1122,8 @@
         </p:nvSpPr>
         <p:spPr>
           <a:xfrm>
-            <a:off x="838200" y="1825625"/>
-            <a:ext cx="5181600" cy="4351338"/>
+            <a:off x="841474" y="3258233"/>
+            <a:ext cx="5201841" cy="7765930"/>
           </a:xfrm>
         </p:spPr>
         <p:txBody>
@@ -1316,18 +1163,13 @@
               <a:rPr lang="en-GB"/>
               <a:t>Fifth level</a:t>
             </a:r>
-          </a:p>
-        </p:txBody>
-      </p:sp>
-      <p:sp>
-        <p:nvSpPr>
-          <p:cNvPr id="4" name="Content Placeholder 3">
-            <a:extLst>
-              <a:ext uri="{FF2B5EF4-FFF2-40B4-BE49-F238E27FC236}">
-                <a16:creationId xmlns:a16="http://schemas.microsoft.com/office/drawing/2014/main" id="{E726E3AA-FDBC-50AD-A67E-1C9E2B8C734B}"/>
-              </a:ext>
-            </a:extLst>
-          </p:cNvPr>
+            <a:endParaRPr lang="en-US" dirty="0"/>
+          </a:p>
+        </p:txBody>
+      </p:sp>
+      <p:sp>
+        <p:nvSpPr>
+          <p:cNvPr id="4" name="Content Placeholder 3"/>
           <p:cNvSpPr>
             <a:spLocks noGrp="1"/>
           </p:cNvSpPr>
@@ -1337,8 +1179,8 @@
         </p:nvSpPr>
         <p:spPr>
           <a:xfrm>
-            <a:off x="6172200" y="1825625"/>
-            <a:ext cx="5181600" cy="4351338"/>
+            <a:off x="6196310" y="3258233"/>
+            <a:ext cx="5201841" cy="7765930"/>
           </a:xfrm>
         </p:spPr>
         <p:txBody>
@@ -1378,18 +1220,13 @@
               <a:rPr lang="en-GB"/>
               <a:t>Fifth level</a:t>
             </a:r>
-          </a:p>
-        </p:txBody>
-      </p:sp>
-      <p:sp>
-        <p:nvSpPr>
-          <p:cNvPr id="5" name="Date Placeholder 4">
-            <a:extLst>
-              <a:ext uri="{FF2B5EF4-FFF2-40B4-BE49-F238E27FC236}">
-                <a16:creationId xmlns:a16="http://schemas.microsoft.com/office/drawing/2014/main" id="{A30D9E6E-D644-105A-9710-E60413570E86}"/>
-              </a:ext>
-            </a:extLst>
-          </p:cNvPr>
+            <a:endParaRPr lang="en-US" dirty="0"/>
+          </a:p>
+        </p:txBody>
+      </p:sp>
+      <p:sp>
+        <p:nvSpPr>
+          <p:cNvPr id="5" name="Date Placeholder 4"/>
           <p:cNvSpPr>
             <a:spLocks noGrp="1"/>
           </p:cNvSpPr>
@@ -1404,7 +1241,7 @@
           <a:p>
             <a:fld id="{435879AB-E60A-4261-98DA-0C718B428030}" type="datetimeFigureOut">
               <a:rPr lang="en-GB" smtClean="0"/>
-              <a:t>11/04/2026</a:t>
+              <a:t>17/04/2026</a:t>
             </a:fld>
             <a:endParaRPr lang="en-GB"/>
           </a:p>
@@ -1412,13 +1249,7 @@
       </p:sp>
       <p:sp>
         <p:nvSpPr>
-          <p:cNvPr id="6" name="Footer Placeholder 5">
-            <a:extLst>
-              <a:ext uri="{FF2B5EF4-FFF2-40B4-BE49-F238E27FC236}">
-                <a16:creationId xmlns:a16="http://schemas.microsoft.com/office/drawing/2014/main" id="{8B0D8CB1-1374-1DD0-3029-36683038A4C0}"/>
-              </a:ext>
-            </a:extLst>
-          </p:cNvPr>
+          <p:cNvPr id="6" name="Footer Placeholder 5"/>
           <p:cNvSpPr>
             <a:spLocks noGrp="1"/>
           </p:cNvSpPr>
@@ -1437,13 +1268,7 @@
       </p:sp>
       <p:sp>
         <p:nvSpPr>
-          <p:cNvPr id="7" name="Slide Number Placeholder 6">
-            <a:extLst>
-              <a:ext uri="{FF2B5EF4-FFF2-40B4-BE49-F238E27FC236}">
-                <a16:creationId xmlns:a16="http://schemas.microsoft.com/office/drawing/2014/main" id="{ACD282FC-D8DF-8F49-9339-05F59D4042D8}"/>
-              </a:ext>
-            </a:extLst>
-          </p:cNvPr>
+          <p:cNvPr id="7" name="Slide Number Placeholder 6"/>
           <p:cNvSpPr>
             <a:spLocks noGrp="1"/>
           </p:cNvSpPr>
@@ -1467,7 +1292,7 @@
     </p:spTree>
     <p:extLst>
       <p:ext uri="{BB962C8B-B14F-4D97-AF65-F5344CB8AC3E}">
-        <p14:creationId xmlns:p14="http://schemas.microsoft.com/office/powerpoint/2010/main" val="556842382"/>
+        <p14:creationId xmlns:p14="http://schemas.microsoft.com/office/powerpoint/2010/main" val="1718018531"/>
       </p:ext>
     </p:extLst>
   </p:cSld>
@@ -1496,13 +1321,7 @@
       </p:grpSpPr>
       <p:sp>
         <p:nvSpPr>
-          <p:cNvPr id="2" name="Title 1">
-            <a:extLst>
-              <a:ext uri="{FF2B5EF4-FFF2-40B4-BE49-F238E27FC236}">
-                <a16:creationId xmlns:a16="http://schemas.microsoft.com/office/drawing/2014/main" id="{CFFFA5D1-DA92-068E-AB2D-E7D23EFD6DFE}"/>
-              </a:ext>
-            </a:extLst>
-          </p:cNvPr>
+          <p:cNvPr id="2" name="Title 1"/>
           <p:cNvSpPr>
             <a:spLocks noGrp="1"/>
           </p:cNvSpPr>
@@ -1512,8 +1331,8 @@
         </p:nvSpPr>
         <p:spPr>
           <a:xfrm>
-            <a:off x="839788" y="365125"/>
-            <a:ext cx="10515600" cy="1325563"/>
+            <a:off x="843068" y="651649"/>
+            <a:ext cx="10556677" cy="2365762"/>
           </a:xfrm>
         </p:spPr>
         <p:txBody>
@@ -1524,18 +1343,13 @@
               <a:rPr lang="en-GB"/>
               <a:t>Click to edit Master title style</a:t>
             </a:r>
-          </a:p>
-        </p:txBody>
-      </p:sp>
-      <p:sp>
-        <p:nvSpPr>
-          <p:cNvPr id="3" name="Text Placeholder 2">
-            <a:extLst>
-              <a:ext uri="{FF2B5EF4-FFF2-40B4-BE49-F238E27FC236}">
-                <a16:creationId xmlns:a16="http://schemas.microsoft.com/office/drawing/2014/main" id="{F0618667-2446-1605-CECA-8EFCDA3C6C8C}"/>
-              </a:ext>
-            </a:extLst>
-          </p:cNvPr>
+            <a:endParaRPr lang="en-US" dirty="0"/>
+          </a:p>
+        </p:txBody>
+      </p:sp>
+      <p:sp>
+        <p:nvSpPr>
+          <p:cNvPr id="3" name="Text Placeholder 2"/>
           <p:cNvSpPr>
             <a:spLocks noGrp="1"/>
           </p:cNvSpPr>
@@ -1545,8 +1359,8 @@
         </p:nvSpPr>
         <p:spPr>
           <a:xfrm>
-            <a:off x="839788" y="1681163"/>
-            <a:ext cx="5157787" cy="823912"/>
+            <a:off x="843070" y="3000409"/>
+            <a:ext cx="5177934" cy="1470454"/>
           </a:xfrm>
         </p:spPr>
         <p:txBody>
@@ -1554,39 +1368,39 @@
           <a:lstStyle>
             <a:lvl1pPr marL="0" indent="0">
               <a:buNone/>
-              <a:defRPr sz="2400" b="1"/>
+              <a:defRPr sz="3212" b="1"/>
             </a:lvl1pPr>
-            <a:lvl2pPr marL="457200" indent="0">
+            <a:lvl2pPr marL="611962" indent="0">
               <a:buNone/>
-              <a:defRPr sz="2000" b="1"/>
+              <a:defRPr sz="2677" b="1"/>
             </a:lvl2pPr>
-            <a:lvl3pPr marL="914400" indent="0">
+            <a:lvl3pPr marL="1223924" indent="0">
               <a:buNone/>
-              <a:defRPr sz="1800" b="1"/>
+              <a:defRPr sz="2409" b="1"/>
             </a:lvl3pPr>
-            <a:lvl4pPr marL="1371600" indent="0">
+            <a:lvl4pPr marL="1835887" indent="0">
               <a:buNone/>
-              <a:defRPr sz="1600" b="1"/>
+              <a:defRPr sz="2142" b="1"/>
             </a:lvl4pPr>
-            <a:lvl5pPr marL="1828800" indent="0">
+            <a:lvl5pPr marL="2447849" indent="0">
               <a:buNone/>
-              <a:defRPr sz="1600" b="1"/>
+              <a:defRPr sz="2142" b="1"/>
             </a:lvl5pPr>
-            <a:lvl6pPr marL="2286000" indent="0">
+            <a:lvl6pPr marL="3059811" indent="0">
               <a:buNone/>
-              <a:defRPr sz="1600" b="1"/>
+              <a:defRPr sz="2142" b="1"/>
             </a:lvl6pPr>
-            <a:lvl7pPr marL="2743200" indent="0">
+            <a:lvl7pPr marL="3671773" indent="0">
               <a:buNone/>
-              <a:defRPr sz="1600" b="1"/>
+              <a:defRPr sz="2142" b="1"/>
             </a:lvl7pPr>
-            <a:lvl8pPr marL="3200400" indent="0">
+            <a:lvl8pPr marL="4283735" indent="0">
               <a:buNone/>
-              <a:defRPr sz="1600" b="1"/>
+              <a:defRPr sz="2142" b="1"/>
             </a:lvl8pPr>
-            <a:lvl9pPr marL="3657600" indent="0">
+            <a:lvl9pPr marL="4895698" indent="0">
               <a:buNone/>
-              <a:defRPr sz="1600" b="1"/>
+              <a:defRPr sz="2142" b="1"/>
             </a:lvl9pPr>
           </a:lstStyle>
           <a:p>
@@ -1600,13 +1414,7 @@
       </p:sp>
       <p:sp>
         <p:nvSpPr>
-          <p:cNvPr id="4" name="Content Placeholder 3">
-            <a:extLst>
-              <a:ext uri="{FF2B5EF4-FFF2-40B4-BE49-F238E27FC236}">
-                <a16:creationId xmlns:a16="http://schemas.microsoft.com/office/drawing/2014/main" id="{3ABC6CCC-43BB-27D9-56A5-77BEB994E608}"/>
-              </a:ext>
-            </a:extLst>
-          </p:cNvPr>
+          <p:cNvPr id="4" name="Content Placeholder 3"/>
           <p:cNvSpPr>
             <a:spLocks noGrp="1"/>
           </p:cNvSpPr>
@@ -1616,8 +1424,8 @@
         </p:nvSpPr>
         <p:spPr>
           <a:xfrm>
-            <a:off x="839788" y="2505075"/>
-            <a:ext cx="5157787" cy="3684588"/>
+            <a:off x="843070" y="4470863"/>
+            <a:ext cx="5177934" cy="6575966"/>
           </a:xfrm>
         </p:spPr>
         <p:txBody>
@@ -1657,18 +1465,13 @@
               <a:rPr lang="en-GB"/>
               <a:t>Fifth level</a:t>
             </a:r>
-          </a:p>
-        </p:txBody>
-      </p:sp>
-      <p:sp>
-        <p:nvSpPr>
-          <p:cNvPr id="5" name="Text Placeholder 4">
-            <a:extLst>
-              <a:ext uri="{FF2B5EF4-FFF2-40B4-BE49-F238E27FC236}">
-                <a16:creationId xmlns:a16="http://schemas.microsoft.com/office/drawing/2014/main" id="{882AAD4F-897D-C2E4-56F1-47F2B503DCE7}"/>
-              </a:ext>
-            </a:extLst>
-          </p:cNvPr>
+            <a:endParaRPr lang="en-US" dirty="0"/>
+          </a:p>
+        </p:txBody>
+      </p:sp>
+      <p:sp>
+        <p:nvSpPr>
+          <p:cNvPr id="5" name="Text Placeholder 4"/>
           <p:cNvSpPr>
             <a:spLocks noGrp="1"/>
           </p:cNvSpPr>
@@ -1678,8 +1481,8 @@
         </p:nvSpPr>
         <p:spPr>
           <a:xfrm>
-            <a:off x="6172200" y="1681163"/>
-            <a:ext cx="5183188" cy="823912"/>
+            <a:off x="6196311" y="3000409"/>
+            <a:ext cx="5203435" cy="1470454"/>
           </a:xfrm>
         </p:spPr>
         <p:txBody>
@@ -1687,39 +1490,39 @@
           <a:lstStyle>
             <a:lvl1pPr marL="0" indent="0">
               <a:buNone/>
-              <a:defRPr sz="2400" b="1"/>
+              <a:defRPr sz="3212" b="1"/>
             </a:lvl1pPr>
-            <a:lvl2pPr marL="457200" indent="0">
+            <a:lvl2pPr marL="611962" indent="0">
               <a:buNone/>
-              <a:defRPr sz="2000" b="1"/>
+              <a:defRPr sz="2677" b="1"/>
             </a:lvl2pPr>
-            <a:lvl3pPr marL="914400" indent="0">
+            <a:lvl3pPr marL="1223924" indent="0">
               <a:buNone/>
-              <a:defRPr sz="1800" b="1"/>
+              <a:defRPr sz="2409" b="1"/>
             </a:lvl3pPr>
-            <a:lvl4pPr marL="1371600" indent="0">
+            <a:lvl4pPr marL="1835887" indent="0">
               <a:buNone/>
-              <a:defRPr sz="1600" b="1"/>
+              <a:defRPr sz="2142" b="1"/>
             </a:lvl4pPr>
-            <a:lvl5pPr marL="1828800" indent="0">
+            <a:lvl5pPr marL="2447849" indent="0">
               <a:buNone/>
-              <a:defRPr sz="1600" b="1"/>
+              <a:defRPr sz="2142" b="1"/>
             </a:lvl5pPr>
-            <a:lvl6pPr marL="2286000" indent="0">
+            <a:lvl6pPr marL="3059811" indent="0">
               <a:buNone/>
-              <a:defRPr sz="1600" b="1"/>
+              <a:defRPr sz="2142" b="1"/>
             </a:lvl6pPr>
-            <a:lvl7pPr marL="2743200" indent="0">
+            <a:lvl7pPr marL="3671773" indent="0">
               <a:buNone/>
-              <a:defRPr sz="1600" b="1"/>
+              <a:defRPr sz="2142" b="1"/>
             </a:lvl7pPr>
-            <a:lvl8pPr marL="3200400" indent="0">
+            <a:lvl8pPr marL="4283735" indent="0">
               <a:buNone/>
-              <a:defRPr sz="1600" b="1"/>
+              <a:defRPr sz="2142" b="1"/>
             </a:lvl8pPr>
-            <a:lvl9pPr marL="3657600" indent="0">
+            <a:lvl9pPr marL="4895698" indent="0">
               <a:buNone/>
-              <a:defRPr sz="1600" b="1"/>
+              <a:defRPr sz="2142" b="1"/>
             </a:lvl9pPr>
           </a:lstStyle>
           <a:p>
@@ -1733,13 +1536,7 @@
       </p:sp>
       <p:sp>
         <p:nvSpPr>
-          <p:cNvPr id="6" name="Content Placeholder 5">
-            <a:extLst>
-              <a:ext uri="{FF2B5EF4-FFF2-40B4-BE49-F238E27FC236}">
-                <a16:creationId xmlns:a16="http://schemas.microsoft.com/office/drawing/2014/main" id="{C50B5488-3B2D-59C1-18D0-8248EB9DDEAE}"/>
-              </a:ext>
-            </a:extLst>
-          </p:cNvPr>
+          <p:cNvPr id="6" name="Content Placeholder 5"/>
           <p:cNvSpPr>
             <a:spLocks noGrp="1"/>
           </p:cNvSpPr>
@@ -1749,8 +1546,8 @@
         </p:nvSpPr>
         <p:spPr>
           <a:xfrm>
-            <a:off x="6172200" y="2505075"/>
-            <a:ext cx="5183188" cy="3684588"/>
+            <a:off x="6196311" y="4470863"/>
+            <a:ext cx="5203435" cy="6575966"/>
           </a:xfrm>
         </p:spPr>
         <p:txBody>
@@ -1790,18 +1587,13 @@
               <a:rPr lang="en-GB"/>
               <a:t>Fifth level</a:t>
             </a:r>
-          </a:p>
-        </p:txBody>
-      </p:sp>
-      <p:sp>
-        <p:nvSpPr>
-          <p:cNvPr id="7" name="Date Placeholder 6">
-            <a:extLst>
-              <a:ext uri="{FF2B5EF4-FFF2-40B4-BE49-F238E27FC236}">
-                <a16:creationId xmlns:a16="http://schemas.microsoft.com/office/drawing/2014/main" id="{4F49FA5A-84C1-517C-FE71-78C39D2F9633}"/>
-              </a:ext>
-            </a:extLst>
-          </p:cNvPr>
+            <a:endParaRPr lang="en-US" dirty="0"/>
+          </a:p>
+        </p:txBody>
+      </p:sp>
+      <p:sp>
+        <p:nvSpPr>
+          <p:cNvPr id="7" name="Date Placeholder 6"/>
           <p:cNvSpPr>
             <a:spLocks noGrp="1"/>
           </p:cNvSpPr>
@@ -1816,7 +1608,7 @@
           <a:p>
             <a:fld id="{435879AB-E60A-4261-98DA-0C718B428030}" type="datetimeFigureOut">
               <a:rPr lang="en-GB" smtClean="0"/>
-              <a:t>11/04/2026</a:t>
+              <a:t>17/04/2026</a:t>
             </a:fld>
             <a:endParaRPr lang="en-GB"/>
           </a:p>
@@ -1824,13 +1616,7 @@
       </p:sp>
       <p:sp>
         <p:nvSpPr>
-          <p:cNvPr id="8" name="Footer Placeholder 7">
-            <a:extLst>
-              <a:ext uri="{FF2B5EF4-FFF2-40B4-BE49-F238E27FC236}">
-                <a16:creationId xmlns:a16="http://schemas.microsoft.com/office/drawing/2014/main" id="{B0C1EFA9-864A-7994-FCC0-53D540339B27}"/>
-              </a:ext>
-            </a:extLst>
-          </p:cNvPr>
+          <p:cNvPr id="8" name="Footer Placeholder 7"/>
           <p:cNvSpPr>
             <a:spLocks noGrp="1"/>
           </p:cNvSpPr>
@@ -1849,13 +1635,7 @@
       </p:sp>
       <p:sp>
         <p:nvSpPr>
-          <p:cNvPr id="9" name="Slide Number Placeholder 8">
-            <a:extLst>
-              <a:ext uri="{FF2B5EF4-FFF2-40B4-BE49-F238E27FC236}">
-                <a16:creationId xmlns:a16="http://schemas.microsoft.com/office/drawing/2014/main" id="{6167ED7C-69D2-3EA8-551A-8053B1E9FCA3}"/>
-              </a:ext>
-            </a:extLst>
-          </p:cNvPr>
+          <p:cNvPr id="9" name="Slide Number Placeholder 8"/>
           <p:cNvSpPr>
             <a:spLocks noGrp="1"/>
           </p:cNvSpPr>
@@ -1879,7 +1659,7 @@
     </p:spTree>
     <p:extLst>
       <p:ext uri="{BB962C8B-B14F-4D97-AF65-F5344CB8AC3E}">
-        <p14:creationId xmlns:p14="http://schemas.microsoft.com/office/powerpoint/2010/main" val="1170659975"/>
+        <p14:creationId xmlns:p14="http://schemas.microsoft.com/office/powerpoint/2010/main" val="1792845343"/>
       </p:ext>
     </p:extLst>
   </p:cSld>
@@ -1908,13 +1688,7 @@
       </p:grpSpPr>
       <p:sp>
         <p:nvSpPr>
-          <p:cNvPr id="2" name="Title 1">
-            <a:extLst>
-              <a:ext uri="{FF2B5EF4-FFF2-40B4-BE49-F238E27FC236}">
-                <a16:creationId xmlns:a16="http://schemas.microsoft.com/office/drawing/2014/main" id="{D2C3FE2D-FFD0-09F0-BBA6-5E7BC1E465D3}"/>
-              </a:ext>
-            </a:extLst>
-          </p:cNvPr>
+          <p:cNvPr id="2" name="Title 1"/>
           <p:cNvSpPr>
             <a:spLocks noGrp="1"/>
           </p:cNvSpPr>
@@ -1931,18 +1705,13 @@
               <a:rPr lang="en-GB"/>
               <a:t>Click to edit Master title style</a:t>
             </a:r>
-          </a:p>
-        </p:txBody>
-      </p:sp>
-      <p:sp>
-        <p:nvSpPr>
-          <p:cNvPr id="3" name="Date Placeholder 2">
-            <a:extLst>
-              <a:ext uri="{FF2B5EF4-FFF2-40B4-BE49-F238E27FC236}">
-                <a16:creationId xmlns:a16="http://schemas.microsoft.com/office/drawing/2014/main" id="{690C0C0C-4CEA-6C79-74DB-2AE5EA67473B}"/>
-              </a:ext>
-            </a:extLst>
-          </p:cNvPr>
+            <a:endParaRPr lang="en-US" dirty="0"/>
+          </a:p>
+        </p:txBody>
+      </p:sp>
+      <p:sp>
+        <p:nvSpPr>
+          <p:cNvPr id="3" name="Date Placeholder 2"/>
           <p:cNvSpPr>
             <a:spLocks noGrp="1"/>
           </p:cNvSpPr>
@@ -1957,7 +1726,7 @@
           <a:p>
             <a:fld id="{435879AB-E60A-4261-98DA-0C718B428030}" type="datetimeFigureOut">
               <a:rPr lang="en-GB" smtClean="0"/>
-              <a:t>11/04/2026</a:t>
+              <a:t>17/04/2026</a:t>
             </a:fld>
             <a:endParaRPr lang="en-GB"/>
           </a:p>
@@ -1965,13 +1734,7 @@
       </p:sp>
       <p:sp>
         <p:nvSpPr>
-          <p:cNvPr id="4" name="Footer Placeholder 3">
-            <a:extLst>
-              <a:ext uri="{FF2B5EF4-FFF2-40B4-BE49-F238E27FC236}">
-                <a16:creationId xmlns:a16="http://schemas.microsoft.com/office/drawing/2014/main" id="{9982BE28-D1C6-B0E8-7FFA-7AB83D01C89C}"/>
-              </a:ext>
-            </a:extLst>
-          </p:cNvPr>
+          <p:cNvPr id="4" name="Footer Placeholder 3"/>
           <p:cNvSpPr>
             <a:spLocks noGrp="1"/>
           </p:cNvSpPr>
@@ -1990,13 +1753,7 @@
       </p:sp>
       <p:sp>
         <p:nvSpPr>
-          <p:cNvPr id="5" name="Slide Number Placeholder 4">
-            <a:extLst>
-              <a:ext uri="{FF2B5EF4-FFF2-40B4-BE49-F238E27FC236}">
-                <a16:creationId xmlns:a16="http://schemas.microsoft.com/office/drawing/2014/main" id="{E127E81E-5A6E-043F-F5AC-900CB70E3F1B}"/>
-              </a:ext>
-            </a:extLst>
-          </p:cNvPr>
+          <p:cNvPr id="5" name="Slide Number Placeholder 4"/>
           <p:cNvSpPr>
             <a:spLocks noGrp="1"/>
           </p:cNvSpPr>
@@ -2020,7 +1777,7 @@
     </p:spTree>
     <p:extLst>
       <p:ext uri="{BB962C8B-B14F-4D97-AF65-F5344CB8AC3E}">
-        <p14:creationId xmlns:p14="http://schemas.microsoft.com/office/powerpoint/2010/main" val="1854157119"/>
+        <p14:creationId xmlns:p14="http://schemas.microsoft.com/office/powerpoint/2010/main" val="1703744614"/>
       </p:ext>
     </p:extLst>
   </p:cSld>
@@ -2049,13 +1806,7 @@
       </p:grpSpPr>
       <p:sp>
         <p:nvSpPr>
-          <p:cNvPr id="2" name="Date Placeholder 1">
-            <a:extLst>
-              <a:ext uri="{FF2B5EF4-FFF2-40B4-BE49-F238E27FC236}">
-                <a16:creationId xmlns:a16="http://schemas.microsoft.com/office/drawing/2014/main" id="{A685F3AF-8390-B4A8-61EE-BB83608FDBC0}"/>
-              </a:ext>
-            </a:extLst>
-          </p:cNvPr>
+          <p:cNvPr id="2" name="Date Placeholder 1"/>
           <p:cNvSpPr>
             <a:spLocks noGrp="1"/>
           </p:cNvSpPr>
@@ -2070,7 +1821,7 @@
           <a:p>
             <a:fld id="{435879AB-E60A-4261-98DA-0C718B428030}" type="datetimeFigureOut">
               <a:rPr lang="en-GB" smtClean="0"/>
-              <a:t>11/04/2026</a:t>
+              <a:t>17/04/2026</a:t>
             </a:fld>
             <a:endParaRPr lang="en-GB"/>
           </a:p>
@@ -2078,13 +1829,7 @@
       </p:sp>
       <p:sp>
         <p:nvSpPr>
-          <p:cNvPr id="3" name="Footer Placeholder 2">
-            <a:extLst>
-              <a:ext uri="{FF2B5EF4-FFF2-40B4-BE49-F238E27FC236}">
-                <a16:creationId xmlns:a16="http://schemas.microsoft.com/office/drawing/2014/main" id="{05B0CAE0-9305-26C9-30FF-378BE38C2CED}"/>
-              </a:ext>
-            </a:extLst>
-          </p:cNvPr>
+          <p:cNvPr id="3" name="Footer Placeholder 2"/>
           <p:cNvSpPr>
             <a:spLocks noGrp="1"/>
           </p:cNvSpPr>
@@ -2103,13 +1848,7 @@
       </p:sp>
       <p:sp>
         <p:nvSpPr>
-          <p:cNvPr id="4" name="Slide Number Placeholder 3">
-            <a:extLst>
-              <a:ext uri="{FF2B5EF4-FFF2-40B4-BE49-F238E27FC236}">
-                <a16:creationId xmlns:a16="http://schemas.microsoft.com/office/drawing/2014/main" id="{5F9DE0AE-4A49-E619-18E7-493F6FA2AFA5}"/>
-              </a:ext>
-            </a:extLst>
-          </p:cNvPr>
+          <p:cNvPr id="4" name="Slide Number Placeholder 3"/>
           <p:cNvSpPr>
             <a:spLocks noGrp="1"/>
           </p:cNvSpPr>
@@ -2133,7 +1872,7 @@
     </p:spTree>
     <p:extLst>
       <p:ext uri="{BB962C8B-B14F-4D97-AF65-F5344CB8AC3E}">
-        <p14:creationId xmlns:p14="http://schemas.microsoft.com/office/powerpoint/2010/main" val="3828766798"/>
+        <p14:creationId xmlns:p14="http://schemas.microsoft.com/office/powerpoint/2010/main" val="155181544"/>
       </p:ext>
     </p:extLst>
   </p:cSld>
@@ -2162,13 +1901,7 @@
       </p:grpSpPr>
       <p:sp>
         <p:nvSpPr>
-          <p:cNvPr id="2" name="Title 1">
-            <a:extLst>
-              <a:ext uri="{FF2B5EF4-FFF2-40B4-BE49-F238E27FC236}">
-                <a16:creationId xmlns:a16="http://schemas.microsoft.com/office/drawing/2014/main" id="{449DD909-58C4-C70A-7D1F-DA73BAB177B1}"/>
-              </a:ext>
-            </a:extLst>
-          </p:cNvPr>
+          <p:cNvPr id="2" name="Title 1"/>
           <p:cNvSpPr>
             <a:spLocks noGrp="1"/>
           </p:cNvSpPr>
@@ -2178,15 +1911,15 @@
         </p:nvSpPr>
         <p:spPr>
           <a:xfrm>
-            <a:off x="839788" y="457200"/>
-            <a:ext cx="3932237" cy="1600200"/>
+            <a:off x="843068" y="815975"/>
+            <a:ext cx="3947598" cy="2855913"/>
           </a:xfrm>
         </p:spPr>
         <p:txBody>
           <a:bodyPr anchor="b"/>
           <a:lstStyle>
             <a:lvl1pPr>
-              <a:defRPr sz="3200"/>
+              <a:defRPr sz="4283"/>
             </a:lvl1pPr>
           </a:lstStyle>
           <a:p>
@@ -2194,18 +1927,13 @@
               <a:rPr lang="en-GB"/>
               <a:t>Click to edit Master title style</a:t>
             </a:r>
-          </a:p>
-        </p:txBody>
-      </p:sp>
-      <p:sp>
-        <p:nvSpPr>
-          <p:cNvPr id="3" name="Content Placeholder 2">
-            <a:extLst>
-              <a:ext uri="{FF2B5EF4-FFF2-40B4-BE49-F238E27FC236}">
-                <a16:creationId xmlns:a16="http://schemas.microsoft.com/office/drawing/2014/main" id="{30B9850C-3B85-A79A-C68A-4A73A5DDB1A9}"/>
-              </a:ext>
-            </a:extLst>
-          </p:cNvPr>
+            <a:endParaRPr lang="en-US" dirty="0"/>
+          </a:p>
+        </p:txBody>
+      </p:sp>
+      <p:sp>
+        <p:nvSpPr>
+          <p:cNvPr id="3" name="Content Placeholder 2"/>
           <p:cNvSpPr>
             <a:spLocks noGrp="1"/>
           </p:cNvSpPr>
@@ -2215,39 +1943,39 @@
         </p:nvSpPr>
         <p:spPr>
           <a:xfrm>
-            <a:off x="5183188" y="987425"/>
-            <a:ext cx="6172200" cy="4873625"/>
+            <a:off x="5203435" y="1762282"/>
+            <a:ext cx="6196310" cy="8698067"/>
           </a:xfrm>
         </p:spPr>
         <p:txBody>
           <a:bodyPr/>
           <a:lstStyle>
             <a:lvl1pPr>
-              <a:defRPr sz="3200"/>
+              <a:defRPr sz="4283"/>
             </a:lvl1pPr>
             <a:lvl2pPr>
-              <a:defRPr sz="2800"/>
+              <a:defRPr sz="3748"/>
             </a:lvl2pPr>
             <a:lvl3pPr>
-              <a:defRPr sz="2400"/>
+              <a:defRPr sz="3212"/>
             </a:lvl3pPr>
             <a:lvl4pPr>
-              <a:defRPr sz="2000"/>
+              <a:defRPr sz="2677"/>
             </a:lvl4pPr>
             <a:lvl5pPr>
-              <a:defRPr sz="2000"/>
+              <a:defRPr sz="2677"/>
             </a:lvl5pPr>
             <a:lvl6pPr>
-              <a:defRPr sz="2000"/>
+              <a:defRPr sz="2677"/>
             </a:lvl6pPr>
             <a:lvl7pPr>
-              <a:defRPr sz="2000"/>
+              <a:defRPr sz="2677"/>
             </a:lvl7pPr>
             <a:lvl8pPr>
-              <a:defRPr sz="2000"/>
+              <a:defRPr sz="2677"/>
             </a:lvl8pPr>
             <a:lvl9pPr>
-              <a:defRPr sz="2000"/>
+              <a:defRPr sz="2677"/>
             </a:lvl9pPr>
           </a:lstStyle>
           <a:p>
@@ -2284,18 +2012,13 @@
               <a:rPr lang="en-GB"/>
               <a:t>Fifth level</a:t>
             </a:r>
-          </a:p>
-        </p:txBody>
-      </p:sp>
-      <p:sp>
-        <p:nvSpPr>
-          <p:cNvPr id="4" name="Text Placeholder 3">
-            <a:extLst>
-              <a:ext uri="{FF2B5EF4-FFF2-40B4-BE49-F238E27FC236}">
-                <a16:creationId xmlns:a16="http://schemas.microsoft.com/office/drawing/2014/main" id="{3BDBB8C5-E221-BA82-C883-D8973F77B6F7}"/>
-              </a:ext>
-            </a:extLst>
-          </p:cNvPr>
+            <a:endParaRPr lang="en-US" dirty="0"/>
+          </a:p>
+        </p:txBody>
+      </p:sp>
+      <p:sp>
+        <p:nvSpPr>
+          <p:cNvPr id="4" name="Text Placeholder 3"/>
           <p:cNvSpPr>
             <a:spLocks noGrp="1"/>
           </p:cNvSpPr>
@@ -2305,8 +2028,8 @@
         </p:nvSpPr>
         <p:spPr>
           <a:xfrm>
-            <a:off x="839788" y="2057400"/>
-            <a:ext cx="3932237" cy="3811588"/>
+            <a:off x="843068" y="3671887"/>
+            <a:ext cx="3947598" cy="6802626"/>
           </a:xfrm>
         </p:spPr>
         <p:txBody>
@@ -2314,39 +2037,39 @@
           <a:lstStyle>
             <a:lvl1pPr marL="0" indent="0">
               <a:buNone/>
-              <a:defRPr sz="1600"/>
+              <a:defRPr sz="2142"/>
             </a:lvl1pPr>
-            <a:lvl2pPr marL="457200" indent="0">
+            <a:lvl2pPr marL="611962" indent="0">
               <a:buNone/>
-              <a:defRPr sz="1400"/>
+              <a:defRPr sz="1874"/>
             </a:lvl2pPr>
-            <a:lvl3pPr marL="914400" indent="0">
+            <a:lvl3pPr marL="1223924" indent="0">
               <a:buNone/>
-              <a:defRPr sz="1200"/>
+              <a:defRPr sz="1606"/>
             </a:lvl3pPr>
-            <a:lvl4pPr marL="1371600" indent="0">
+            <a:lvl4pPr marL="1835887" indent="0">
               <a:buNone/>
-              <a:defRPr sz="1000"/>
+              <a:defRPr sz="1339"/>
             </a:lvl4pPr>
-            <a:lvl5pPr marL="1828800" indent="0">
+            <a:lvl5pPr marL="2447849" indent="0">
               <a:buNone/>
-              <a:defRPr sz="1000"/>
+              <a:defRPr sz="1339"/>
             </a:lvl5pPr>
-            <a:lvl6pPr marL="2286000" indent="0">
+            <a:lvl6pPr marL="3059811" indent="0">
               <a:buNone/>
-              <a:defRPr sz="1000"/>
+              <a:defRPr sz="1339"/>
             </a:lvl6pPr>
-            <a:lvl7pPr marL="2743200" indent="0">
+            <a:lvl7pPr marL="3671773" indent="0">
               <a:buNone/>
-              <a:defRPr sz="1000"/>
+              <a:defRPr sz="1339"/>
             </a:lvl7pPr>
-            <a:lvl8pPr marL="3200400" indent="0">
+            <a:lvl8pPr marL="4283735" indent="0">
               <a:buNone/>
-              <a:defRPr sz="1000"/>
+              <a:defRPr sz="1339"/>
             </a:lvl8pPr>
-            <a:lvl9pPr marL="3657600" indent="0">
+            <a:lvl9pPr marL="4895698" indent="0">
               <a:buNone/>
-              <a:defRPr sz="1000"/>
+              <a:defRPr sz="1339"/>
             </a:lvl9pPr>
           </a:lstStyle>
           <a:p>
@@ -2360,13 +2083,7 @@
       </p:sp>
       <p:sp>
         <p:nvSpPr>
-          <p:cNvPr id="5" name="Date Placeholder 4">
-            <a:extLst>
-              <a:ext uri="{FF2B5EF4-FFF2-40B4-BE49-F238E27FC236}">
-                <a16:creationId xmlns:a16="http://schemas.microsoft.com/office/drawing/2014/main" id="{3E18E93B-EAAF-A9E7-EBB3-94CE3730C0F0}"/>
-              </a:ext>
-            </a:extLst>
-          </p:cNvPr>
+          <p:cNvPr id="5" name="Date Placeholder 4"/>
           <p:cNvSpPr>
             <a:spLocks noGrp="1"/>
           </p:cNvSpPr>
@@ -2381,7 +2098,7 @@
           <a:p>
             <a:fld id="{435879AB-E60A-4261-98DA-0C718B428030}" type="datetimeFigureOut">
               <a:rPr lang="en-GB" smtClean="0"/>
-              <a:t>11/04/2026</a:t>
+              <a:t>17/04/2026</a:t>
             </a:fld>
             <a:endParaRPr lang="en-GB"/>
           </a:p>
@@ -2389,13 +2106,7 @@
       </p:sp>
       <p:sp>
         <p:nvSpPr>
-          <p:cNvPr id="6" name="Footer Placeholder 5">
-            <a:extLst>
-              <a:ext uri="{FF2B5EF4-FFF2-40B4-BE49-F238E27FC236}">
-                <a16:creationId xmlns:a16="http://schemas.microsoft.com/office/drawing/2014/main" id="{4682ABE8-2022-0FE7-74D5-FB8F879D1376}"/>
-              </a:ext>
-            </a:extLst>
-          </p:cNvPr>
+          <p:cNvPr id="6" name="Footer Placeholder 5"/>
           <p:cNvSpPr>
             <a:spLocks noGrp="1"/>
           </p:cNvSpPr>
@@ -2414,13 +2125,7 @@
       </p:sp>
       <p:sp>
         <p:nvSpPr>
-          <p:cNvPr id="7" name="Slide Number Placeholder 6">
-            <a:extLst>
-              <a:ext uri="{FF2B5EF4-FFF2-40B4-BE49-F238E27FC236}">
-                <a16:creationId xmlns:a16="http://schemas.microsoft.com/office/drawing/2014/main" id="{BC92229F-6B2C-DCFE-A3D7-0631426A93D6}"/>
-              </a:ext>
-            </a:extLst>
-          </p:cNvPr>
+          <p:cNvPr id="7" name="Slide Number Placeholder 6"/>
           <p:cNvSpPr>
             <a:spLocks noGrp="1"/>
           </p:cNvSpPr>
@@ -2444,7 +2149,7 @@
     </p:spTree>
     <p:extLst>
       <p:ext uri="{BB962C8B-B14F-4D97-AF65-F5344CB8AC3E}">
-        <p14:creationId xmlns:p14="http://schemas.microsoft.com/office/powerpoint/2010/main" val="837059280"/>
+        <p14:creationId xmlns:p14="http://schemas.microsoft.com/office/powerpoint/2010/main" val="561920351"/>
       </p:ext>
     </p:extLst>
   </p:cSld>
@@ -2473,13 +2178,7 @@
       </p:grpSpPr>
       <p:sp>
         <p:nvSpPr>
-          <p:cNvPr id="2" name="Title 1">
-            <a:extLst>
-              <a:ext uri="{FF2B5EF4-FFF2-40B4-BE49-F238E27FC236}">
-                <a16:creationId xmlns:a16="http://schemas.microsoft.com/office/drawing/2014/main" id="{F34B1A16-55D6-DAB4-7699-9DCDE7E3D62F}"/>
-              </a:ext>
-            </a:extLst>
-          </p:cNvPr>
+          <p:cNvPr id="2" name="Title 1"/>
           <p:cNvSpPr>
             <a:spLocks noGrp="1"/>
           </p:cNvSpPr>
@@ -2489,15 +2188,15 @@
         </p:nvSpPr>
         <p:spPr>
           <a:xfrm>
-            <a:off x="839788" y="457200"/>
-            <a:ext cx="3932237" cy="1600200"/>
+            <a:off x="843068" y="815975"/>
+            <a:ext cx="3947598" cy="2855913"/>
           </a:xfrm>
         </p:spPr>
         <p:txBody>
           <a:bodyPr anchor="b"/>
           <a:lstStyle>
             <a:lvl1pPr>
-              <a:defRPr sz="3200"/>
+              <a:defRPr sz="4283"/>
             </a:lvl1pPr>
           </a:lstStyle>
           <a:p>
@@ -2505,20 +2204,15 @@
               <a:rPr lang="en-GB"/>
               <a:t>Click to edit Master title style</a:t>
             </a:r>
-          </a:p>
-        </p:txBody>
-      </p:sp>
-      <p:sp>
-        <p:nvSpPr>
-          <p:cNvPr id="3" name="Picture Placeholder 2">
-            <a:extLst>
-              <a:ext uri="{FF2B5EF4-FFF2-40B4-BE49-F238E27FC236}">
-                <a16:creationId xmlns:a16="http://schemas.microsoft.com/office/drawing/2014/main" id="{99E49108-D0E7-F939-29E4-DADA4B82F7F4}"/>
-              </a:ext>
-            </a:extLst>
-          </p:cNvPr>
+            <a:endParaRPr lang="en-US" dirty="0"/>
+          </a:p>
+        </p:txBody>
+      </p:sp>
+      <p:sp>
+        <p:nvSpPr>
+          <p:cNvPr id="3" name="Picture Placeholder 2"/>
           <p:cNvSpPr>
-            <a:spLocks noGrp="1"/>
+            <a:spLocks noGrp="1" noChangeAspect="1"/>
           </p:cNvSpPr>
           <p:nvPr>
             <p:ph type="pic" idx="1"/>
@@ -2526,64 +2220,62 @@
         </p:nvSpPr>
         <p:spPr>
           <a:xfrm>
-            <a:off x="5183188" y="987425"/>
-            <a:ext cx="6172200" cy="4873625"/>
-          </a:xfrm>
-        </p:spPr>
-        <p:txBody>
-          <a:bodyPr/>
+            <a:off x="5203435" y="1762282"/>
+            <a:ext cx="6196310" cy="8698067"/>
+          </a:xfrm>
+        </p:spPr>
+        <p:txBody>
+          <a:bodyPr anchor="t"/>
           <a:lstStyle>
             <a:lvl1pPr marL="0" indent="0">
               <a:buNone/>
-              <a:defRPr sz="3200"/>
+              <a:defRPr sz="4283"/>
             </a:lvl1pPr>
-            <a:lvl2pPr marL="457200" indent="0">
+            <a:lvl2pPr marL="611962" indent="0">
               <a:buNone/>
-              <a:defRPr sz="2800"/>
+              <a:defRPr sz="3748"/>
             </a:lvl2pPr>
-            <a:lvl3pPr marL="914400" indent="0">
+            <a:lvl3pPr marL="1223924" indent="0">
               <a:buNone/>
-              <a:defRPr sz="2400"/>
+              <a:defRPr sz="3212"/>
             </a:lvl3pPr>
-            <a:lvl4pPr marL="1371600" indent="0">
+            <a:lvl4pPr marL="1835887" indent="0">
               <a:buNone/>
-              <a:defRPr sz="2000"/>
+              <a:defRPr sz="2677"/>
             </a:lvl4pPr>
-            <a:lvl5pPr marL="1828800" indent="0">
+            <a:lvl5pPr marL="2447849" indent="0">
               <a:buNone/>
-              <a:defRPr sz="2000"/>
+              <a:defRPr sz="2677"/>
             </a:lvl5pPr>
-            <a:lvl6pPr marL="2286000" indent="0">
+            <a:lvl6pPr marL="3059811" indent="0">
               <a:buNone/>
-              <a:defRPr sz="2000"/>
+              <a:defRPr sz="2677"/>
             </a:lvl6pPr>
-            <a:lvl7pPr marL="2743200" indent="0">
+            <a:lvl7pPr marL="3671773" indent="0">
               <a:buNone/>
-              <a:defRPr sz="2000"/>
+              <a:defRPr sz="2677"/>
             </a:lvl7pPr>
-            <a:lvl8pPr marL="3200400" indent="0">
+            <a:lvl8pPr marL="4283735" indent="0">
               <a:buNone/>
-              <a:defRPr sz="2000"/>
+              <a:defRPr sz="2677"/>
             </a:lvl8pPr>
-            <a:lvl9pPr marL="3657600" indent="0">
+            <a:lvl9pPr marL="4895698" indent="0">
               <a:buNone/>
-              <a:defRPr sz="2000"/>
+              <a:defRPr sz="2677"/>
             </a:lvl9pPr>
           </a:lstStyle>
           <a:p>
-            <a:endParaRPr lang="en-GB"/>
-          </a:p>
-        </p:txBody>
-      </p:sp>
-      <p:sp>
-        <p:nvSpPr>
-          <p:cNvPr id="4" name="Text Placeholder 3">
-            <a:extLst>
-              <a:ext uri="{FF2B5EF4-FFF2-40B4-BE49-F238E27FC236}">
-                <a16:creationId xmlns:a16="http://schemas.microsoft.com/office/drawing/2014/main" id="{D4FB8929-1102-E1C1-6638-52ACEA20EC6D}"/>
-              </a:ext>
-            </a:extLst>
-          </p:cNvPr>
+            <a:r>
+              <a:rPr lang="en-GB"/>
+              <a:t>Click icon to add picture</a:t>
+            </a:r>
+            <a:endParaRPr lang="en-US" dirty="0"/>
+          </a:p>
+        </p:txBody>
+      </p:sp>
+      <p:sp>
+        <p:nvSpPr>
+          <p:cNvPr id="4" name="Text Placeholder 3"/>
           <p:cNvSpPr>
             <a:spLocks noGrp="1"/>
           </p:cNvSpPr>
@@ -2593,8 +2285,8 @@
         </p:nvSpPr>
         <p:spPr>
           <a:xfrm>
-            <a:off x="839788" y="2057400"/>
-            <a:ext cx="3932237" cy="3811588"/>
+            <a:off x="843068" y="3671887"/>
+            <a:ext cx="3947598" cy="6802626"/>
           </a:xfrm>
         </p:spPr>
         <p:txBody>
@@ -2602,39 +2294,39 @@
           <a:lstStyle>
             <a:lvl1pPr marL="0" indent="0">
               <a:buNone/>
-              <a:defRPr sz="1600"/>
+              <a:defRPr sz="2142"/>
             </a:lvl1pPr>
-            <a:lvl2pPr marL="457200" indent="0">
+            <a:lvl2pPr marL="611962" indent="0">
               <a:buNone/>
-              <a:defRPr sz="1400"/>
+              <a:defRPr sz="1874"/>
             </a:lvl2pPr>
-            <a:lvl3pPr marL="914400" indent="0">
+            <a:lvl3pPr marL="1223924" indent="0">
               <a:buNone/>
-              <a:defRPr sz="1200"/>
+              <a:defRPr sz="1606"/>
             </a:lvl3pPr>
-            <a:lvl4pPr marL="1371600" indent="0">
+            <a:lvl4pPr marL="1835887" indent="0">
               <a:buNone/>
-              <a:defRPr sz="1000"/>
+              <a:defRPr sz="1339"/>
             </a:lvl4pPr>
-            <a:lvl5pPr marL="1828800" indent="0">
+            <a:lvl5pPr marL="2447849" indent="0">
               <a:buNone/>
-              <a:defRPr sz="1000"/>
+              <a:defRPr sz="1339"/>
             </a:lvl5pPr>
-            <a:lvl6pPr marL="2286000" indent="0">
+            <a:lvl6pPr marL="3059811" indent="0">
               <a:buNone/>
-              <a:defRPr sz="1000"/>
+              <a:defRPr sz="1339"/>
             </a:lvl6pPr>
-            <a:lvl7pPr marL="2743200" indent="0">
+            <a:lvl7pPr marL="3671773" indent="0">
               <a:buNone/>
-              <a:defRPr sz="1000"/>
+              <a:defRPr sz="1339"/>
             </a:lvl7pPr>
-            <a:lvl8pPr marL="3200400" indent="0">
+            <a:lvl8pPr marL="4283735" indent="0">
               <a:buNone/>
-              <a:defRPr sz="1000"/>
+              <a:defRPr sz="1339"/>
             </a:lvl8pPr>
-            <a:lvl9pPr marL="3657600" indent="0">
+            <a:lvl9pPr marL="4895698" indent="0">
               <a:buNone/>
-              <a:defRPr sz="1000"/>
+              <a:defRPr sz="1339"/>
             </a:lvl9pPr>
           </a:lstStyle>
           <a:p>
@@ -2648,13 +2340,7 @@
       </p:sp>
       <p:sp>
         <p:nvSpPr>
-          <p:cNvPr id="5" name="Date Placeholder 4">
-            <a:extLst>
-              <a:ext uri="{FF2B5EF4-FFF2-40B4-BE49-F238E27FC236}">
-                <a16:creationId xmlns:a16="http://schemas.microsoft.com/office/drawing/2014/main" id="{83C65327-56C0-0DB8-C5E9-6D838DDF5B12}"/>
-              </a:ext>
-            </a:extLst>
-          </p:cNvPr>
+          <p:cNvPr id="5" name="Date Placeholder 4"/>
           <p:cNvSpPr>
             <a:spLocks noGrp="1"/>
           </p:cNvSpPr>
@@ -2669,7 +2355,7 @@
           <a:p>
             <a:fld id="{435879AB-E60A-4261-98DA-0C718B428030}" type="datetimeFigureOut">
               <a:rPr lang="en-GB" smtClean="0"/>
-              <a:t>11/04/2026</a:t>
+              <a:t>17/04/2026</a:t>
             </a:fld>
             <a:endParaRPr lang="en-GB"/>
           </a:p>
@@ -2677,13 +2363,7 @@
       </p:sp>
       <p:sp>
         <p:nvSpPr>
-          <p:cNvPr id="6" name="Footer Placeholder 5">
-            <a:extLst>
-              <a:ext uri="{FF2B5EF4-FFF2-40B4-BE49-F238E27FC236}">
-                <a16:creationId xmlns:a16="http://schemas.microsoft.com/office/drawing/2014/main" id="{3B372DC3-4C65-CE4B-DA52-E270588E5848}"/>
-              </a:ext>
-            </a:extLst>
-          </p:cNvPr>
+          <p:cNvPr id="6" name="Footer Placeholder 5"/>
           <p:cNvSpPr>
             <a:spLocks noGrp="1"/>
           </p:cNvSpPr>
@@ -2702,13 +2382,7 @@
       </p:sp>
       <p:sp>
         <p:nvSpPr>
-          <p:cNvPr id="7" name="Slide Number Placeholder 6">
-            <a:extLst>
-              <a:ext uri="{FF2B5EF4-FFF2-40B4-BE49-F238E27FC236}">
-                <a16:creationId xmlns:a16="http://schemas.microsoft.com/office/drawing/2014/main" id="{78E5DDBF-7537-4D95-AEDC-2E99F69A8F8B}"/>
-              </a:ext>
-            </a:extLst>
-          </p:cNvPr>
+          <p:cNvPr id="7" name="Slide Number Placeholder 6"/>
           <p:cNvSpPr>
             <a:spLocks noGrp="1"/>
           </p:cNvSpPr>
@@ -2732,7 +2406,7 @@
     </p:spTree>
     <p:extLst>
       <p:ext uri="{BB962C8B-B14F-4D97-AF65-F5344CB8AC3E}">
-        <p14:creationId xmlns:p14="http://schemas.microsoft.com/office/powerpoint/2010/main" val="1840525862"/>
+        <p14:creationId xmlns:p14="http://schemas.microsoft.com/office/powerpoint/2010/main" val="838805724"/>
       </p:ext>
     </p:extLst>
   </p:cSld>
@@ -2766,13 +2440,7 @@
       </p:grpSpPr>
       <p:sp>
         <p:nvSpPr>
-          <p:cNvPr id="2" name="Title Placeholder 1">
-            <a:extLst>
-              <a:ext uri="{FF2B5EF4-FFF2-40B4-BE49-F238E27FC236}">
-                <a16:creationId xmlns:a16="http://schemas.microsoft.com/office/drawing/2014/main" id="{45C82363-1AE2-F7E5-B3B3-C4A9DA712BDF}"/>
-              </a:ext>
-            </a:extLst>
-          </p:cNvPr>
+          <p:cNvPr id="2" name="Title Placeholder 1"/>
           <p:cNvSpPr>
             <a:spLocks noGrp="1"/>
           </p:cNvSpPr>
@@ -2782,8 +2450,8 @@
         </p:nvSpPr>
         <p:spPr>
           <a:xfrm>
-            <a:off x="838200" y="365125"/>
-            <a:ext cx="10515600" cy="1325563"/>
+            <a:off x="841474" y="651649"/>
+            <a:ext cx="10556677" cy="2365762"/>
           </a:xfrm>
           <a:prstGeom prst="rect">
             <a:avLst/>
@@ -2799,18 +2467,13 @@
               <a:rPr lang="en-GB"/>
               <a:t>Click to edit Master title style</a:t>
             </a:r>
-          </a:p>
-        </p:txBody>
-      </p:sp>
-      <p:sp>
-        <p:nvSpPr>
-          <p:cNvPr id="3" name="Text Placeholder 2">
-            <a:extLst>
-              <a:ext uri="{FF2B5EF4-FFF2-40B4-BE49-F238E27FC236}">
-                <a16:creationId xmlns:a16="http://schemas.microsoft.com/office/drawing/2014/main" id="{03641D02-A13B-44B6-B518-D93D63F03811}"/>
-              </a:ext>
-            </a:extLst>
-          </p:cNvPr>
+            <a:endParaRPr lang="en-US" dirty="0"/>
+          </a:p>
+        </p:txBody>
+      </p:sp>
+      <p:sp>
+        <p:nvSpPr>
+          <p:cNvPr id="3" name="Text Placeholder 2"/>
           <p:cNvSpPr>
             <a:spLocks noGrp="1"/>
           </p:cNvSpPr>
@@ -2820,8 +2483,8 @@
         </p:nvSpPr>
         <p:spPr>
           <a:xfrm>
-            <a:off x="838200" y="1825625"/>
-            <a:ext cx="10515600" cy="4351338"/>
+            <a:off x="841474" y="3258233"/>
+            <a:ext cx="10556677" cy="7765930"/>
           </a:xfrm>
           <a:prstGeom prst="rect">
             <a:avLst/>
@@ -2866,18 +2529,13 @@
               <a:rPr lang="en-GB"/>
               <a:t>Fifth level</a:t>
             </a:r>
-          </a:p>
-        </p:txBody>
-      </p:sp>
-      <p:sp>
-        <p:nvSpPr>
-          <p:cNvPr id="4" name="Date Placeholder 3">
-            <a:extLst>
-              <a:ext uri="{FF2B5EF4-FFF2-40B4-BE49-F238E27FC236}">
-                <a16:creationId xmlns:a16="http://schemas.microsoft.com/office/drawing/2014/main" id="{9E804CA6-568E-C046-C423-3D6F6645EDC6}"/>
-              </a:ext>
-            </a:extLst>
-          </p:cNvPr>
+            <a:endParaRPr lang="en-US" dirty="0"/>
+          </a:p>
+        </p:txBody>
+      </p:sp>
+      <p:sp>
+        <p:nvSpPr>
+          <p:cNvPr id="4" name="Date Placeholder 3"/>
           <p:cNvSpPr>
             <a:spLocks noGrp="1"/>
           </p:cNvSpPr>
@@ -2887,8 +2545,8 @@
         </p:nvSpPr>
         <p:spPr>
           <a:xfrm>
-            <a:off x="838200" y="6356350"/>
-            <a:ext cx="2743200" cy="365125"/>
+            <a:off x="841474" y="11344322"/>
+            <a:ext cx="2753916" cy="651647"/>
           </a:xfrm>
           <a:prstGeom prst="rect">
             <a:avLst/>
@@ -2898,7 +2556,7 @@
           <a:bodyPr vert="horz" lIns="91440" tIns="45720" rIns="91440" bIns="45720" rtlCol="0" anchor="ctr"/>
           <a:lstStyle>
             <a:lvl1pPr algn="l">
-              <a:defRPr sz="1200">
+              <a:defRPr sz="1606">
                 <a:solidFill>
                   <a:schemeClr val="tx1">
                     <a:tint val="82000"/>
@@ -2910,7 +2568,7 @@
           <a:p>
             <a:fld id="{435879AB-E60A-4261-98DA-0C718B428030}" type="datetimeFigureOut">
               <a:rPr lang="en-GB" smtClean="0"/>
-              <a:t>11/04/2026</a:t>
+              <a:t>17/04/2026</a:t>
             </a:fld>
             <a:endParaRPr lang="en-GB"/>
           </a:p>
@@ -2918,13 +2576,7 @@
       </p:sp>
       <p:sp>
         <p:nvSpPr>
-          <p:cNvPr id="5" name="Footer Placeholder 4">
-            <a:extLst>
-              <a:ext uri="{FF2B5EF4-FFF2-40B4-BE49-F238E27FC236}">
-                <a16:creationId xmlns:a16="http://schemas.microsoft.com/office/drawing/2014/main" id="{33F526A1-F7AD-3C9D-FFDC-0D72917615F3}"/>
-              </a:ext>
-            </a:extLst>
-          </p:cNvPr>
+          <p:cNvPr id="5" name="Footer Placeholder 4"/>
           <p:cNvSpPr>
             <a:spLocks noGrp="1"/>
           </p:cNvSpPr>
@@ -2934,8 +2586,8 @@
         </p:nvSpPr>
         <p:spPr>
           <a:xfrm>
-            <a:off x="4038600" y="6356350"/>
-            <a:ext cx="4114800" cy="365125"/>
+            <a:off x="4054376" y="11344322"/>
+            <a:ext cx="4130873" cy="651647"/>
           </a:xfrm>
           <a:prstGeom prst="rect">
             <a:avLst/>
@@ -2945,7 +2597,7 @@
           <a:bodyPr vert="horz" lIns="91440" tIns="45720" rIns="91440" bIns="45720" rtlCol="0" anchor="ctr"/>
           <a:lstStyle>
             <a:lvl1pPr algn="ctr">
-              <a:defRPr sz="1200">
+              <a:defRPr sz="1606">
                 <a:solidFill>
                   <a:schemeClr val="tx1">
                     <a:tint val="82000"/>
@@ -2961,13 +2613,7 @@
       </p:sp>
       <p:sp>
         <p:nvSpPr>
-          <p:cNvPr id="6" name="Slide Number Placeholder 5">
-            <a:extLst>
-              <a:ext uri="{FF2B5EF4-FFF2-40B4-BE49-F238E27FC236}">
-                <a16:creationId xmlns:a16="http://schemas.microsoft.com/office/drawing/2014/main" id="{2DDDED60-8453-BD0D-6FED-E26F2B2114C6}"/>
-              </a:ext>
-            </a:extLst>
-          </p:cNvPr>
+          <p:cNvPr id="6" name="Slide Number Placeholder 5"/>
           <p:cNvSpPr>
             <a:spLocks noGrp="1"/>
           </p:cNvSpPr>
@@ -2977,8 +2623,8 @@
         </p:nvSpPr>
         <p:spPr>
           <a:xfrm>
-            <a:off x="8610600" y="6356350"/>
-            <a:ext cx="2743200" cy="365125"/>
+            <a:off x="8644235" y="11344322"/>
+            <a:ext cx="2753916" cy="651647"/>
           </a:xfrm>
           <a:prstGeom prst="rect">
             <a:avLst/>
@@ -2988,7 +2634,7 @@
           <a:bodyPr vert="horz" lIns="91440" tIns="45720" rIns="91440" bIns="45720" rtlCol="0" anchor="ctr"/>
           <a:lstStyle>
             <a:lvl1pPr algn="r">
-              <a:defRPr sz="1200">
+              <a:defRPr sz="1606">
                 <a:solidFill>
                   <a:schemeClr val="tx1">
                     <a:tint val="82000"/>
@@ -3009,27 +2655,27 @@
     </p:spTree>
     <p:extLst>
       <p:ext uri="{BB962C8B-B14F-4D97-AF65-F5344CB8AC3E}">
-        <p14:creationId xmlns:p14="http://schemas.microsoft.com/office/powerpoint/2010/main" val="1956441512"/>
+        <p14:creationId xmlns:p14="http://schemas.microsoft.com/office/powerpoint/2010/main" val="3645004903"/>
       </p:ext>
     </p:extLst>
   </p:cSld>
   <p:clrMap bg1="lt1" tx1="dk1" bg2="lt2" tx2="dk2" accent1="accent1" accent2="accent2" accent3="accent3" accent4="accent4" accent5="accent5" accent6="accent6" hlink="hlink" folHlink="folHlink"/>
   <p:sldLayoutIdLst>
-    <p:sldLayoutId id="2147483649" r:id="rId1"/>
-    <p:sldLayoutId id="2147483650" r:id="rId2"/>
-    <p:sldLayoutId id="2147483651" r:id="rId3"/>
-    <p:sldLayoutId id="2147483652" r:id="rId4"/>
-    <p:sldLayoutId id="2147483653" r:id="rId5"/>
-    <p:sldLayoutId id="2147483654" r:id="rId6"/>
-    <p:sldLayoutId id="2147483655" r:id="rId7"/>
-    <p:sldLayoutId id="2147483656" r:id="rId8"/>
-    <p:sldLayoutId id="2147483657" r:id="rId9"/>
-    <p:sldLayoutId id="2147483658" r:id="rId10"/>
-    <p:sldLayoutId id="2147483659" r:id="rId11"/>
+    <p:sldLayoutId id="2147483661" r:id="rId1"/>
+    <p:sldLayoutId id="2147483662" r:id="rId2"/>
+    <p:sldLayoutId id="2147483663" r:id="rId3"/>
+    <p:sldLayoutId id="2147483664" r:id="rId4"/>
+    <p:sldLayoutId id="2147483665" r:id="rId5"/>
+    <p:sldLayoutId id="2147483666" r:id="rId6"/>
+    <p:sldLayoutId id="2147483667" r:id="rId7"/>
+    <p:sldLayoutId id="2147483668" r:id="rId8"/>
+    <p:sldLayoutId id="2147483669" r:id="rId9"/>
+    <p:sldLayoutId id="2147483670" r:id="rId10"/>
+    <p:sldLayoutId id="2147483671" r:id="rId11"/>
   </p:sldLayoutIdLst>
   <p:txStyles>
     <p:titleStyle>
-      <a:lvl1pPr algn="l" defTabSz="914400" rtl="0" eaLnBrk="1" latinLnBrk="0" hangingPunct="1">
+      <a:lvl1pPr algn="l" defTabSz="1223924" rtl="0" eaLnBrk="1" latinLnBrk="0" hangingPunct="1">
         <a:lnSpc>
           <a:spcPct val="90000"/>
         </a:lnSpc>
@@ -3037,7 +2683,7 @@
           <a:spcPct val="0"/>
         </a:spcBef>
         <a:buNone/>
-        <a:defRPr sz="4400" kern="1200">
+        <a:defRPr sz="5889" kern="1200">
           <a:solidFill>
             <a:schemeClr val="tx1"/>
           </a:solidFill>
@@ -3048,16 +2694,16 @@
       </a:lvl1pPr>
     </p:titleStyle>
     <p:bodyStyle>
-      <a:lvl1pPr marL="228600" indent="-228600" algn="l" defTabSz="914400" rtl="0" eaLnBrk="1" latinLnBrk="0" hangingPunct="1">
+      <a:lvl1pPr marL="305981" indent="-305981" algn="l" defTabSz="1223924" rtl="0" eaLnBrk="1" latinLnBrk="0" hangingPunct="1">
         <a:lnSpc>
           <a:spcPct val="90000"/>
         </a:lnSpc>
         <a:spcBef>
-          <a:spcPts val="1000"/>
+          <a:spcPts val="1339"/>
         </a:spcBef>
         <a:buFont typeface="Arial" panose="020B0604020202020204" pitchFamily="34" charset="0"/>
         <a:buChar char="•"/>
-        <a:defRPr sz="2800" kern="1200">
+        <a:defRPr sz="3748" kern="1200">
           <a:solidFill>
             <a:schemeClr val="tx1"/>
           </a:solidFill>
@@ -3066,16 +2712,16 @@
           <a:cs typeface="+mn-cs"/>
         </a:defRPr>
       </a:lvl1pPr>
-      <a:lvl2pPr marL="685800" indent="-228600" algn="l" defTabSz="914400" rtl="0" eaLnBrk="1" latinLnBrk="0" hangingPunct="1">
+      <a:lvl2pPr marL="917943" indent="-305981" algn="l" defTabSz="1223924" rtl="0" eaLnBrk="1" latinLnBrk="0" hangingPunct="1">
         <a:lnSpc>
           <a:spcPct val="90000"/>
         </a:lnSpc>
         <a:spcBef>
-          <a:spcPts val="500"/>
+          <a:spcPts val="669"/>
         </a:spcBef>
         <a:buFont typeface="Arial" panose="020B0604020202020204" pitchFamily="34" charset="0"/>
         <a:buChar char="•"/>
-        <a:defRPr sz="2400" kern="1200">
+        <a:defRPr sz="3212" kern="1200">
           <a:solidFill>
             <a:schemeClr val="tx1"/>
           </a:solidFill>
@@ -3084,16 +2730,16 @@
           <a:cs typeface="+mn-cs"/>
         </a:defRPr>
       </a:lvl2pPr>
-      <a:lvl3pPr marL="1143000" indent="-228600" algn="l" defTabSz="914400" rtl="0" eaLnBrk="1" latinLnBrk="0" hangingPunct="1">
+      <a:lvl3pPr marL="1529906" indent="-305981" algn="l" defTabSz="1223924" rtl="0" eaLnBrk="1" latinLnBrk="0" hangingPunct="1">
         <a:lnSpc>
           <a:spcPct val="90000"/>
         </a:lnSpc>
         <a:spcBef>
-          <a:spcPts val="500"/>
+          <a:spcPts val="669"/>
         </a:spcBef>
         <a:buFont typeface="Arial" panose="020B0604020202020204" pitchFamily="34" charset="0"/>
         <a:buChar char="•"/>
-        <a:defRPr sz="2000" kern="1200">
+        <a:defRPr sz="2677" kern="1200">
           <a:solidFill>
             <a:schemeClr val="tx1"/>
           </a:solidFill>
@@ -3102,16 +2748,16 @@
           <a:cs typeface="+mn-cs"/>
         </a:defRPr>
       </a:lvl3pPr>
-      <a:lvl4pPr marL="1600200" indent="-228600" algn="l" defTabSz="914400" rtl="0" eaLnBrk="1" latinLnBrk="0" hangingPunct="1">
+      <a:lvl4pPr marL="2141868" indent="-305981" algn="l" defTabSz="1223924" rtl="0" eaLnBrk="1" latinLnBrk="0" hangingPunct="1">
         <a:lnSpc>
           <a:spcPct val="90000"/>
         </a:lnSpc>
         <a:spcBef>
-          <a:spcPts val="500"/>
+          <a:spcPts val="669"/>
         </a:spcBef>
         <a:buFont typeface="Arial" panose="020B0604020202020204" pitchFamily="34" charset="0"/>
         <a:buChar char="•"/>
-        <a:defRPr sz="1800" kern="1200">
+        <a:defRPr sz="2409" kern="1200">
           <a:solidFill>
             <a:schemeClr val="tx1"/>
           </a:solidFill>
@@ -3120,16 +2766,16 @@
           <a:cs typeface="+mn-cs"/>
         </a:defRPr>
       </a:lvl4pPr>
-      <a:lvl5pPr marL="2057400" indent="-228600" algn="l" defTabSz="914400" rtl="0" eaLnBrk="1" latinLnBrk="0" hangingPunct="1">
+      <a:lvl5pPr marL="2753830" indent="-305981" algn="l" defTabSz="1223924" rtl="0" eaLnBrk="1" latinLnBrk="0" hangingPunct="1">
         <a:lnSpc>
           <a:spcPct val="90000"/>
         </a:lnSpc>
         <a:spcBef>
-          <a:spcPts val="500"/>
+          <a:spcPts val="669"/>
         </a:spcBef>
         <a:buFont typeface="Arial" panose="020B0604020202020204" pitchFamily="34" charset="0"/>
         <a:buChar char="•"/>
-        <a:defRPr sz="1800" kern="1200">
+        <a:defRPr sz="2409" kern="1200">
           <a:solidFill>
             <a:schemeClr val="tx1"/>
           </a:solidFill>
@@ -3138,16 +2784,16 @@
           <a:cs typeface="+mn-cs"/>
         </a:defRPr>
       </a:lvl5pPr>
-      <a:lvl6pPr marL="2514600" indent="-228600" algn="l" defTabSz="914400" rtl="0" eaLnBrk="1" latinLnBrk="0" hangingPunct="1">
+      <a:lvl6pPr marL="3365792" indent="-305981" algn="l" defTabSz="1223924" rtl="0" eaLnBrk="1" latinLnBrk="0" hangingPunct="1">
         <a:lnSpc>
           <a:spcPct val="90000"/>
         </a:lnSpc>
         <a:spcBef>
-          <a:spcPts val="500"/>
+          <a:spcPts val="669"/>
         </a:spcBef>
         <a:buFont typeface="Arial" panose="020B0604020202020204" pitchFamily="34" charset="0"/>
         <a:buChar char="•"/>
-        <a:defRPr sz="1800" kern="1200">
+        <a:defRPr sz="2409" kern="1200">
           <a:solidFill>
             <a:schemeClr val="tx1"/>
           </a:solidFill>
@@ -3156,16 +2802,16 @@
           <a:cs typeface="+mn-cs"/>
         </a:defRPr>
       </a:lvl6pPr>
-      <a:lvl7pPr marL="2971800" indent="-228600" algn="l" defTabSz="914400" rtl="0" eaLnBrk="1" latinLnBrk="0" hangingPunct="1">
+      <a:lvl7pPr marL="3977754" indent="-305981" algn="l" defTabSz="1223924" rtl="0" eaLnBrk="1" latinLnBrk="0" hangingPunct="1">
         <a:lnSpc>
           <a:spcPct val="90000"/>
         </a:lnSpc>
         <a:spcBef>
-          <a:spcPts val="500"/>
+          <a:spcPts val="669"/>
         </a:spcBef>
         <a:buFont typeface="Arial" panose="020B0604020202020204" pitchFamily="34" charset="0"/>
         <a:buChar char="•"/>
-        <a:defRPr sz="1800" kern="1200">
+        <a:defRPr sz="2409" kern="1200">
           <a:solidFill>
             <a:schemeClr val="tx1"/>
           </a:solidFill>
@@ -3174,16 +2820,16 @@
           <a:cs typeface="+mn-cs"/>
         </a:defRPr>
       </a:lvl7pPr>
-      <a:lvl8pPr marL="3429000" indent="-228600" algn="l" defTabSz="914400" rtl="0" eaLnBrk="1" latinLnBrk="0" hangingPunct="1">
+      <a:lvl8pPr marL="4589717" indent="-305981" algn="l" defTabSz="1223924" rtl="0" eaLnBrk="1" latinLnBrk="0" hangingPunct="1">
         <a:lnSpc>
           <a:spcPct val="90000"/>
         </a:lnSpc>
         <a:spcBef>
-          <a:spcPts val="500"/>
+          <a:spcPts val="669"/>
         </a:spcBef>
         <a:buFont typeface="Arial" panose="020B0604020202020204" pitchFamily="34" charset="0"/>
         <a:buChar char="•"/>
-        <a:defRPr sz="1800" kern="1200">
+        <a:defRPr sz="2409" kern="1200">
           <a:solidFill>
             <a:schemeClr val="tx1"/>
           </a:solidFill>
@@ -3192,16 +2838,16 @@
           <a:cs typeface="+mn-cs"/>
         </a:defRPr>
       </a:lvl8pPr>
-      <a:lvl9pPr marL="3886200" indent="-228600" algn="l" defTabSz="914400" rtl="0" eaLnBrk="1" latinLnBrk="0" hangingPunct="1">
+      <a:lvl9pPr marL="5201679" indent="-305981" algn="l" defTabSz="1223924" rtl="0" eaLnBrk="1" latinLnBrk="0" hangingPunct="1">
         <a:lnSpc>
           <a:spcPct val="90000"/>
         </a:lnSpc>
         <a:spcBef>
-          <a:spcPts val="500"/>
+          <a:spcPts val="669"/>
         </a:spcBef>
         <a:buFont typeface="Arial" panose="020B0604020202020204" pitchFamily="34" charset="0"/>
         <a:buChar char="•"/>
-        <a:defRPr sz="1800" kern="1200">
+        <a:defRPr sz="2409" kern="1200">
           <a:solidFill>
             <a:schemeClr val="tx1"/>
           </a:solidFill>
@@ -3215,8 +2861,8 @@
       <a:defPPr>
         <a:defRPr lang="en-US"/>
       </a:defPPr>
-      <a:lvl1pPr marL="0" algn="l" defTabSz="914400" rtl="0" eaLnBrk="1" latinLnBrk="0" hangingPunct="1">
-        <a:defRPr sz="1800" kern="1200">
+      <a:lvl1pPr marL="0" algn="l" defTabSz="1223924" rtl="0" eaLnBrk="1" latinLnBrk="0" hangingPunct="1">
+        <a:defRPr sz="2409" kern="1200">
           <a:solidFill>
             <a:schemeClr val="tx1"/>
           </a:solidFill>
@@ -3225,8 +2871,8 @@
           <a:cs typeface="+mn-cs"/>
         </a:defRPr>
       </a:lvl1pPr>
-      <a:lvl2pPr marL="457200" algn="l" defTabSz="914400" rtl="0" eaLnBrk="1" latinLnBrk="0" hangingPunct="1">
-        <a:defRPr sz="1800" kern="1200">
+      <a:lvl2pPr marL="611962" algn="l" defTabSz="1223924" rtl="0" eaLnBrk="1" latinLnBrk="0" hangingPunct="1">
+        <a:defRPr sz="2409" kern="1200">
           <a:solidFill>
             <a:schemeClr val="tx1"/>
           </a:solidFill>
@@ -3235,8 +2881,8 @@
           <a:cs typeface="+mn-cs"/>
         </a:defRPr>
       </a:lvl2pPr>
-      <a:lvl3pPr marL="914400" algn="l" defTabSz="914400" rtl="0" eaLnBrk="1" latinLnBrk="0" hangingPunct="1">
-        <a:defRPr sz="1800" kern="1200">
+      <a:lvl3pPr marL="1223924" algn="l" defTabSz="1223924" rtl="0" eaLnBrk="1" latinLnBrk="0" hangingPunct="1">
+        <a:defRPr sz="2409" kern="1200">
           <a:solidFill>
             <a:schemeClr val="tx1"/>
           </a:solidFill>
@@ -3245,8 +2891,8 @@
           <a:cs typeface="+mn-cs"/>
         </a:defRPr>
       </a:lvl3pPr>
-      <a:lvl4pPr marL="1371600" algn="l" defTabSz="914400" rtl="0" eaLnBrk="1" latinLnBrk="0" hangingPunct="1">
-        <a:defRPr sz="1800" kern="1200">
+      <a:lvl4pPr marL="1835887" algn="l" defTabSz="1223924" rtl="0" eaLnBrk="1" latinLnBrk="0" hangingPunct="1">
+        <a:defRPr sz="2409" kern="1200">
           <a:solidFill>
             <a:schemeClr val="tx1"/>
           </a:solidFill>
@@ -3255,8 +2901,8 @@
           <a:cs typeface="+mn-cs"/>
         </a:defRPr>
       </a:lvl4pPr>
-      <a:lvl5pPr marL="1828800" algn="l" defTabSz="914400" rtl="0" eaLnBrk="1" latinLnBrk="0" hangingPunct="1">
-        <a:defRPr sz="1800" kern="1200">
+      <a:lvl5pPr marL="2447849" algn="l" defTabSz="1223924" rtl="0" eaLnBrk="1" latinLnBrk="0" hangingPunct="1">
+        <a:defRPr sz="2409" kern="1200">
           <a:solidFill>
             <a:schemeClr val="tx1"/>
           </a:solidFill>
@@ -3265,8 +2911,8 @@
           <a:cs typeface="+mn-cs"/>
         </a:defRPr>
       </a:lvl5pPr>
-      <a:lvl6pPr marL="2286000" algn="l" defTabSz="914400" rtl="0" eaLnBrk="1" latinLnBrk="0" hangingPunct="1">
-        <a:defRPr sz="1800" kern="1200">
+      <a:lvl6pPr marL="3059811" algn="l" defTabSz="1223924" rtl="0" eaLnBrk="1" latinLnBrk="0" hangingPunct="1">
+        <a:defRPr sz="2409" kern="1200">
           <a:solidFill>
             <a:schemeClr val="tx1"/>
           </a:solidFill>
@@ -3275,8 +2921,8 @@
           <a:cs typeface="+mn-cs"/>
         </a:defRPr>
       </a:lvl6pPr>
-      <a:lvl7pPr marL="2743200" algn="l" defTabSz="914400" rtl="0" eaLnBrk="1" latinLnBrk="0" hangingPunct="1">
-        <a:defRPr sz="1800" kern="1200">
+      <a:lvl7pPr marL="3671773" algn="l" defTabSz="1223924" rtl="0" eaLnBrk="1" latinLnBrk="0" hangingPunct="1">
+        <a:defRPr sz="2409" kern="1200">
           <a:solidFill>
             <a:schemeClr val="tx1"/>
           </a:solidFill>
@@ -3285,8 +2931,8 @@
           <a:cs typeface="+mn-cs"/>
         </a:defRPr>
       </a:lvl7pPr>
-      <a:lvl8pPr marL="3200400" algn="l" defTabSz="914400" rtl="0" eaLnBrk="1" latinLnBrk="0" hangingPunct="1">
-        <a:defRPr sz="1800" kern="1200">
+      <a:lvl8pPr marL="4283735" algn="l" defTabSz="1223924" rtl="0" eaLnBrk="1" latinLnBrk="0" hangingPunct="1">
+        <a:defRPr sz="2409" kern="1200">
           <a:solidFill>
             <a:schemeClr val="tx1"/>
           </a:solidFill>
@@ -3295,8 +2941,8 @@
           <a:cs typeface="+mn-cs"/>
         </a:defRPr>
       </a:lvl8pPr>
-      <a:lvl9pPr marL="3657600" algn="l" defTabSz="914400" rtl="0" eaLnBrk="1" latinLnBrk="0" hangingPunct="1">
-        <a:defRPr sz="1800" kern="1200">
+      <a:lvl9pPr marL="4895698" algn="l" defTabSz="1223924" rtl="0" eaLnBrk="1" latinLnBrk="0" hangingPunct="1">
+        <a:defRPr sz="2409" kern="1200">
           <a:solidFill>
             <a:schemeClr val="tx1"/>
           </a:solidFill>
@@ -3329,10 +2975,10 @@
       </p:grpSpPr>
       <p:sp>
         <p:nvSpPr>
-          <p:cNvPr id="107" name="Rectangle 106">
-            <a:extLst>
-              <a:ext uri="{FF2B5EF4-FFF2-40B4-BE49-F238E27FC236}">
-                <a16:creationId xmlns:a16="http://schemas.microsoft.com/office/drawing/2014/main" id="{3048E9DE-A2EF-1DFE-88BA-DE45510FBFBB}"/>
+          <p:cNvPr id="3" name="Rectangle 2">
+            <a:extLst>
+              <a:ext uri="{FF2B5EF4-FFF2-40B4-BE49-F238E27FC236}">
+                <a16:creationId xmlns:a16="http://schemas.microsoft.com/office/drawing/2014/main" id="{DD2BD40D-14D1-FC8D-52CF-EEFB2894D3F4}"/>
               </a:ext>
             </a:extLst>
           </p:cNvPr>
@@ -3341,7 +2987,7 @@
         </p:nvSpPr>
         <p:spPr>
           <a:xfrm>
-            <a:off x="3679184" y="1062769"/>
+            <a:off x="3852605" y="1347755"/>
             <a:ext cx="1200303" cy="721322"/>
           </a:xfrm>
           <a:prstGeom prst="rect">
@@ -3390,23 +3036,23 @@
       </p:sp>
       <p:cxnSp>
         <p:nvCxnSpPr>
-          <p:cNvPr id="108" name="Straight Arrow Connector 107">
-            <a:extLst>
-              <a:ext uri="{FF2B5EF4-FFF2-40B4-BE49-F238E27FC236}">
-                <a16:creationId xmlns:a16="http://schemas.microsoft.com/office/drawing/2014/main" id="{30A27AD2-CFD1-519C-5D6A-FC3CE3AED459}"/>
+          <p:cNvPr id="11" name="Straight Arrow Connector 10">
+            <a:extLst>
+              <a:ext uri="{FF2B5EF4-FFF2-40B4-BE49-F238E27FC236}">
+                <a16:creationId xmlns:a16="http://schemas.microsoft.com/office/drawing/2014/main" id="{5008F840-4684-2697-8279-9913DE5FBFE7}"/>
               </a:ext>
             </a:extLst>
           </p:cNvPr>
           <p:cNvCxnSpPr>
             <a:cxnSpLocks/>
-            <a:stCxn id="107" idx="3"/>
-            <a:endCxn id="10" idx="2"/>
+            <a:stCxn id="3" idx="3"/>
+            <a:endCxn id="22" idx="2"/>
           </p:cNvCxnSpPr>
           <p:nvPr/>
         </p:nvCxnSpPr>
         <p:spPr>
           <a:xfrm>
-            <a:off x="4879487" y="1423430"/>
+            <a:off x="5052908" y="1708416"/>
             <a:ext cx="1317131" cy="239659"/>
           </a:xfrm>
           <a:prstGeom prst="straightConnector1">
@@ -3436,10 +3082,10 @@
       </p:cxnSp>
       <p:sp>
         <p:nvSpPr>
-          <p:cNvPr id="4" name="Rectangle 3">
-            <a:extLst>
-              <a:ext uri="{FF2B5EF4-FFF2-40B4-BE49-F238E27FC236}">
-                <a16:creationId xmlns:a16="http://schemas.microsoft.com/office/drawing/2014/main" id="{FAD3205D-F26D-9A6F-83DB-7729227CE83A}"/>
+          <p:cNvPr id="14" name="Rectangle 13">
+            <a:extLst>
+              <a:ext uri="{FF2B5EF4-FFF2-40B4-BE49-F238E27FC236}">
+                <a16:creationId xmlns:a16="http://schemas.microsoft.com/office/drawing/2014/main" id="{571EC25B-7EDA-5A69-3BEC-997808E0D511}"/>
               </a:ext>
             </a:extLst>
           </p:cNvPr>
@@ -3448,7 +3094,7 @@
         </p:nvSpPr>
         <p:spPr>
           <a:xfrm>
-            <a:off x="2469544" y="3591058"/>
+            <a:off x="2642965" y="3876044"/>
             <a:ext cx="1147483" cy="591670"/>
           </a:xfrm>
           <a:prstGeom prst="rect">
@@ -3497,10 +3143,10 @@
       </p:sp>
       <p:sp>
         <p:nvSpPr>
-          <p:cNvPr id="5" name="Rectangle 4">
-            <a:extLst>
-              <a:ext uri="{FF2B5EF4-FFF2-40B4-BE49-F238E27FC236}">
-                <a16:creationId xmlns:a16="http://schemas.microsoft.com/office/drawing/2014/main" id="{B674A690-73CE-9A32-EE4B-5EDCD93702FF}"/>
+          <p:cNvPr id="15" name="Rectangle 14">
+            <a:extLst>
+              <a:ext uri="{FF2B5EF4-FFF2-40B4-BE49-F238E27FC236}">
+                <a16:creationId xmlns:a16="http://schemas.microsoft.com/office/drawing/2014/main" id="{382A1A79-AEAF-78AD-69ED-B42E0421790F}"/>
               </a:ext>
             </a:extLst>
           </p:cNvPr>
@@ -3509,7 +3155,7 @@
         </p:nvSpPr>
         <p:spPr>
           <a:xfrm>
-            <a:off x="3948721" y="3591058"/>
+            <a:off x="4122142" y="3876044"/>
             <a:ext cx="1147483" cy="591670"/>
           </a:xfrm>
           <a:prstGeom prst="rect">
@@ -3569,10 +3215,10 @@
       </p:sp>
       <p:sp>
         <p:nvSpPr>
-          <p:cNvPr id="6" name="Rectangle 5">
-            <a:extLst>
-              <a:ext uri="{FF2B5EF4-FFF2-40B4-BE49-F238E27FC236}">
-                <a16:creationId xmlns:a16="http://schemas.microsoft.com/office/drawing/2014/main" id="{C96864E9-FE8D-B0A1-E526-FEC097FBC6F8}"/>
+          <p:cNvPr id="17" name="Rectangle 16">
+            <a:extLst>
+              <a:ext uri="{FF2B5EF4-FFF2-40B4-BE49-F238E27FC236}">
+                <a16:creationId xmlns:a16="http://schemas.microsoft.com/office/drawing/2014/main" id="{191BC548-FF23-D0BB-EDF0-09EDCFFA6135}"/>
               </a:ext>
             </a:extLst>
           </p:cNvPr>
@@ -3581,7 +3227,7 @@
         </p:nvSpPr>
         <p:spPr>
           <a:xfrm>
-            <a:off x="5427897" y="3591058"/>
+            <a:off x="5601318" y="3876044"/>
             <a:ext cx="1147483" cy="591670"/>
           </a:xfrm>
           <a:prstGeom prst="rect">
@@ -3630,10 +3276,10 @@
       </p:sp>
       <p:sp>
         <p:nvSpPr>
-          <p:cNvPr id="7" name="Rectangle 6">
-            <a:extLst>
-              <a:ext uri="{FF2B5EF4-FFF2-40B4-BE49-F238E27FC236}">
-                <a16:creationId xmlns:a16="http://schemas.microsoft.com/office/drawing/2014/main" id="{8D7A5030-4945-BA53-BE66-B8FA769C9E6E}"/>
+          <p:cNvPr id="18" name="Rectangle 17">
+            <a:extLst>
+              <a:ext uri="{FF2B5EF4-FFF2-40B4-BE49-F238E27FC236}">
+                <a16:creationId xmlns:a16="http://schemas.microsoft.com/office/drawing/2014/main" id="{0AE92D93-0919-2747-6099-E78CBA0CDE40}"/>
               </a:ext>
             </a:extLst>
           </p:cNvPr>
@@ -3642,7 +3288,7 @@
         </p:nvSpPr>
         <p:spPr>
           <a:xfrm>
-            <a:off x="8386249" y="3600022"/>
+            <a:off x="8559670" y="3885008"/>
             <a:ext cx="1147483" cy="591670"/>
           </a:xfrm>
           <a:prstGeom prst="rect">
@@ -3702,10 +3348,10 @@
       </p:sp>
       <p:sp>
         <p:nvSpPr>
-          <p:cNvPr id="8" name="Rectangle 7">
-            <a:extLst>
-              <a:ext uri="{FF2B5EF4-FFF2-40B4-BE49-F238E27FC236}">
-                <a16:creationId xmlns:a16="http://schemas.microsoft.com/office/drawing/2014/main" id="{B19C0B8E-6CA4-0622-DF3A-31648CD4FB14}"/>
+          <p:cNvPr id="19" name="Rectangle 18">
+            <a:extLst>
+              <a:ext uri="{FF2B5EF4-FFF2-40B4-BE49-F238E27FC236}">
+                <a16:creationId xmlns:a16="http://schemas.microsoft.com/office/drawing/2014/main" id="{FC117AC6-4EDB-A14F-8B88-A8FA570F5358}"/>
               </a:ext>
             </a:extLst>
           </p:cNvPr>
@@ -3714,7 +3360,7 @@
         </p:nvSpPr>
         <p:spPr>
           <a:xfrm>
-            <a:off x="6907073" y="3591058"/>
+            <a:off x="7080494" y="3876044"/>
             <a:ext cx="1147483" cy="591670"/>
           </a:xfrm>
           <a:prstGeom prst="rect">
@@ -3763,10 +3409,10 @@
       </p:sp>
       <p:sp>
         <p:nvSpPr>
-          <p:cNvPr id="9" name="Rectangle 8">
-            <a:extLst>
-              <a:ext uri="{FF2B5EF4-FFF2-40B4-BE49-F238E27FC236}">
-                <a16:creationId xmlns:a16="http://schemas.microsoft.com/office/drawing/2014/main" id="{6481A241-8679-5BD1-2EE4-5CD16B966B25}"/>
+          <p:cNvPr id="21" name="Rectangle 20">
+            <a:extLst>
+              <a:ext uri="{FF2B5EF4-FFF2-40B4-BE49-F238E27FC236}">
+                <a16:creationId xmlns:a16="http://schemas.microsoft.com/office/drawing/2014/main" id="{604946A5-F558-0E85-3556-EAB639A6D452}"/>
               </a:ext>
             </a:extLst>
           </p:cNvPr>
@@ -3775,7 +3421,7 @@
         </p:nvSpPr>
         <p:spPr>
           <a:xfrm>
-            <a:off x="9865424" y="3591058"/>
+            <a:off x="10038845" y="3876044"/>
             <a:ext cx="1147483" cy="591670"/>
           </a:xfrm>
           <a:prstGeom prst="rect">
@@ -3824,10 +3470,10 @@
       </p:sp>
       <p:sp>
         <p:nvSpPr>
-          <p:cNvPr id="10" name="Oval 9">
-            <a:extLst>
-              <a:ext uri="{FF2B5EF4-FFF2-40B4-BE49-F238E27FC236}">
-                <a16:creationId xmlns:a16="http://schemas.microsoft.com/office/drawing/2014/main" id="{7354CE3C-C158-CC69-821A-41BCAF199859}"/>
+          <p:cNvPr id="22" name="Oval 21">
+            <a:extLst>
+              <a:ext uri="{FF2B5EF4-FFF2-40B4-BE49-F238E27FC236}">
+                <a16:creationId xmlns:a16="http://schemas.microsoft.com/office/drawing/2014/main" id="{A7947C7D-A822-5C5F-5048-E4355FB1EF98}"/>
               </a:ext>
             </a:extLst>
           </p:cNvPr>
@@ -3836,7 +3482,7 @@
         </p:nvSpPr>
         <p:spPr>
           <a:xfrm>
-            <a:off x="6196618" y="1089347"/>
+            <a:off x="6370039" y="1374333"/>
             <a:ext cx="1434353" cy="1147483"/>
           </a:xfrm>
           <a:prstGeom prst="ellipse">
@@ -3880,22 +3526,22 @@
       </p:sp>
       <p:cxnSp>
         <p:nvCxnSpPr>
-          <p:cNvPr id="12" name="Straight Arrow Connector 11">
-            <a:extLst>
-              <a:ext uri="{FF2B5EF4-FFF2-40B4-BE49-F238E27FC236}">
-                <a16:creationId xmlns:a16="http://schemas.microsoft.com/office/drawing/2014/main" id="{E9FC94AD-835D-5F53-3152-0A00660EA706}"/>
+          <p:cNvPr id="24" name="Straight Arrow Connector 23">
+            <a:extLst>
+              <a:ext uri="{FF2B5EF4-FFF2-40B4-BE49-F238E27FC236}">
+                <a16:creationId xmlns:a16="http://schemas.microsoft.com/office/drawing/2014/main" id="{0D458E67-3F3C-37A4-8B73-3E83F1F78E85}"/>
               </a:ext>
             </a:extLst>
           </p:cNvPr>
           <p:cNvCxnSpPr>
-            <a:stCxn id="10" idx="4"/>
-            <a:endCxn id="4" idx="0"/>
+            <a:stCxn id="22" idx="4"/>
+            <a:endCxn id="14" idx="0"/>
           </p:cNvCxnSpPr>
           <p:nvPr/>
         </p:nvCxnSpPr>
         <p:spPr>
           <a:xfrm flipH="1">
-            <a:off x="3043286" y="2236830"/>
+            <a:off x="3216707" y="2521816"/>
             <a:ext cx="3870509" cy="1354228"/>
           </a:xfrm>
           <a:prstGeom prst="straightConnector1">
@@ -3926,23 +3572,23 @@
       </p:cxnSp>
       <p:cxnSp>
         <p:nvCxnSpPr>
-          <p:cNvPr id="13" name="Straight Arrow Connector 12">
-            <a:extLst>
-              <a:ext uri="{FF2B5EF4-FFF2-40B4-BE49-F238E27FC236}">
-                <a16:creationId xmlns:a16="http://schemas.microsoft.com/office/drawing/2014/main" id="{25630C62-64EC-4305-FF9B-F3A6AC83907C}"/>
+          <p:cNvPr id="25" name="Straight Arrow Connector 24">
+            <a:extLst>
+              <a:ext uri="{FF2B5EF4-FFF2-40B4-BE49-F238E27FC236}">
+                <a16:creationId xmlns:a16="http://schemas.microsoft.com/office/drawing/2014/main" id="{801F5EE4-FD9E-297A-5394-5BE9870129DD}"/>
               </a:ext>
             </a:extLst>
           </p:cNvPr>
           <p:cNvCxnSpPr>
             <a:cxnSpLocks/>
-            <a:stCxn id="10" idx="4"/>
-            <a:endCxn id="5" idx="0"/>
+            <a:stCxn id="22" idx="4"/>
+            <a:endCxn id="15" idx="0"/>
           </p:cNvCxnSpPr>
           <p:nvPr/>
         </p:nvCxnSpPr>
         <p:spPr>
           <a:xfrm flipH="1">
-            <a:off x="4522463" y="2236830"/>
+            <a:off x="4695884" y="2521816"/>
             <a:ext cx="2391332" cy="1354228"/>
           </a:xfrm>
           <a:prstGeom prst="straightConnector1">
@@ -3972,23 +3618,23 @@
       </p:cxnSp>
       <p:cxnSp>
         <p:nvCxnSpPr>
-          <p:cNvPr id="16" name="Straight Arrow Connector 15">
-            <a:extLst>
-              <a:ext uri="{FF2B5EF4-FFF2-40B4-BE49-F238E27FC236}">
-                <a16:creationId xmlns:a16="http://schemas.microsoft.com/office/drawing/2014/main" id="{28556157-262A-8ED9-6D00-8793EBE652EE}"/>
+          <p:cNvPr id="27" name="Straight Arrow Connector 26">
+            <a:extLst>
+              <a:ext uri="{FF2B5EF4-FFF2-40B4-BE49-F238E27FC236}">
+                <a16:creationId xmlns:a16="http://schemas.microsoft.com/office/drawing/2014/main" id="{C751BE56-1CB5-AC98-03BB-CC400ED45F4C}"/>
               </a:ext>
             </a:extLst>
           </p:cNvPr>
           <p:cNvCxnSpPr>
             <a:cxnSpLocks/>
-            <a:stCxn id="10" idx="4"/>
-            <a:endCxn id="6" idx="0"/>
+            <a:stCxn id="22" idx="4"/>
+            <a:endCxn id="17" idx="0"/>
           </p:cNvCxnSpPr>
           <p:nvPr/>
         </p:nvCxnSpPr>
         <p:spPr>
           <a:xfrm flipH="1">
-            <a:off x="6001639" y="2236830"/>
+            <a:off x="6175060" y="2521816"/>
             <a:ext cx="912156" cy="1354228"/>
           </a:xfrm>
           <a:prstGeom prst="straightConnector1">
@@ -4018,23 +3664,23 @@
       </p:cxnSp>
       <p:cxnSp>
         <p:nvCxnSpPr>
-          <p:cNvPr id="20" name="Straight Arrow Connector 19">
-            <a:extLst>
-              <a:ext uri="{FF2B5EF4-FFF2-40B4-BE49-F238E27FC236}">
-                <a16:creationId xmlns:a16="http://schemas.microsoft.com/office/drawing/2014/main" id="{9D97F55B-F612-CCCC-F0A2-CCF8F97E0B1D}"/>
+          <p:cNvPr id="28" name="Straight Arrow Connector 27">
+            <a:extLst>
+              <a:ext uri="{FF2B5EF4-FFF2-40B4-BE49-F238E27FC236}">
+                <a16:creationId xmlns:a16="http://schemas.microsoft.com/office/drawing/2014/main" id="{DE6A69F0-FB1E-78BD-A0A1-980A7F49CA88}"/>
               </a:ext>
             </a:extLst>
           </p:cNvPr>
           <p:cNvCxnSpPr>
             <a:cxnSpLocks/>
-            <a:stCxn id="10" idx="4"/>
-            <a:endCxn id="8" idx="0"/>
+            <a:stCxn id="22" idx="4"/>
+            <a:endCxn id="19" idx="0"/>
           </p:cNvCxnSpPr>
           <p:nvPr/>
         </p:nvCxnSpPr>
         <p:spPr>
           <a:xfrm>
-            <a:off x="6913795" y="2236830"/>
+            <a:off x="7087216" y="2521816"/>
             <a:ext cx="567020" cy="1354228"/>
           </a:xfrm>
           <a:prstGeom prst="straightConnector1">
@@ -4064,23 +3710,23 @@
       </p:cxnSp>
       <p:cxnSp>
         <p:nvCxnSpPr>
-          <p:cNvPr id="23" name="Straight Arrow Connector 22">
-            <a:extLst>
-              <a:ext uri="{FF2B5EF4-FFF2-40B4-BE49-F238E27FC236}">
-                <a16:creationId xmlns:a16="http://schemas.microsoft.com/office/drawing/2014/main" id="{CB6B35AA-A858-C123-2206-11FE194274D6}"/>
+          <p:cNvPr id="29" name="Straight Arrow Connector 28">
+            <a:extLst>
+              <a:ext uri="{FF2B5EF4-FFF2-40B4-BE49-F238E27FC236}">
+                <a16:creationId xmlns:a16="http://schemas.microsoft.com/office/drawing/2014/main" id="{5A044F1F-D057-5FC4-C1AF-176BF9D6679B}"/>
               </a:ext>
             </a:extLst>
           </p:cNvPr>
           <p:cNvCxnSpPr>
             <a:cxnSpLocks/>
-            <a:stCxn id="10" idx="4"/>
-            <a:endCxn id="7" idx="0"/>
+            <a:stCxn id="22" idx="4"/>
+            <a:endCxn id="18" idx="0"/>
           </p:cNvCxnSpPr>
           <p:nvPr/>
         </p:nvCxnSpPr>
         <p:spPr>
           <a:xfrm>
-            <a:off x="6913795" y="2236830"/>
+            <a:off x="7087216" y="2521816"/>
             <a:ext cx="2046196" cy="1363192"/>
           </a:xfrm>
           <a:prstGeom prst="straightConnector1">
@@ -4110,23 +3756,23 @@
       </p:cxnSp>
       <p:cxnSp>
         <p:nvCxnSpPr>
-          <p:cNvPr id="26" name="Straight Arrow Connector 25">
-            <a:extLst>
-              <a:ext uri="{FF2B5EF4-FFF2-40B4-BE49-F238E27FC236}">
-                <a16:creationId xmlns:a16="http://schemas.microsoft.com/office/drawing/2014/main" id="{CB62185E-C1CB-60C8-DD5C-0C89D684F14E}"/>
+          <p:cNvPr id="30" name="Straight Arrow Connector 29">
+            <a:extLst>
+              <a:ext uri="{FF2B5EF4-FFF2-40B4-BE49-F238E27FC236}">
+                <a16:creationId xmlns:a16="http://schemas.microsoft.com/office/drawing/2014/main" id="{E43590F5-B645-47BD-F0D2-B955BD666280}"/>
               </a:ext>
             </a:extLst>
           </p:cNvPr>
           <p:cNvCxnSpPr>
             <a:cxnSpLocks/>
-            <a:stCxn id="10" idx="4"/>
-            <a:endCxn id="9" idx="0"/>
+            <a:stCxn id="22" idx="4"/>
+            <a:endCxn id="21" idx="0"/>
           </p:cNvCxnSpPr>
           <p:nvPr/>
         </p:nvCxnSpPr>
         <p:spPr>
           <a:xfrm>
-            <a:off x="6913795" y="2236830"/>
+            <a:off x="7087216" y="2521816"/>
             <a:ext cx="3525371" cy="1354228"/>
           </a:xfrm>
           <a:prstGeom prst="straightConnector1">
@@ -4156,22 +3802,22 @@
       </p:cxnSp>
       <p:cxnSp>
         <p:nvCxnSpPr>
-          <p:cNvPr id="35" name="Straight Arrow Connector 34">
-            <a:extLst>
-              <a:ext uri="{FF2B5EF4-FFF2-40B4-BE49-F238E27FC236}">
-                <a16:creationId xmlns:a16="http://schemas.microsoft.com/office/drawing/2014/main" id="{C34AF160-FDD4-73BC-12D0-72EB0D2BEC59}"/>
+          <p:cNvPr id="31" name="Straight Arrow Connector 30">
+            <a:extLst>
+              <a:ext uri="{FF2B5EF4-FFF2-40B4-BE49-F238E27FC236}">
+                <a16:creationId xmlns:a16="http://schemas.microsoft.com/office/drawing/2014/main" id="{60E7F0E0-77D4-9C31-5B5D-8CD5A9C0E201}"/>
               </a:ext>
             </a:extLst>
           </p:cNvPr>
           <p:cNvCxnSpPr>
             <a:cxnSpLocks/>
-            <a:endCxn id="4" idx="2"/>
+            <a:endCxn id="14" idx="2"/>
           </p:cNvCxnSpPr>
           <p:nvPr/>
         </p:nvCxnSpPr>
         <p:spPr>
           <a:xfrm flipV="1">
-            <a:off x="3043286" y="4182728"/>
+            <a:off x="3216707" y="4467714"/>
             <a:ext cx="0" cy="245837"/>
           </a:xfrm>
           <a:prstGeom prst="straightConnector1">
@@ -4201,10 +3847,10 @@
       </p:cxnSp>
       <p:cxnSp>
         <p:nvCxnSpPr>
-          <p:cNvPr id="39" name="Straight Arrow Connector 38">
-            <a:extLst>
-              <a:ext uri="{FF2B5EF4-FFF2-40B4-BE49-F238E27FC236}">
-                <a16:creationId xmlns:a16="http://schemas.microsoft.com/office/drawing/2014/main" id="{3C62F46F-8D2B-6BB9-0261-AA377F01A4B0}"/>
+          <p:cNvPr id="32" name="Straight Arrow Connector 31">
+            <a:extLst>
+              <a:ext uri="{FF2B5EF4-FFF2-40B4-BE49-F238E27FC236}">
+                <a16:creationId xmlns:a16="http://schemas.microsoft.com/office/drawing/2014/main" id="{FB6465C6-5E4A-4C31-4E2F-E483FDC6CD80}"/>
               </a:ext>
             </a:extLst>
           </p:cNvPr>
@@ -4215,7 +3861,7 @@
         </p:nvCxnSpPr>
         <p:spPr>
           <a:xfrm flipV="1">
-            <a:off x="4508784" y="4182728"/>
+            <a:off x="4682205" y="4467714"/>
             <a:ext cx="0" cy="245837"/>
           </a:xfrm>
           <a:prstGeom prst="straightConnector1">
@@ -4245,10 +3891,10 @@
       </p:cxnSp>
       <p:cxnSp>
         <p:nvCxnSpPr>
-          <p:cNvPr id="40" name="Straight Arrow Connector 39">
-            <a:extLst>
-              <a:ext uri="{FF2B5EF4-FFF2-40B4-BE49-F238E27FC236}">
-                <a16:creationId xmlns:a16="http://schemas.microsoft.com/office/drawing/2014/main" id="{0A531965-2DE1-4D80-C69D-715C253E5EF5}"/>
+          <p:cNvPr id="33" name="Straight Arrow Connector 32">
+            <a:extLst>
+              <a:ext uri="{FF2B5EF4-FFF2-40B4-BE49-F238E27FC236}">
+                <a16:creationId xmlns:a16="http://schemas.microsoft.com/office/drawing/2014/main" id="{71649031-E508-1D66-A15C-572DE95FA14F}"/>
               </a:ext>
             </a:extLst>
           </p:cNvPr>
@@ -4259,7 +3905,7 @@
         </p:nvCxnSpPr>
         <p:spPr>
           <a:xfrm flipV="1">
-            <a:off x="6001639" y="4182728"/>
+            <a:off x="6175060" y="4467714"/>
             <a:ext cx="0" cy="245837"/>
           </a:xfrm>
           <a:prstGeom prst="straightConnector1">
@@ -4289,10 +3935,10 @@
       </p:cxnSp>
       <p:cxnSp>
         <p:nvCxnSpPr>
-          <p:cNvPr id="41" name="Straight Arrow Connector 40">
-            <a:extLst>
-              <a:ext uri="{FF2B5EF4-FFF2-40B4-BE49-F238E27FC236}">
-                <a16:creationId xmlns:a16="http://schemas.microsoft.com/office/drawing/2014/main" id="{3B238979-04AC-B68B-8164-30519EBB28CF}"/>
+          <p:cNvPr id="34" name="Straight Arrow Connector 33">
+            <a:extLst>
+              <a:ext uri="{FF2B5EF4-FFF2-40B4-BE49-F238E27FC236}">
+                <a16:creationId xmlns:a16="http://schemas.microsoft.com/office/drawing/2014/main" id="{DCBDC94A-39FF-7571-C60D-F3C224203970}"/>
               </a:ext>
             </a:extLst>
           </p:cNvPr>
@@ -4303,7 +3949,7 @@
         </p:nvCxnSpPr>
         <p:spPr>
           <a:xfrm flipV="1">
-            <a:off x="7480815" y="4182728"/>
+            <a:off x="7654236" y="4467714"/>
             <a:ext cx="0" cy="245837"/>
           </a:xfrm>
           <a:prstGeom prst="straightConnector1">
@@ -4333,10 +3979,10 @@
       </p:cxnSp>
       <p:cxnSp>
         <p:nvCxnSpPr>
-          <p:cNvPr id="42" name="Straight Arrow Connector 41">
-            <a:extLst>
-              <a:ext uri="{FF2B5EF4-FFF2-40B4-BE49-F238E27FC236}">
-                <a16:creationId xmlns:a16="http://schemas.microsoft.com/office/drawing/2014/main" id="{20CA0825-BD13-61BE-B0D7-B64B1E05B5ED}"/>
+          <p:cNvPr id="36" name="Straight Arrow Connector 35">
+            <a:extLst>
+              <a:ext uri="{FF2B5EF4-FFF2-40B4-BE49-F238E27FC236}">
+                <a16:creationId xmlns:a16="http://schemas.microsoft.com/office/drawing/2014/main" id="{66239E81-5810-EE53-270C-CEA1B4E8BCE3}"/>
               </a:ext>
             </a:extLst>
           </p:cNvPr>
@@ -4347,7 +3993,7 @@
         </p:nvCxnSpPr>
         <p:spPr>
           <a:xfrm flipV="1">
-            <a:off x="8959991" y="4191692"/>
+            <a:off x="9133412" y="4476678"/>
             <a:ext cx="0" cy="245837"/>
           </a:xfrm>
           <a:prstGeom prst="straightConnector1">
@@ -4377,10 +4023,10 @@
       </p:cxnSp>
       <p:cxnSp>
         <p:nvCxnSpPr>
-          <p:cNvPr id="43" name="Straight Arrow Connector 42">
-            <a:extLst>
-              <a:ext uri="{FF2B5EF4-FFF2-40B4-BE49-F238E27FC236}">
-                <a16:creationId xmlns:a16="http://schemas.microsoft.com/office/drawing/2014/main" id="{0F385139-6028-ED6D-B495-F44ECDD254D0}"/>
+          <p:cNvPr id="37" name="Straight Arrow Connector 36">
+            <a:extLst>
+              <a:ext uri="{FF2B5EF4-FFF2-40B4-BE49-F238E27FC236}">
+                <a16:creationId xmlns:a16="http://schemas.microsoft.com/office/drawing/2014/main" id="{4BECBD9F-5F74-13A9-5348-A8D60AE43930}"/>
               </a:ext>
             </a:extLst>
           </p:cNvPr>
@@ -4391,7 +4037,7 @@
         </p:nvCxnSpPr>
         <p:spPr>
           <a:xfrm flipV="1">
-            <a:off x="10439166" y="4182728"/>
+            <a:off x="10612587" y="4467714"/>
             <a:ext cx="0" cy="245837"/>
           </a:xfrm>
           <a:prstGeom prst="straightConnector1">
@@ -4421,10 +4067,10 @@
       </p:cxnSp>
       <p:sp>
         <p:nvSpPr>
-          <p:cNvPr id="44" name="Oval 43">
-            <a:extLst>
-              <a:ext uri="{FF2B5EF4-FFF2-40B4-BE49-F238E27FC236}">
-                <a16:creationId xmlns:a16="http://schemas.microsoft.com/office/drawing/2014/main" id="{CE4A7636-DD03-1C66-B8CD-75970B4DC34A}"/>
+          <p:cNvPr id="38" name="Oval 37">
+            <a:extLst>
+              <a:ext uri="{FF2B5EF4-FFF2-40B4-BE49-F238E27FC236}">
+                <a16:creationId xmlns:a16="http://schemas.microsoft.com/office/drawing/2014/main" id="{03B7B5FF-7AC8-EEDE-7A12-7351A27C9F09}"/>
               </a:ext>
             </a:extLst>
           </p:cNvPr>
@@ -4433,7 +4079,7 @@
         </p:nvSpPr>
         <p:spPr>
           <a:xfrm>
-            <a:off x="2893129" y="4437529"/>
+            <a:off x="3066550" y="4722515"/>
             <a:ext cx="300314" cy="301012"/>
           </a:xfrm>
           <a:prstGeom prst="ellipse">
@@ -4479,10 +4125,10 @@
       </p:sp>
       <p:sp>
         <p:nvSpPr>
-          <p:cNvPr id="45" name="Oval 44">
-            <a:extLst>
-              <a:ext uri="{FF2B5EF4-FFF2-40B4-BE49-F238E27FC236}">
-                <a16:creationId xmlns:a16="http://schemas.microsoft.com/office/drawing/2014/main" id="{BBD11917-C7C4-9EF8-9983-07F374E13192}"/>
+          <p:cNvPr id="53" name="Oval 52">
+            <a:extLst>
+              <a:ext uri="{FF2B5EF4-FFF2-40B4-BE49-F238E27FC236}">
+                <a16:creationId xmlns:a16="http://schemas.microsoft.com/office/drawing/2014/main" id="{958E3E24-8AC8-FD9E-4D6C-67C474F21683}"/>
               </a:ext>
             </a:extLst>
           </p:cNvPr>
@@ -4491,7 +4137,7 @@
         </p:nvSpPr>
         <p:spPr>
           <a:xfrm>
-            <a:off x="4358627" y="4437529"/>
+            <a:off x="4532048" y="4722515"/>
             <a:ext cx="300314" cy="301012"/>
           </a:xfrm>
           <a:prstGeom prst="ellipse">
@@ -4537,10 +4183,10 @@
       </p:sp>
       <p:sp>
         <p:nvSpPr>
-          <p:cNvPr id="46" name="Oval 45">
-            <a:extLst>
-              <a:ext uri="{FF2B5EF4-FFF2-40B4-BE49-F238E27FC236}">
-                <a16:creationId xmlns:a16="http://schemas.microsoft.com/office/drawing/2014/main" id="{20DF4A2F-58FD-1E45-D8AC-FF2AA0A846C3}"/>
+          <p:cNvPr id="54" name="Oval 53">
+            <a:extLst>
+              <a:ext uri="{FF2B5EF4-FFF2-40B4-BE49-F238E27FC236}">
+                <a16:creationId xmlns:a16="http://schemas.microsoft.com/office/drawing/2014/main" id="{36EF2384-BDBB-7702-F4A9-FD67ECBBA12E}"/>
               </a:ext>
             </a:extLst>
           </p:cNvPr>
@@ -4549,7 +4195,7 @@
         </p:nvSpPr>
         <p:spPr>
           <a:xfrm>
-            <a:off x="5851480" y="4437529"/>
+            <a:off x="6024901" y="4722515"/>
             <a:ext cx="300314" cy="301012"/>
           </a:xfrm>
           <a:prstGeom prst="ellipse">
@@ -4595,10 +4241,10 @@
       </p:sp>
       <p:sp>
         <p:nvSpPr>
-          <p:cNvPr id="47" name="Oval 46">
-            <a:extLst>
-              <a:ext uri="{FF2B5EF4-FFF2-40B4-BE49-F238E27FC236}">
-                <a16:creationId xmlns:a16="http://schemas.microsoft.com/office/drawing/2014/main" id="{391B521F-5A03-8C9B-33E0-35BF44899337}"/>
+          <p:cNvPr id="55" name="Oval 54">
+            <a:extLst>
+              <a:ext uri="{FF2B5EF4-FFF2-40B4-BE49-F238E27FC236}">
+                <a16:creationId xmlns:a16="http://schemas.microsoft.com/office/drawing/2014/main" id="{C7445078-84B5-E836-3BE9-158976B98F9C}"/>
               </a:ext>
             </a:extLst>
           </p:cNvPr>
@@ -4607,7 +4253,7 @@
         </p:nvSpPr>
         <p:spPr>
           <a:xfrm>
-            <a:off x="7330657" y="4428565"/>
+            <a:off x="7504078" y="4713551"/>
             <a:ext cx="300314" cy="301012"/>
           </a:xfrm>
           <a:prstGeom prst="ellipse">
@@ -4653,10 +4299,10 @@
       </p:sp>
       <p:sp>
         <p:nvSpPr>
-          <p:cNvPr id="48" name="Oval 47">
-            <a:extLst>
-              <a:ext uri="{FF2B5EF4-FFF2-40B4-BE49-F238E27FC236}">
-                <a16:creationId xmlns:a16="http://schemas.microsoft.com/office/drawing/2014/main" id="{4C454432-786A-68EE-EFB7-16D990733793}"/>
+          <p:cNvPr id="56" name="Oval 55">
+            <a:extLst>
+              <a:ext uri="{FF2B5EF4-FFF2-40B4-BE49-F238E27FC236}">
+                <a16:creationId xmlns:a16="http://schemas.microsoft.com/office/drawing/2014/main" id="{AF6AF079-BF52-16EF-4CB6-DE09FF540462}"/>
               </a:ext>
             </a:extLst>
           </p:cNvPr>
@@ -4665,7 +4311,7 @@
         </p:nvSpPr>
         <p:spPr>
           <a:xfrm>
-            <a:off x="8809834" y="4428565"/>
+            <a:off x="8983255" y="4713551"/>
             <a:ext cx="300314" cy="301012"/>
           </a:xfrm>
           <a:prstGeom prst="ellipse">
@@ -4711,10 +4357,10 @@
       </p:sp>
       <p:sp>
         <p:nvSpPr>
-          <p:cNvPr id="49" name="Oval 48">
-            <a:extLst>
-              <a:ext uri="{FF2B5EF4-FFF2-40B4-BE49-F238E27FC236}">
-                <a16:creationId xmlns:a16="http://schemas.microsoft.com/office/drawing/2014/main" id="{85C29BAE-D4CD-A0E3-2E0A-9C550CF927B9}"/>
+          <p:cNvPr id="57" name="Oval 56">
+            <a:extLst>
+              <a:ext uri="{FF2B5EF4-FFF2-40B4-BE49-F238E27FC236}">
+                <a16:creationId xmlns:a16="http://schemas.microsoft.com/office/drawing/2014/main" id="{F197E0ED-E024-DE81-9473-F82B44AF82D0}"/>
               </a:ext>
             </a:extLst>
           </p:cNvPr>
@@ -4723,7 +4369,7 @@
         </p:nvSpPr>
         <p:spPr>
           <a:xfrm>
-            <a:off x="10289007" y="4428565"/>
+            <a:off x="10462428" y="4713551"/>
             <a:ext cx="300314" cy="301012"/>
           </a:xfrm>
           <a:prstGeom prst="ellipse">
@@ -4769,10 +4415,10 @@
       </p:sp>
       <p:sp>
         <p:nvSpPr>
-          <p:cNvPr id="50" name="Right Bracket 49">
-            <a:extLst>
-              <a:ext uri="{FF2B5EF4-FFF2-40B4-BE49-F238E27FC236}">
-                <a16:creationId xmlns:a16="http://schemas.microsoft.com/office/drawing/2014/main" id="{6F95E0D3-1C0A-401C-D653-EB29C9E646E0}"/>
+          <p:cNvPr id="58" name="Right Bracket 57">
+            <a:extLst>
+              <a:ext uri="{FF2B5EF4-FFF2-40B4-BE49-F238E27FC236}">
+                <a16:creationId xmlns:a16="http://schemas.microsoft.com/office/drawing/2014/main" id="{D467E9DC-C7EF-D59E-B4F3-5853C098EAC2}"/>
               </a:ext>
             </a:extLst>
           </p:cNvPr>
@@ -4781,7 +4427,7 @@
         </p:nvSpPr>
         <p:spPr>
           <a:xfrm rot="5400000">
-            <a:off x="5807189" y="3493463"/>
+            <a:off x="5980610" y="3778449"/>
             <a:ext cx="376518" cy="2884602"/>
           </a:xfrm>
           <a:prstGeom prst="rightBracket">
@@ -4822,10 +4468,10 @@
       </p:sp>
       <p:sp>
         <p:nvSpPr>
-          <p:cNvPr id="51" name="Right Bracket 50">
-            <a:extLst>
-              <a:ext uri="{FF2B5EF4-FFF2-40B4-BE49-F238E27FC236}">
-                <a16:creationId xmlns:a16="http://schemas.microsoft.com/office/drawing/2014/main" id="{37536786-53BF-7408-37F8-E11C33EC6214}"/>
+          <p:cNvPr id="59" name="Right Bracket 58">
+            <a:extLst>
+              <a:ext uri="{FF2B5EF4-FFF2-40B4-BE49-F238E27FC236}">
+                <a16:creationId xmlns:a16="http://schemas.microsoft.com/office/drawing/2014/main" id="{CCB5E125-B369-65DE-E323-E2E5A57B4BF4}"/>
               </a:ext>
             </a:extLst>
           </p:cNvPr>
@@ -4834,7 +4480,7 @@
         </p:nvSpPr>
         <p:spPr>
           <a:xfrm rot="5400000">
-            <a:off x="8022487" y="4229216"/>
+            <a:off x="8195908" y="4514202"/>
             <a:ext cx="376518" cy="1395168"/>
           </a:xfrm>
           <a:prstGeom prst="rightBracket">
@@ -4875,10 +4521,10 @@
       </p:sp>
       <p:sp>
         <p:nvSpPr>
-          <p:cNvPr id="52" name="Right Bracket 51">
-            <a:extLst>
-              <a:ext uri="{FF2B5EF4-FFF2-40B4-BE49-F238E27FC236}">
-                <a16:creationId xmlns:a16="http://schemas.microsoft.com/office/drawing/2014/main" id="{1DC1E793-4527-1297-EACF-FBA8ACC3875B}"/>
+          <p:cNvPr id="60" name="Right Bracket 59">
+            <a:extLst>
+              <a:ext uri="{FF2B5EF4-FFF2-40B4-BE49-F238E27FC236}">
+                <a16:creationId xmlns:a16="http://schemas.microsoft.com/office/drawing/2014/main" id="{2A7F7139-47A9-5BF3-0BC7-B2426473C2CE}"/>
               </a:ext>
             </a:extLst>
           </p:cNvPr>
@@ -4887,7 +4533,7 @@
         </p:nvSpPr>
         <p:spPr>
           <a:xfrm rot="5400000">
-            <a:off x="9507209" y="4233932"/>
+            <a:off x="9680630" y="4518918"/>
             <a:ext cx="376518" cy="1385740"/>
           </a:xfrm>
           <a:prstGeom prst="rightBracket">
@@ -4928,10 +4574,10 @@
       </p:sp>
       <p:sp>
         <p:nvSpPr>
-          <p:cNvPr id="72" name="Isosceles Triangle 71">
-            <a:extLst>
-              <a:ext uri="{FF2B5EF4-FFF2-40B4-BE49-F238E27FC236}">
-                <a16:creationId xmlns:a16="http://schemas.microsoft.com/office/drawing/2014/main" id="{A0300B33-5E5A-138A-241E-C27554FE5D53}"/>
+          <p:cNvPr id="61" name="Isosceles Triangle 60">
+            <a:extLst>
+              <a:ext uri="{FF2B5EF4-FFF2-40B4-BE49-F238E27FC236}">
+                <a16:creationId xmlns:a16="http://schemas.microsoft.com/office/drawing/2014/main" id="{17EC465F-1390-F8C3-282F-FC51BF604370}"/>
               </a:ext>
             </a:extLst>
           </p:cNvPr>
@@ -4940,7 +4586,7 @@
         </p:nvSpPr>
         <p:spPr>
           <a:xfrm>
-            <a:off x="8842180" y="1456900"/>
+            <a:off x="9015601" y="1741886"/>
             <a:ext cx="495650" cy="394447"/>
           </a:xfrm>
           <a:prstGeom prst="triangle">
@@ -4982,10 +4628,10 @@
       </p:sp>
       <p:sp>
         <p:nvSpPr>
-          <p:cNvPr id="73" name="Isosceles Triangle 72">
-            <a:extLst>
-              <a:ext uri="{FF2B5EF4-FFF2-40B4-BE49-F238E27FC236}">
-                <a16:creationId xmlns:a16="http://schemas.microsoft.com/office/drawing/2014/main" id="{B7D55814-C09F-A77B-1082-12D85017E7D4}"/>
+          <p:cNvPr id="62" name="Isosceles Triangle 61">
+            <a:extLst>
+              <a:ext uri="{FF2B5EF4-FFF2-40B4-BE49-F238E27FC236}">
+                <a16:creationId xmlns:a16="http://schemas.microsoft.com/office/drawing/2014/main" id="{DDD8DA1D-8914-F1BC-13CA-2F94C318CB8D}"/>
               </a:ext>
             </a:extLst>
           </p:cNvPr>
@@ -4994,7 +4640,7 @@
         </p:nvSpPr>
         <p:spPr>
           <a:xfrm>
-            <a:off x="10645137" y="4817879"/>
+            <a:off x="10818558" y="5102865"/>
             <a:ext cx="495650" cy="394447"/>
           </a:xfrm>
           <a:prstGeom prst="triangle">
@@ -5036,23 +4682,23 @@
       </p:sp>
       <p:cxnSp>
         <p:nvCxnSpPr>
-          <p:cNvPr id="74" name="Straight Arrow Connector 73">
-            <a:extLst>
-              <a:ext uri="{FF2B5EF4-FFF2-40B4-BE49-F238E27FC236}">
-                <a16:creationId xmlns:a16="http://schemas.microsoft.com/office/drawing/2014/main" id="{3C50F591-8539-097C-88BE-4A37139C6C0C}"/>
+          <p:cNvPr id="63" name="Straight Arrow Connector 62">
+            <a:extLst>
+              <a:ext uri="{FF2B5EF4-FFF2-40B4-BE49-F238E27FC236}">
+                <a16:creationId xmlns:a16="http://schemas.microsoft.com/office/drawing/2014/main" id="{F8061B65-78F4-B549-6847-04F90C67BD0B}"/>
               </a:ext>
             </a:extLst>
           </p:cNvPr>
           <p:cNvCxnSpPr>
             <a:cxnSpLocks/>
-            <a:stCxn id="72" idx="1"/>
-            <a:endCxn id="10" idx="6"/>
+            <a:stCxn id="61" idx="1"/>
+            <a:endCxn id="22" idx="6"/>
           </p:cNvCxnSpPr>
           <p:nvPr/>
         </p:nvCxnSpPr>
         <p:spPr>
           <a:xfrm flipH="1">
-            <a:off x="7630971" y="1654124"/>
+            <a:off x="7804392" y="1939110"/>
             <a:ext cx="1335122" cy="8965"/>
           </a:xfrm>
           <a:prstGeom prst="straightConnector1">
@@ -5082,22 +4728,22 @@
       </p:cxnSp>
       <p:cxnSp>
         <p:nvCxnSpPr>
-          <p:cNvPr id="77" name="Straight Arrow Connector 76">
-            <a:extLst>
-              <a:ext uri="{FF2B5EF4-FFF2-40B4-BE49-F238E27FC236}">
-                <a16:creationId xmlns:a16="http://schemas.microsoft.com/office/drawing/2014/main" id="{EFAA1D0A-DC9B-5F64-8965-3D2DA1B61A94}"/>
+          <p:cNvPr id="64" name="Straight Arrow Connector 63">
+            <a:extLst>
+              <a:ext uri="{FF2B5EF4-FFF2-40B4-BE49-F238E27FC236}">
+                <a16:creationId xmlns:a16="http://schemas.microsoft.com/office/drawing/2014/main" id="{5C4A2CF0-05EA-3C37-90D3-1F767F365E1C}"/>
               </a:ext>
             </a:extLst>
           </p:cNvPr>
           <p:cNvCxnSpPr>
             <a:cxnSpLocks/>
-            <a:stCxn id="73" idx="0"/>
+            <a:stCxn id="62" idx="0"/>
           </p:cNvCxnSpPr>
           <p:nvPr/>
         </p:nvCxnSpPr>
         <p:spPr>
           <a:xfrm flipV="1">
-            <a:off x="10892962" y="4191692"/>
+            <a:off x="11066383" y="4476678"/>
             <a:ext cx="0" cy="626187"/>
           </a:xfrm>
           <a:prstGeom prst="straightConnector1">
@@ -5127,10 +4773,10 @@
       </p:cxnSp>
       <p:sp>
         <p:nvSpPr>
-          <p:cNvPr id="91" name="Arc 90">
-            <a:extLst>
-              <a:ext uri="{FF2B5EF4-FFF2-40B4-BE49-F238E27FC236}">
-                <a16:creationId xmlns:a16="http://schemas.microsoft.com/office/drawing/2014/main" id="{0D6A2687-ED50-9A43-255D-254CF13E8F0D}"/>
+          <p:cNvPr id="65" name="Arc 64">
+            <a:extLst>
+              <a:ext uri="{FF2B5EF4-FFF2-40B4-BE49-F238E27FC236}">
+                <a16:creationId xmlns:a16="http://schemas.microsoft.com/office/drawing/2014/main" id="{7621EDEC-E029-6062-26BD-85FB57FA19EF}"/>
               </a:ext>
             </a:extLst>
           </p:cNvPr>
@@ -5139,7 +4785,7 @@
         </p:nvSpPr>
         <p:spPr>
           <a:xfrm rot="9393425">
-            <a:off x="2720775" y="4566835"/>
+            <a:off x="2894196" y="4851821"/>
             <a:ext cx="191174" cy="202634"/>
           </a:xfrm>
           <a:prstGeom prst="arc">
@@ -5181,10 +4827,10 @@
       </p:sp>
       <p:sp>
         <p:nvSpPr>
-          <p:cNvPr id="95" name="Arc 94">
-            <a:extLst>
-              <a:ext uri="{FF2B5EF4-FFF2-40B4-BE49-F238E27FC236}">
-                <a16:creationId xmlns:a16="http://schemas.microsoft.com/office/drawing/2014/main" id="{46F7DC11-38B0-414D-D6D7-0FAA6A1E575A}"/>
+          <p:cNvPr id="66" name="Arc 65">
+            <a:extLst>
+              <a:ext uri="{FF2B5EF4-FFF2-40B4-BE49-F238E27FC236}">
+                <a16:creationId xmlns:a16="http://schemas.microsoft.com/office/drawing/2014/main" id="{E73A386C-9D99-978E-D248-5B7ECF69B285}"/>
               </a:ext>
             </a:extLst>
           </p:cNvPr>
@@ -5193,7 +4839,7 @@
         </p:nvSpPr>
         <p:spPr>
           <a:xfrm rot="9393425">
-            <a:off x="4177800" y="4566836"/>
+            <a:off x="4351221" y="4851822"/>
             <a:ext cx="191174" cy="202634"/>
           </a:xfrm>
           <a:prstGeom prst="arc">
@@ -5235,10 +4881,10 @@
       </p:sp>
       <p:sp>
         <p:nvSpPr>
-          <p:cNvPr id="96" name="Arc 95">
-            <a:extLst>
-              <a:ext uri="{FF2B5EF4-FFF2-40B4-BE49-F238E27FC236}">
-                <a16:creationId xmlns:a16="http://schemas.microsoft.com/office/drawing/2014/main" id="{C57DA6D2-004F-5AD0-A6E7-2B1188620D84}"/>
+          <p:cNvPr id="67" name="Arc 66">
+            <a:extLst>
+              <a:ext uri="{FF2B5EF4-FFF2-40B4-BE49-F238E27FC236}">
+                <a16:creationId xmlns:a16="http://schemas.microsoft.com/office/drawing/2014/main" id="{BE442CF6-F889-7C70-C108-4DA0215CE6F5}"/>
               </a:ext>
             </a:extLst>
           </p:cNvPr>
@@ -5247,7 +4893,7 @@
         </p:nvSpPr>
         <p:spPr>
           <a:xfrm rot="9393425">
-            <a:off x="5679185" y="4617700"/>
+            <a:off x="5852606" y="4902686"/>
             <a:ext cx="191174" cy="202634"/>
           </a:xfrm>
           <a:prstGeom prst="arc">
@@ -5289,10 +4935,10 @@
       </p:sp>
       <p:sp>
         <p:nvSpPr>
-          <p:cNvPr id="97" name="Arc 96">
-            <a:extLst>
-              <a:ext uri="{FF2B5EF4-FFF2-40B4-BE49-F238E27FC236}">
-                <a16:creationId xmlns:a16="http://schemas.microsoft.com/office/drawing/2014/main" id="{3EC205C3-ED8E-567D-85D9-59AA292523EA}"/>
+          <p:cNvPr id="68" name="Arc 67">
+            <a:extLst>
+              <a:ext uri="{FF2B5EF4-FFF2-40B4-BE49-F238E27FC236}">
+                <a16:creationId xmlns:a16="http://schemas.microsoft.com/office/drawing/2014/main" id="{A86984AE-96F9-89F6-01B0-76E3FD6B80BA}"/>
               </a:ext>
             </a:extLst>
           </p:cNvPr>
@@ -5301,7 +4947,7 @@
         </p:nvSpPr>
         <p:spPr>
           <a:xfrm rot="9393425">
-            <a:off x="7171764" y="4562571"/>
+            <a:off x="7345185" y="4847557"/>
             <a:ext cx="191174" cy="202634"/>
           </a:xfrm>
           <a:prstGeom prst="arc">
@@ -5343,10 +4989,10 @@
       </p:sp>
       <p:sp>
         <p:nvSpPr>
-          <p:cNvPr id="98" name="Arc 97">
-            <a:extLst>
-              <a:ext uri="{FF2B5EF4-FFF2-40B4-BE49-F238E27FC236}">
-                <a16:creationId xmlns:a16="http://schemas.microsoft.com/office/drawing/2014/main" id="{F34EABC2-1626-C164-D3A1-5D97D4A6F55E}"/>
+          <p:cNvPr id="69" name="Arc 68">
+            <a:extLst>
+              <a:ext uri="{FF2B5EF4-FFF2-40B4-BE49-F238E27FC236}">
+                <a16:creationId xmlns:a16="http://schemas.microsoft.com/office/drawing/2014/main" id="{B12AAE10-B289-AA1E-7099-64C1AEC34D6B}"/>
               </a:ext>
             </a:extLst>
           </p:cNvPr>
@@ -5355,7 +5001,7 @@
         </p:nvSpPr>
         <p:spPr>
           <a:xfrm rot="9393425">
-            <a:off x="8648074" y="4540948"/>
+            <a:off x="8821495" y="4825934"/>
             <a:ext cx="191174" cy="202634"/>
           </a:xfrm>
           <a:prstGeom prst="arc">
@@ -5397,10 +5043,10 @@
       </p:sp>
       <p:sp>
         <p:nvSpPr>
-          <p:cNvPr id="99" name="Arc 98">
-            <a:extLst>
-              <a:ext uri="{FF2B5EF4-FFF2-40B4-BE49-F238E27FC236}">
-                <a16:creationId xmlns:a16="http://schemas.microsoft.com/office/drawing/2014/main" id="{466CDB29-0E0F-7225-4117-1ACA4B7593CA}"/>
+          <p:cNvPr id="70" name="Arc 69">
+            <a:extLst>
+              <a:ext uri="{FF2B5EF4-FFF2-40B4-BE49-F238E27FC236}">
+                <a16:creationId xmlns:a16="http://schemas.microsoft.com/office/drawing/2014/main" id="{06861282-94A9-F5A9-8C33-B1BD8FA71AF2}"/>
               </a:ext>
             </a:extLst>
           </p:cNvPr>
@@ -5409,7 +5055,7 @@
         </p:nvSpPr>
         <p:spPr>
           <a:xfrm rot="9393425">
-            <a:off x="10119881" y="4550421"/>
+            <a:off x="10293302" y="4835407"/>
             <a:ext cx="191174" cy="202634"/>
           </a:xfrm>
           <a:prstGeom prst="arc">
@@ -5451,10 +5097,10 @@
       </p:sp>
       <p:sp>
         <p:nvSpPr>
-          <p:cNvPr id="100" name="TextBox 99">
-            <a:extLst>
-              <a:ext uri="{FF2B5EF4-FFF2-40B4-BE49-F238E27FC236}">
-                <a16:creationId xmlns:a16="http://schemas.microsoft.com/office/drawing/2014/main" id="{100E8614-D7B1-0585-0751-4C81E2769F79}"/>
+          <p:cNvPr id="71" name="TextBox 70">
+            <a:extLst>
+              <a:ext uri="{FF2B5EF4-FFF2-40B4-BE49-F238E27FC236}">
+                <a16:creationId xmlns:a16="http://schemas.microsoft.com/office/drawing/2014/main" id="{E9D38417-DCD8-CC34-48B2-ABCE762D7D56}"/>
               </a:ext>
             </a:extLst>
           </p:cNvPr>
@@ -5463,7 +5109,7 @@
         </p:nvSpPr>
         <p:spPr>
           <a:xfrm>
-            <a:off x="4422784" y="2858162"/>
+            <a:off x="4596205" y="3143148"/>
             <a:ext cx="636278" cy="292388"/>
           </a:xfrm>
           <a:prstGeom prst="rect">
@@ -5492,10 +5138,10 @@
       </p:sp>
       <p:sp>
         <p:nvSpPr>
-          <p:cNvPr id="101" name="TextBox 100">
-            <a:extLst>
-              <a:ext uri="{FF2B5EF4-FFF2-40B4-BE49-F238E27FC236}">
-                <a16:creationId xmlns:a16="http://schemas.microsoft.com/office/drawing/2014/main" id="{598835A6-C071-D14A-BDEA-05D7F5E905B5}"/>
+          <p:cNvPr id="75" name="TextBox 74">
+            <a:extLst>
+              <a:ext uri="{FF2B5EF4-FFF2-40B4-BE49-F238E27FC236}">
+                <a16:creationId xmlns:a16="http://schemas.microsoft.com/office/drawing/2014/main" id="{B5FCB192-B50E-F8E1-8D23-11BF3B92D498}"/>
               </a:ext>
             </a:extLst>
           </p:cNvPr>
@@ -5504,7 +5150,7 @@
         </p:nvSpPr>
         <p:spPr>
           <a:xfrm>
-            <a:off x="5043861" y="2952190"/>
+            <a:off x="5217282" y="3237176"/>
             <a:ext cx="636278" cy="292388"/>
           </a:xfrm>
           <a:prstGeom prst="rect">
@@ -5533,10 +5179,10 @@
       </p:sp>
       <p:sp>
         <p:nvSpPr>
-          <p:cNvPr id="102" name="TextBox 101">
-            <a:extLst>
-              <a:ext uri="{FF2B5EF4-FFF2-40B4-BE49-F238E27FC236}">
-                <a16:creationId xmlns:a16="http://schemas.microsoft.com/office/drawing/2014/main" id="{3D89E253-AF07-C305-474A-AEC490A471CE}"/>
+          <p:cNvPr id="76" name="TextBox 75">
+            <a:extLst>
+              <a:ext uri="{FF2B5EF4-FFF2-40B4-BE49-F238E27FC236}">
+                <a16:creationId xmlns:a16="http://schemas.microsoft.com/office/drawing/2014/main" id="{E63FCA0C-7F11-2A6F-6845-EC6986C3DB8E}"/>
               </a:ext>
             </a:extLst>
           </p:cNvPr>
@@ -5545,7 +5191,7 @@
         </p:nvSpPr>
         <p:spPr>
           <a:xfrm>
-            <a:off x="5995448" y="2974554"/>
+            <a:off x="6168869" y="3259540"/>
             <a:ext cx="636278" cy="292388"/>
           </a:xfrm>
           <a:prstGeom prst="rect">
@@ -5574,10 +5220,10 @@
       </p:sp>
       <p:sp>
         <p:nvSpPr>
-          <p:cNvPr id="103" name="TextBox 102">
-            <a:extLst>
-              <a:ext uri="{FF2B5EF4-FFF2-40B4-BE49-F238E27FC236}">
-                <a16:creationId xmlns:a16="http://schemas.microsoft.com/office/drawing/2014/main" id="{208E118D-DEB8-3BF3-DB84-7821C3101053}"/>
+          <p:cNvPr id="78" name="TextBox 77">
+            <a:extLst>
+              <a:ext uri="{FF2B5EF4-FFF2-40B4-BE49-F238E27FC236}">
+                <a16:creationId xmlns:a16="http://schemas.microsoft.com/office/drawing/2014/main" id="{A5F29A07-0B88-78E5-7AD5-A7C00B355448}"/>
               </a:ext>
             </a:extLst>
           </p:cNvPr>
@@ -5586,7 +5232,7 @@
         </p:nvSpPr>
         <p:spPr>
           <a:xfrm>
-            <a:off x="6917771" y="2969517"/>
+            <a:off x="7091192" y="3254503"/>
             <a:ext cx="636278" cy="292388"/>
           </a:xfrm>
           <a:prstGeom prst="rect">
@@ -5615,10 +5261,10 @@
       </p:sp>
       <p:sp>
         <p:nvSpPr>
-          <p:cNvPr id="104" name="TextBox 103">
-            <a:extLst>
-              <a:ext uri="{FF2B5EF4-FFF2-40B4-BE49-F238E27FC236}">
-                <a16:creationId xmlns:a16="http://schemas.microsoft.com/office/drawing/2014/main" id="{9C3315A0-394F-23B6-C4C3-C42CB76392AA}"/>
+          <p:cNvPr id="79" name="TextBox 78">
+            <a:extLst>
+              <a:ext uri="{FF2B5EF4-FFF2-40B4-BE49-F238E27FC236}">
+                <a16:creationId xmlns:a16="http://schemas.microsoft.com/office/drawing/2014/main" id="{6BD5FE8D-03E9-DD1F-364C-275F96A02549}"/>
               </a:ext>
             </a:extLst>
           </p:cNvPr>
@@ -5627,7 +5273,7 @@
         </p:nvSpPr>
         <p:spPr>
           <a:xfrm>
-            <a:off x="7889756" y="2948492"/>
+            <a:off x="8063177" y="3233478"/>
             <a:ext cx="636278" cy="292388"/>
           </a:xfrm>
           <a:prstGeom prst="rect">
@@ -5656,10 +5302,10 @@
       </p:sp>
       <p:sp>
         <p:nvSpPr>
-          <p:cNvPr id="105" name="TextBox 104">
-            <a:extLst>
-              <a:ext uri="{FF2B5EF4-FFF2-40B4-BE49-F238E27FC236}">
-                <a16:creationId xmlns:a16="http://schemas.microsoft.com/office/drawing/2014/main" id="{127A5872-4AF0-1987-3C99-8C3C7A52ED37}"/>
+          <p:cNvPr id="80" name="TextBox 79">
+            <a:extLst>
+              <a:ext uri="{FF2B5EF4-FFF2-40B4-BE49-F238E27FC236}">
+                <a16:creationId xmlns:a16="http://schemas.microsoft.com/office/drawing/2014/main" id="{104ACAA7-776B-D9A7-CC69-E680CFAC6421}"/>
               </a:ext>
             </a:extLst>
           </p:cNvPr>
@@ -5668,7 +5314,7 @@
         </p:nvSpPr>
         <p:spPr>
           <a:xfrm>
-            <a:off x="8745161" y="2913944"/>
+            <a:off x="8918582" y="3198930"/>
             <a:ext cx="636278" cy="292388"/>
           </a:xfrm>
           <a:prstGeom prst="rect">
@@ -5697,10 +5343,10 @@
       </p:sp>
       <p:sp>
         <p:nvSpPr>
-          <p:cNvPr id="106" name="TextBox 105">
-            <a:extLst>
-              <a:ext uri="{FF2B5EF4-FFF2-40B4-BE49-F238E27FC236}">
-                <a16:creationId xmlns:a16="http://schemas.microsoft.com/office/drawing/2014/main" id="{B708C730-CF19-91DC-645A-F02C5CE6E01A}"/>
+          <p:cNvPr id="81" name="TextBox 80">
+            <a:extLst>
+              <a:ext uri="{FF2B5EF4-FFF2-40B4-BE49-F238E27FC236}">
+                <a16:creationId xmlns:a16="http://schemas.microsoft.com/office/drawing/2014/main" id="{B9185310-A6EF-EB9A-214E-C483DCEE4130}"/>
               </a:ext>
             </a:extLst>
           </p:cNvPr>
@@ -5709,7 +5355,7 @@
         </p:nvSpPr>
         <p:spPr>
           <a:xfrm>
-            <a:off x="5142253" y="1386962"/>
+            <a:off x="5315674" y="1671948"/>
             <a:ext cx="636278" cy="292388"/>
           </a:xfrm>
           <a:prstGeom prst="rect">
@@ -5738,10 +5384,10 @@
       </p:sp>
       <p:sp>
         <p:nvSpPr>
-          <p:cNvPr id="117" name="Oval 116">
-            <a:extLst>
-              <a:ext uri="{FF2B5EF4-FFF2-40B4-BE49-F238E27FC236}">
-                <a16:creationId xmlns:a16="http://schemas.microsoft.com/office/drawing/2014/main" id="{B09266F2-7050-09CF-2528-E278CAF4DC49}"/>
+          <p:cNvPr id="82" name="Oval 81">
+            <a:extLst>
+              <a:ext uri="{FF2B5EF4-FFF2-40B4-BE49-F238E27FC236}">
+                <a16:creationId xmlns:a16="http://schemas.microsoft.com/office/drawing/2014/main" id="{C07034AC-6497-BC87-DD53-76167DED36C0}"/>
               </a:ext>
             </a:extLst>
           </p:cNvPr>
@@ -5750,7 +5396,7 @@
         </p:nvSpPr>
         <p:spPr>
           <a:xfrm>
-            <a:off x="7744451" y="746180"/>
+            <a:off x="7917872" y="1031166"/>
             <a:ext cx="300314" cy="301012"/>
           </a:xfrm>
           <a:prstGeom prst="ellipse">
@@ -5796,23 +5442,23 @@
       </p:sp>
       <p:cxnSp>
         <p:nvCxnSpPr>
-          <p:cNvPr id="118" name="Straight Arrow Connector 117">
-            <a:extLst>
-              <a:ext uri="{FF2B5EF4-FFF2-40B4-BE49-F238E27FC236}">
-                <a16:creationId xmlns:a16="http://schemas.microsoft.com/office/drawing/2014/main" id="{637E51DA-17AC-A97E-B1A6-81BCC52F8F41}"/>
+          <p:cNvPr id="83" name="Straight Arrow Connector 82">
+            <a:extLst>
+              <a:ext uri="{FF2B5EF4-FFF2-40B4-BE49-F238E27FC236}">
+                <a16:creationId xmlns:a16="http://schemas.microsoft.com/office/drawing/2014/main" id="{F56E7AAF-20D2-6D45-A0D5-CB8F48A4032A}"/>
               </a:ext>
             </a:extLst>
           </p:cNvPr>
           <p:cNvCxnSpPr>
             <a:cxnSpLocks/>
-            <a:stCxn id="117" idx="3"/>
-            <a:endCxn id="10" idx="7"/>
+            <a:stCxn id="82" idx="3"/>
+            <a:endCxn id="22" idx="7"/>
           </p:cNvCxnSpPr>
           <p:nvPr/>
         </p:nvCxnSpPr>
         <p:spPr>
           <a:xfrm flipH="1">
-            <a:off x="7420915" y="1003110"/>
+            <a:off x="7594336" y="1288096"/>
             <a:ext cx="367516" cy="254282"/>
           </a:xfrm>
           <a:prstGeom prst="straightConnector1">
@@ -5843,10 +5489,10 @@
       </p:cxnSp>
       <p:sp>
         <p:nvSpPr>
-          <p:cNvPr id="122" name="Arc 121">
-            <a:extLst>
-              <a:ext uri="{FF2B5EF4-FFF2-40B4-BE49-F238E27FC236}">
-                <a16:creationId xmlns:a16="http://schemas.microsoft.com/office/drawing/2014/main" id="{085AC985-EDA9-EDF7-2F60-2BBBB0C325B3}"/>
+          <p:cNvPr id="84" name="Arc 83">
+            <a:extLst>
+              <a:ext uri="{FF2B5EF4-FFF2-40B4-BE49-F238E27FC236}">
+                <a16:creationId xmlns:a16="http://schemas.microsoft.com/office/drawing/2014/main" id="{6BC04BB8-EFB9-6B81-8BEB-2ADF166E1162}"/>
               </a:ext>
             </a:extLst>
           </p:cNvPr>
@@ -5855,7 +5501,7 @@
         </p:nvSpPr>
         <p:spPr>
           <a:xfrm rot="947224">
-            <a:off x="8018796" y="885564"/>
+            <a:off x="8192217" y="1170550"/>
             <a:ext cx="191174" cy="202634"/>
           </a:xfrm>
           <a:prstGeom prst="arc">
@@ -5897,10 +5543,10 @@
       </p:sp>
       <p:sp>
         <p:nvSpPr>
-          <p:cNvPr id="124" name="TextBox 123">
-            <a:extLst>
-              <a:ext uri="{FF2B5EF4-FFF2-40B4-BE49-F238E27FC236}">
-                <a16:creationId xmlns:a16="http://schemas.microsoft.com/office/drawing/2014/main" id="{4A2A1F15-9392-E803-FB75-D761D9DB2E5E}"/>
+          <p:cNvPr id="85" name="TextBox 84">
+            <a:extLst>
+              <a:ext uri="{FF2B5EF4-FFF2-40B4-BE49-F238E27FC236}">
+                <a16:creationId xmlns:a16="http://schemas.microsoft.com/office/drawing/2014/main" id="{55BB358C-55F3-3E82-D478-21CA3224B282}"/>
               </a:ext>
             </a:extLst>
           </p:cNvPr>
@@ -5909,7 +5555,7 @@
         </p:nvSpPr>
         <p:spPr>
           <a:xfrm>
-            <a:off x="8076211" y="865921"/>
+            <a:off x="8249632" y="1150907"/>
             <a:ext cx="1228587" cy="292388"/>
           </a:xfrm>
           <a:prstGeom prst="rect">
@@ -5937,10 +5583,10 @@
       </p:sp>
       <p:sp>
         <p:nvSpPr>
-          <p:cNvPr id="125" name="TextBox 124">
-            <a:extLst>
-              <a:ext uri="{FF2B5EF4-FFF2-40B4-BE49-F238E27FC236}">
-                <a16:creationId xmlns:a16="http://schemas.microsoft.com/office/drawing/2014/main" id="{DDE9DEBD-B174-1E3E-14D8-C9E983B45E5D}"/>
+          <p:cNvPr id="86" name="TextBox 85">
+            <a:extLst>
+              <a:ext uri="{FF2B5EF4-FFF2-40B4-BE49-F238E27FC236}">
+                <a16:creationId xmlns:a16="http://schemas.microsoft.com/office/drawing/2014/main" id="{45FD0379-4675-9022-0E71-B35B4100DFD5}"/>
               </a:ext>
             </a:extLst>
           </p:cNvPr>
@@ -5949,7 +5595,7 @@
         </p:nvSpPr>
         <p:spPr>
           <a:xfrm>
-            <a:off x="9304798" y="4543205"/>
+            <a:off x="9478219" y="4828191"/>
             <a:ext cx="991506" cy="292388"/>
           </a:xfrm>
           <a:prstGeom prst="rect">
@@ -5978,10 +5624,10 @@
       </p:sp>
       <p:sp>
         <p:nvSpPr>
-          <p:cNvPr id="128" name="TextBox 127">
-            <a:extLst>
-              <a:ext uri="{FF2B5EF4-FFF2-40B4-BE49-F238E27FC236}">
-                <a16:creationId xmlns:a16="http://schemas.microsoft.com/office/drawing/2014/main" id="{A137164D-4E3A-1AA8-04B6-AC453C4F9C96}"/>
+          <p:cNvPr id="87" name="TextBox 86">
+            <a:extLst>
+              <a:ext uri="{FF2B5EF4-FFF2-40B4-BE49-F238E27FC236}">
+                <a16:creationId xmlns:a16="http://schemas.microsoft.com/office/drawing/2014/main" id="{67694166-E284-B1D9-E823-F90D78EE229F}"/>
               </a:ext>
             </a:extLst>
           </p:cNvPr>
@@ -5990,7 +5636,7 @@
         </p:nvSpPr>
         <p:spPr>
           <a:xfrm>
-            <a:off x="8032866" y="1452179"/>
+            <a:off x="8206287" y="1737165"/>
             <a:ext cx="636278" cy="492443"/>
           </a:xfrm>
           <a:prstGeom prst="rect">
@@ -6023,10 +5669,10 @@
       </p:sp>
       <p:sp>
         <p:nvSpPr>
-          <p:cNvPr id="130" name="TextBox 129">
-            <a:extLst>
-              <a:ext uri="{FF2B5EF4-FFF2-40B4-BE49-F238E27FC236}">
-                <a16:creationId xmlns:a16="http://schemas.microsoft.com/office/drawing/2014/main" id="{2810547A-A289-BB3C-E42B-E6697714B3DE}"/>
+          <p:cNvPr id="88" name="TextBox 87">
+            <a:extLst>
+              <a:ext uri="{FF2B5EF4-FFF2-40B4-BE49-F238E27FC236}">
+                <a16:creationId xmlns:a16="http://schemas.microsoft.com/office/drawing/2014/main" id="{BAFB7FD6-FA58-1189-4D6E-6AE8947D4443}"/>
               </a:ext>
             </a:extLst>
           </p:cNvPr>
@@ -6035,7 +5681,7 @@
         </p:nvSpPr>
         <p:spPr>
           <a:xfrm>
-            <a:off x="10645137" y="4426629"/>
+            <a:off x="10818558" y="4711615"/>
             <a:ext cx="543368" cy="292388"/>
           </a:xfrm>
           <a:prstGeom prst="rect">
@@ -6064,10 +5710,10 @@
       </p:sp>
       <p:sp>
         <p:nvSpPr>
-          <p:cNvPr id="131" name="TextBox 130">
-            <a:extLst>
-              <a:ext uri="{FF2B5EF4-FFF2-40B4-BE49-F238E27FC236}">
-                <a16:creationId xmlns:a16="http://schemas.microsoft.com/office/drawing/2014/main" id="{BF7C0D94-7AE5-C14D-1E97-3D1A06A553DA}"/>
+          <p:cNvPr id="89" name="TextBox 88">
+            <a:extLst>
+              <a:ext uri="{FF2B5EF4-FFF2-40B4-BE49-F238E27FC236}">
+                <a16:creationId xmlns:a16="http://schemas.microsoft.com/office/drawing/2014/main" id="{84F5ABEB-0233-9463-7F51-C3D2692D2ABB}"/>
               </a:ext>
             </a:extLst>
           </p:cNvPr>
@@ -6076,7 +5722,7 @@
         </p:nvSpPr>
         <p:spPr>
           <a:xfrm>
-            <a:off x="7842399" y="4530463"/>
+            <a:off x="8015820" y="4815449"/>
             <a:ext cx="991506" cy="292388"/>
           </a:xfrm>
           <a:prstGeom prst="rect">
@@ -6105,10 +5751,10 @@
       </p:sp>
       <p:sp>
         <p:nvSpPr>
-          <p:cNvPr id="132" name="TextBox 131">
-            <a:extLst>
-              <a:ext uri="{FF2B5EF4-FFF2-40B4-BE49-F238E27FC236}">
-                <a16:creationId xmlns:a16="http://schemas.microsoft.com/office/drawing/2014/main" id="{571B04FC-9009-6AC8-645A-954FB9554A47}"/>
+          <p:cNvPr id="90" name="TextBox 89">
+            <a:extLst>
+              <a:ext uri="{FF2B5EF4-FFF2-40B4-BE49-F238E27FC236}">
+                <a16:creationId xmlns:a16="http://schemas.microsoft.com/office/drawing/2014/main" id="{54235F55-533B-5027-1465-C213F9C530A9}"/>
               </a:ext>
             </a:extLst>
           </p:cNvPr>
@@ -6117,7 +5763,7 @@
         </p:nvSpPr>
         <p:spPr>
           <a:xfrm>
-            <a:off x="6356507" y="4547027"/>
+            <a:off x="6529928" y="4832013"/>
             <a:ext cx="991506" cy="292388"/>
           </a:xfrm>
           <a:prstGeom prst="rect">
@@ -6146,10 +5792,10 @@
       </p:sp>
       <p:sp>
         <p:nvSpPr>
-          <p:cNvPr id="133" name="TextBox 132">
-            <a:extLst>
-              <a:ext uri="{FF2B5EF4-FFF2-40B4-BE49-F238E27FC236}">
-                <a16:creationId xmlns:a16="http://schemas.microsoft.com/office/drawing/2014/main" id="{B09F0023-E842-C572-BBA8-451DB08EA4E1}"/>
+          <p:cNvPr id="92" name="TextBox 91">
+            <a:extLst>
+              <a:ext uri="{FF2B5EF4-FFF2-40B4-BE49-F238E27FC236}">
+                <a16:creationId xmlns:a16="http://schemas.microsoft.com/office/drawing/2014/main" id="{0FD8EF88-360A-DAB2-F6DD-DD959CB050A2}"/>
               </a:ext>
             </a:extLst>
           </p:cNvPr>
@@ -6158,7 +5804,7 @@
         </p:nvSpPr>
         <p:spPr>
           <a:xfrm>
-            <a:off x="4879534" y="4583514"/>
+            <a:off x="5052955" y="4868500"/>
             <a:ext cx="991506" cy="292388"/>
           </a:xfrm>
           <a:prstGeom prst="rect">
@@ -6187,10 +5833,10 @@
       </p:sp>
       <p:sp>
         <p:nvSpPr>
-          <p:cNvPr id="134" name="TextBox 133">
-            <a:extLst>
-              <a:ext uri="{FF2B5EF4-FFF2-40B4-BE49-F238E27FC236}">
-                <a16:creationId xmlns:a16="http://schemas.microsoft.com/office/drawing/2014/main" id="{BAB0B571-8B9E-9A5B-A691-3D033774A9E1}"/>
+          <p:cNvPr id="93" name="TextBox 92">
+            <a:extLst>
+              <a:ext uri="{FF2B5EF4-FFF2-40B4-BE49-F238E27FC236}">
+                <a16:creationId xmlns:a16="http://schemas.microsoft.com/office/drawing/2014/main" id="{2FFB8B27-94A2-03FE-DA28-354A5DD725AD}"/>
               </a:ext>
             </a:extLst>
           </p:cNvPr>
@@ -6199,7 +5845,7 @@
         </p:nvSpPr>
         <p:spPr>
           <a:xfrm>
-            <a:off x="3363407" y="4530463"/>
+            <a:off x="3536828" y="4815449"/>
             <a:ext cx="991506" cy="292388"/>
           </a:xfrm>
           <a:prstGeom prst="rect">
@@ -6228,10 +5874,10 @@
       </p:sp>
       <p:sp>
         <p:nvSpPr>
-          <p:cNvPr id="135" name="TextBox 134">
-            <a:extLst>
-              <a:ext uri="{FF2B5EF4-FFF2-40B4-BE49-F238E27FC236}">
-                <a16:creationId xmlns:a16="http://schemas.microsoft.com/office/drawing/2014/main" id="{A4B55025-8A10-16DF-7C74-3B28983F195C}"/>
+          <p:cNvPr id="94" name="TextBox 93">
+            <a:extLst>
+              <a:ext uri="{FF2B5EF4-FFF2-40B4-BE49-F238E27FC236}">
+                <a16:creationId xmlns:a16="http://schemas.microsoft.com/office/drawing/2014/main" id="{E507CB5A-2DD7-7585-CD1B-29D091ECB0CC}"/>
               </a:ext>
             </a:extLst>
           </p:cNvPr>
@@ -6240,7 +5886,7 @@
         </p:nvSpPr>
         <p:spPr>
           <a:xfrm>
-            <a:off x="1886826" y="4537170"/>
+            <a:off x="2060247" y="4822156"/>
             <a:ext cx="991506" cy="292388"/>
           </a:xfrm>
           <a:prstGeom prst="rect">
@@ -6269,10 +5915,10 @@
       </p:sp>
       <p:sp>
         <p:nvSpPr>
-          <p:cNvPr id="136" name="TextBox 135">
-            <a:extLst>
-              <a:ext uri="{FF2B5EF4-FFF2-40B4-BE49-F238E27FC236}">
-                <a16:creationId xmlns:a16="http://schemas.microsoft.com/office/drawing/2014/main" id="{19677063-5436-41E1-24F0-33CC2213F56F}"/>
+          <p:cNvPr id="109" name="TextBox 108">
+            <a:extLst>
+              <a:ext uri="{FF2B5EF4-FFF2-40B4-BE49-F238E27FC236}">
+                <a16:creationId xmlns:a16="http://schemas.microsoft.com/office/drawing/2014/main" id="{D4415931-14BD-B87C-87E7-4D51BEEBCB46}"/>
               </a:ext>
             </a:extLst>
           </p:cNvPr>
@@ -6281,7 +5927,7 @@
         </p:nvSpPr>
         <p:spPr>
           <a:xfrm>
-            <a:off x="7783553" y="4974876"/>
+            <a:off x="7956974" y="5259862"/>
             <a:ext cx="934773" cy="292388"/>
           </a:xfrm>
           <a:prstGeom prst="rect">
@@ -6310,10 +5956,10 @@
       </p:sp>
       <p:sp>
         <p:nvSpPr>
-          <p:cNvPr id="138" name="TextBox 137">
-            <a:extLst>
-              <a:ext uri="{FF2B5EF4-FFF2-40B4-BE49-F238E27FC236}">
-                <a16:creationId xmlns:a16="http://schemas.microsoft.com/office/drawing/2014/main" id="{13CB2B1E-122F-6CD7-CF6A-143FEA7719F1}"/>
+          <p:cNvPr id="110" name="TextBox 109">
+            <a:extLst>
+              <a:ext uri="{FF2B5EF4-FFF2-40B4-BE49-F238E27FC236}">
+                <a16:creationId xmlns:a16="http://schemas.microsoft.com/office/drawing/2014/main" id="{87F01862-D85E-6EB3-D43E-72CD1FD4948E}"/>
               </a:ext>
             </a:extLst>
           </p:cNvPr>
@@ -6322,7 +5968,7 @@
         </p:nvSpPr>
         <p:spPr>
           <a:xfrm>
-            <a:off x="5589887" y="4966975"/>
+            <a:off x="5763308" y="5251961"/>
             <a:ext cx="1196584" cy="292388"/>
           </a:xfrm>
           <a:prstGeom prst="rect">
@@ -6351,10 +5997,10 @@
       </p:sp>
       <p:sp>
         <p:nvSpPr>
-          <p:cNvPr id="143" name="TextBox 142">
-            <a:extLst>
-              <a:ext uri="{FF2B5EF4-FFF2-40B4-BE49-F238E27FC236}">
-                <a16:creationId xmlns:a16="http://schemas.microsoft.com/office/drawing/2014/main" id="{7C67C902-8592-CBC3-B0D3-FCEF6BB83C95}"/>
+          <p:cNvPr id="111" name="TextBox 110">
+            <a:extLst>
+              <a:ext uri="{FF2B5EF4-FFF2-40B4-BE49-F238E27FC236}">
+                <a16:creationId xmlns:a16="http://schemas.microsoft.com/office/drawing/2014/main" id="{9EF98538-FE90-9F56-47A4-10AE6F4F6FB4}"/>
               </a:ext>
             </a:extLst>
           </p:cNvPr>
@@ -6363,7 +6009,7 @@
         </p:nvSpPr>
         <p:spPr>
           <a:xfrm>
-            <a:off x="10611563" y="4349936"/>
+            <a:off x="10784984" y="4634922"/>
             <a:ext cx="636278" cy="492443"/>
           </a:xfrm>
           <a:prstGeom prst="rect">
@@ -6396,10 +6042,10 @@
       </p:sp>
       <p:sp>
         <p:nvSpPr>
-          <p:cNvPr id="149" name="TextBox 148">
-            <a:extLst>
-              <a:ext uri="{FF2B5EF4-FFF2-40B4-BE49-F238E27FC236}">
-                <a16:creationId xmlns:a16="http://schemas.microsoft.com/office/drawing/2014/main" id="{CD335B83-7EC3-E709-0A91-2A8D6CDA63B2}"/>
+          <p:cNvPr id="112" name="TextBox 111">
+            <a:extLst>
+              <a:ext uri="{FF2B5EF4-FFF2-40B4-BE49-F238E27FC236}">
+                <a16:creationId xmlns:a16="http://schemas.microsoft.com/office/drawing/2014/main" id="{A73E0B24-90FC-01FE-8080-056D422675FE}"/>
               </a:ext>
             </a:extLst>
           </p:cNvPr>
@@ -6408,8 +6054,8 @@
         </p:nvSpPr>
         <p:spPr>
           <a:xfrm>
-            <a:off x="0" y="0"/>
-            <a:ext cx="3078706" cy="292388"/>
+            <a:off x="9445725" y="5251961"/>
+            <a:ext cx="934773" cy="292388"/>
           </a:xfrm>
           <a:prstGeom prst="rect">
             <a:avLst/>
@@ -6427,94 +6073,6 @@
           </a:bodyPr>
           <a:lstStyle/>
           <a:p>
-            <a:r>
-              <a:rPr lang="en-GB" sz="1300" dirty="0"/>
-              <a:t>NOT standardized coefficients</a:t>
-            </a:r>
-          </a:p>
-        </p:txBody>
-      </p:sp>
-      <p:sp>
-        <p:nvSpPr>
-          <p:cNvPr id="150" name="TextBox 149">
-            <a:extLst>
-              <a:ext uri="{FF2B5EF4-FFF2-40B4-BE49-F238E27FC236}">
-                <a16:creationId xmlns:a16="http://schemas.microsoft.com/office/drawing/2014/main" id="{259AD72B-74E4-579B-FBB0-914A60120211}"/>
-              </a:ext>
-            </a:extLst>
-          </p:cNvPr>
-          <p:cNvSpPr txBox="1"/>
-          <p:nvPr/>
-        </p:nvSpPr>
-        <p:spPr>
-          <a:xfrm>
-            <a:off x="155405" y="6229350"/>
-            <a:ext cx="4888456" cy="292388"/>
-          </a:xfrm>
-          <a:prstGeom prst="rect">
-            <a:avLst/>
-          </a:prstGeom>
-          <a:solidFill>
-            <a:schemeClr val="bg1"/>
-          </a:solidFill>
-          <a:effectLst>
-            <a:softEdge rad="63500"/>
-          </a:effectLst>
-        </p:spPr>
-        <p:txBody>
-          <a:bodyPr wrap="square" rtlCol="0">
-            <a:spAutoFit/>
-          </a:bodyPr>
-          <a:lstStyle/>
-          <a:p>
-            <a:r>
-              <a:rPr lang="el-GR" sz="1300" dirty="0"/>
-              <a:t>χ</a:t>
-            </a:r>
-            <a:r>
-              <a:rPr lang="en-GB" sz="1300" baseline="30000" dirty="0"/>
-              <a:t>2</a:t>
-            </a:r>
-            <a:r>
-              <a:rPr lang="en-GB" sz="1300" dirty="0"/>
-              <a:t>(33) = 56.844; p = 0.006; RMSEA = 0.035; CFI = 0.966</a:t>
-            </a:r>
-          </a:p>
-        </p:txBody>
-      </p:sp>
-      <p:sp>
-        <p:nvSpPr>
-          <p:cNvPr id="2" name="TextBox 1">
-            <a:extLst>
-              <a:ext uri="{FF2B5EF4-FFF2-40B4-BE49-F238E27FC236}">
-                <a16:creationId xmlns:a16="http://schemas.microsoft.com/office/drawing/2014/main" id="{7BC90BD8-B0E3-94F2-0017-254C04BB93F8}"/>
-              </a:ext>
-            </a:extLst>
-          </p:cNvPr>
-          <p:cNvSpPr txBox="1"/>
-          <p:nvPr/>
-        </p:nvSpPr>
-        <p:spPr>
-          <a:xfrm>
-            <a:off x="9272304" y="4966975"/>
-            <a:ext cx="934773" cy="292388"/>
-          </a:xfrm>
-          <a:prstGeom prst="rect">
-            <a:avLst/>
-          </a:prstGeom>
-          <a:solidFill>
-            <a:schemeClr val="bg1"/>
-          </a:solidFill>
-          <a:effectLst>
-            <a:softEdge rad="63500"/>
-          </a:effectLst>
-        </p:spPr>
-        <p:txBody>
-          <a:bodyPr wrap="square" rtlCol="0">
-            <a:spAutoFit/>
-          </a:bodyPr>
-          <a:lstStyle/>
-          <a:p>
             <a:pPr algn="ctr"/>
             <a:r>
               <a:rPr lang="en-GB" sz="1300" dirty="0"/>
@@ -6523,42 +6081,12 @@
           </a:p>
         </p:txBody>
       </p:sp>
-    </p:spTree>
-    <p:extLst>
-      <p:ext uri="{BB962C8B-B14F-4D97-AF65-F5344CB8AC3E}">
-        <p14:creationId xmlns:p14="http://schemas.microsoft.com/office/powerpoint/2010/main" val="2466163990"/>
-      </p:ext>
-    </p:extLst>
-  </p:cSld>
-  <p:clrMapOvr>
-    <a:masterClrMapping/>
-  </p:clrMapOvr>
-</p:sld>
-</file>
-
-<file path=ppt/slides/slide2.xml><?xml version="1.0" encoding="utf-8"?>
-<p:sld xmlns:a="http://schemas.openxmlformats.org/drawingml/2006/main" xmlns:r="http://schemas.openxmlformats.org/officeDocument/2006/relationships" xmlns:p="http://schemas.openxmlformats.org/presentationml/2006/main">
-  <p:cSld>
-    <p:spTree>
-      <p:nvGrpSpPr>
-        <p:cNvPr id="1" name=""/>
-        <p:cNvGrpSpPr/>
-        <p:nvPr/>
-      </p:nvGrpSpPr>
-      <p:grpSpPr>
-        <a:xfrm>
-          <a:off x="0" y="0"/>
-          <a:ext cx="0" cy="0"/>
-          <a:chOff x="0" y="0"/>
-          <a:chExt cx="0" cy="0"/>
-        </a:xfrm>
-      </p:grpSpPr>
-      <p:sp>
-        <p:nvSpPr>
-          <p:cNvPr id="4" name="Rectangle 3">
-            <a:extLst>
-              <a:ext uri="{FF2B5EF4-FFF2-40B4-BE49-F238E27FC236}">
-                <a16:creationId xmlns:a16="http://schemas.microsoft.com/office/drawing/2014/main" id="{B9075279-5A7E-3A80-79A7-9B9CC978A4AD}"/>
+      <p:sp>
+        <p:nvSpPr>
+          <p:cNvPr id="113" name="Rectangle 112">
+            <a:extLst>
+              <a:ext uri="{FF2B5EF4-FFF2-40B4-BE49-F238E27FC236}">
+                <a16:creationId xmlns:a16="http://schemas.microsoft.com/office/drawing/2014/main" id="{803C2E85-CF55-E972-A5FD-3A13DB423E9C}"/>
               </a:ext>
             </a:extLst>
           </p:cNvPr>
@@ -6567,7 +6095,7 @@
         </p:nvSpPr>
         <p:spPr>
           <a:xfrm>
-            <a:off x="3668590" y="501006"/>
+            <a:off x="3852605" y="6395689"/>
             <a:ext cx="1200303" cy="721322"/>
           </a:xfrm>
           <a:prstGeom prst="rect">
@@ -6616,23 +6144,23 @@
       </p:sp>
       <p:cxnSp>
         <p:nvCxnSpPr>
-          <p:cNvPr id="5" name="Straight Arrow Connector 4">
-            <a:extLst>
-              <a:ext uri="{FF2B5EF4-FFF2-40B4-BE49-F238E27FC236}">
-                <a16:creationId xmlns:a16="http://schemas.microsoft.com/office/drawing/2014/main" id="{A24B5F40-FEE5-C79C-52EF-D8E54870D4B0}"/>
+          <p:cNvPr id="114" name="Straight Arrow Connector 113">
+            <a:extLst>
+              <a:ext uri="{FF2B5EF4-FFF2-40B4-BE49-F238E27FC236}">
+                <a16:creationId xmlns:a16="http://schemas.microsoft.com/office/drawing/2014/main" id="{BAE8F53E-99D4-FEE7-29E7-8FBD4C749822}"/>
               </a:ext>
             </a:extLst>
           </p:cNvPr>
           <p:cNvCxnSpPr>
             <a:cxnSpLocks/>
-            <a:stCxn id="4" idx="3"/>
-            <a:endCxn id="12" idx="2"/>
+            <a:stCxn id="113" idx="3"/>
+            <a:endCxn id="126" idx="2"/>
           </p:cNvCxnSpPr>
           <p:nvPr/>
         </p:nvCxnSpPr>
         <p:spPr>
           <a:xfrm>
-            <a:off x="4868893" y="861667"/>
+            <a:off x="5052908" y="6756350"/>
             <a:ext cx="1327725" cy="801422"/>
           </a:xfrm>
           <a:prstGeom prst="straightConnector1">
@@ -6662,10 +6190,10 @@
       </p:cxnSp>
       <p:sp>
         <p:nvSpPr>
-          <p:cNvPr id="6" name="Rectangle 5">
-            <a:extLst>
-              <a:ext uri="{FF2B5EF4-FFF2-40B4-BE49-F238E27FC236}">
-                <a16:creationId xmlns:a16="http://schemas.microsoft.com/office/drawing/2014/main" id="{11E0F323-1BCF-FB86-AD7C-A0723D1FBA66}"/>
+          <p:cNvPr id="115" name="Rectangle 114">
+            <a:extLst>
+              <a:ext uri="{FF2B5EF4-FFF2-40B4-BE49-F238E27FC236}">
+                <a16:creationId xmlns:a16="http://schemas.microsoft.com/office/drawing/2014/main" id="{CE248AFE-D685-D31A-182B-95FF9F0AE086}"/>
               </a:ext>
             </a:extLst>
           </p:cNvPr>
@@ -6674,7 +6202,7 @@
         </p:nvSpPr>
         <p:spPr>
           <a:xfrm>
-            <a:off x="2469544" y="3591058"/>
+            <a:off x="2653559" y="9485741"/>
             <a:ext cx="1147483" cy="591670"/>
           </a:xfrm>
           <a:prstGeom prst="rect">
@@ -6723,10 +6251,10 @@
       </p:sp>
       <p:sp>
         <p:nvSpPr>
-          <p:cNvPr id="7" name="Rectangle 6">
-            <a:extLst>
-              <a:ext uri="{FF2B5EF4-FFF2-40B4-BE49-F238E27FC236}">
-                <a16:creationId xmlns:a16="http://schemas.microsoft.com/office/drawing/2014/main" id="{354AA14E-847A-1AAF-A6D2-6DA0B3F85753}"/>
+          <p:cNvPr id="116" name="Rectangle 115">
+            <a:extLst>
+              <a:ext uri="{FF2B5EF4-FFF2-40B4-BE49-F238E27FC236}">
+                <a16:creationId xmlns:a16="http://schemas.microsoft.com/office/drawing/2014/main" id="{6C8B344A-665A-425C-B3BD-829D4026BC2C}"/>
               </a:ext>
             </a:extLst>
           </p:cNvPr>
@@ -6735,7 +6263,7 @@
         </p:nvSpPr>
         <p:spPr>
           <a:xfrm>
-            <a:off x="3948721" y="3591058"/>
+            <a:off x="4132736" y="9485741"/>
             <a:ext cx="1147483" cy="591670"/>
           </a:xfrm>
           <a:prstGeom prst="rect">
@@ -6795,10 +6323,10 @@
       </p:sp>
       <p:sp>
         <p:nvSpPr>
-          <p:cNvPr id="8" name="Rectangle 7">
-            <a:extLst>
-              <a:ext uri="{FF2B5EF4-FFF2-40B4-BE49-F238E27FC236}">
-                <a16:creationId xmlns:a16="http://schemas.microsoft.com/office/drawing/2014/main" id="{78D9558D-95DF-62DF-2263-A72A3C6D1E06}"/>
+          <p:cNvPr id="119" name="Rectangle 118">
+            <a:extLst>
+              <a:ext uri="{FF2B5EF4-FFF2-40B4-BE49-F238E27FC236}">
+                <a16:creationId xmlns:a16="http://schemas.microsoft.com/office/drawing/2014/main" id="{67EFBB7E-33BD-7794-08B5-C5056BB793F4}"/>
               </a:ext>
             </a:extLst>
           </p:cNvPr>
@@ -6807,7 +6335,7 @@
         </p:nvSpPr>
         <p:spPr>
           <a:xfrm>
-            <a:off x="5427897" y="3591058"/>
+            <a:off x="5611912" y="9485741"/>
             <a:ext cx="1147483" cy="591670"/>
           </a:xfrm>
           <a:prstGeom prst="rect">
@@ -6856,10 +6384,10 @@
       </p:sp>
       <p:sp>
         <p:nvSpPr>
-          <p:cNvPr id="9" name="Rectangle 8">
-            <a:extLst>
-              <a:ext uri="{FF2B5EF4-FFF2-40B4-BE49-F238E27FC236}">
-                <a16:creationId xmlns:a16="http://schemas.microsoft.com/office/drawing/2014/main" id="{8D1ECF5D-794C-2FC8-43BA-7C004CF88DB6}"/>
+          <p:cNvPr id="120" name="Rectangle 119">
+            <a:extLst>
+              <a:ext uri="{FF2B5EF4-FFF2-40B4-BE49-F238E27FC236}">
+                <a16:creationId xmlns:a16="http://schemas.microsoft.com/office/drawing/2014/main" id="{9D62DFA2-DB49-5E43-EB50-CBBEA43C1F20}"/>
               </a:ext>
             </a:extLst>
           </p:cNvPr>
@@ -6868,7 +6396,7 @@
         </p:nvSpPr>
         <p:spPr>
           <a:xfrm>
-            <a:off x="8386249" y="3600022"/>
+            <a:off x="8570264" y="9494705"/>
             <a:ext cx="1147483" cy="591670"/>
           </a:xfrm>
           <a:prstGeom prst="rect">
@@ -6928,10 +6456,10 @@
       </p:sp>
       <p:sp>
         <p:nvSpPr>
-          <p:cNvPr id="10" name="Rectangle 9">
-            <a:extLst>
-              <a:ext uri="{FF2B5EF4-FFF2-40B4-BE49-F238E27FC236}">
-                <a16:creationId xmlns:a16="http://schemas.microsoft.com/office/drawing/2014/main" id="{08F73778-CF31-0EF4-021D-4EAAB2762134}"/>
+          <p:cNvPr id="121" name="Rectangle 120">
+            <a:extLst>
+              <a:ext uri="{FF2B5EF4-FFF2-40B4-BE49-F238E27FC236}">
+                <a16:creationId xmlns:a16="http://schemas.microsoft.com/office/drawing/2014/main" id="{1B899498-33FB-F47D-C4E5-4CFE488F6516}"/>
               </a:ext>
             </a:extLst>
           </p:cNvPr>
@@ -6940,7 +6468,7 @@
         </p:nvSpPr>
         <p:spPr>
           <a:xfrm>
-            <a:off x="6907073" y="3591058"/>
+            <a:off x="7091088" y="9485741"/>
             <a:ext cx="1147483" cy="591670"/>
           </a:xfrm>
           <a:prstGeom prst="rect">
@@ -6989,10 +6517,10 @@
       </p:sp>
       <p:sp>
         <p:nvSpPr>
-          <p:cNvPr id="11" name="Rectangle 10">
-            <a:extLst>
-              <a:ext uri="{FF2B5EF4-FFF2-40B4-BE49-F238E27FC236}">
-                <a16:creationId xmlns:a16="http://schemas.microsoft.com/office/drawing/2014/main" id="{A7948B47-1198-B9EA-2041-ADDD4E79C54E}"/>
+          <p:cNvPr id="123" name="Rectangle 122">
+            <a:extLst>
+              <a:ext uri="{FF2B5EF4-FFF2-40B4-BE49-F238E27FC236}">
+                <a16:creationId xmlns:a16="http://schemas.microsoft.com/office/drawing/2014/main" id="{E012E2AB-A602-90B7-A948-87D6295A92AA}"/>
               </a:ext>
             </a:extLst>
           </p:cNvPr>
@@ -7001,7 +6529,7 @@
         </p:nvSpPr>
         <p:spPr>
           <a:xfrm>
-            <a:off x="9865424" y="3591058"/>
+            <a:off x="10049439" y="9485741"/>
             <a:ext cx="1147483" cy="591670"/>
           </a:xfrm>
           <a:prstGeom prst="rect">
@@ -7050,10 +6578,10 @@
       </p:sp>
       <p:sp>
         <p:nvSpPr>
-          <p:cNvPr id="12" name="Oval 11">
-            <a:extLst>
-              <a:ext uri="{FF2B5EF4-FFF2-40B4-BE49-F238E27FC236}">
-                <a16:creationId xmlns:a16="http://schemas.microsoft.com/office/drawing/2014/main" id="{7DB92D85-5A05-E76C-75CC-64745E391A08}"/>
+          <p:cNvPr id="126" name="Oval 125">
+            <a:extLst>
+              <a:ext uri="{FF2B5EF4-FFF2-40B4-BE49-F238E27FC236}">
+                <a16:creationId xmlns:a16="http://schemas.microsoft.com/office/drawing/2014/main" id="{35258CF5-5D39-5155-7E6C-09E5A2506AF0}"/>
               </a:ext>
             </a:extLst>
           </p:cNvPr>
@@ -7062,7 +6590,7 @@
         </p:nvSpPr>
         <p:spPr>
           <a:xfrm>
-            <a:off x="6196618" y="1089347"/>
+            <a:off x="6380633" y="6984030"/>
             <a:ext cx="1434353" cy="1147483"/>
           </a:xfrm>
           <a:prstGeom prst="ellipse">
@@ -7106,22 +6634,22 @@
       </p:sp>
       <p:cxnSp>
         <p:nvCxnSpPr>
-          <p:cNvPr id="13" name="Straight Arrow Connector 12">
-            <a:extLst>
-              <a:ext uri="{FF2B5EF4-FFF2-40B4-BE49-F238E27FC236}">
-                <a16:creationId xmlns:a16="http://schemas.microsoft.com/office/drawing/2014/main" id="{B664824B-CB97-B1D4-A33D-69C7B5B9EE6A}"/>
+          <p:cNvPr id="127" name="Straight Arrow Connector 126">
+            <a:extLst>
+              <a:ext uri="{FF2B5EF4-FFF2-40B4-BE49-F238E27FC236}">
+                <a16:creationId xmlns:a16="http://schemas.microsoft.com/office/drawing/2014/main" id="{6606400E-C04B-F39E-B26B-EBE9472FD039}"/>
               </a:ext>
             </a:extLst>
           </p:cNvPr>
           <p:cNvCxnSpPr>
-            <a:stCxn id="12" idx="4"/>
-            <a:endCxn id="6" idx="0"/>
+            <a:stCxn id="126" idx="4"/>
+            <a:endCxn id="115" idx="0"/>
           </p:cNvCxnSpPr>
           <p:nvPr/>
         </p:nvCxnSpPr>
         <p:spPr>
           <a:xfrm flipH="1">
-            <a:off x="3043286" y="2236830"/>
+            <a:off x="3227301" y="8131513"/>
             <a:ext cx="3870509" cy="1354228"/>
           </a:xfrm>
           <a:prstGeom prst="straightConnector1">
@@ -7152,23 +6680,23 @@
       </p:cxnSp>
       <p:cxnSp>
         <p:nvCxnSpPr>
-          <p:cNvPr id="14" name="Straight Arrow Connector 13">
-            <a:extLst>
-              <a:ext uri="{FF2B5EF4-FFF2-40B4-BE49-F238E27FC236}">
-                <a16:creationId xmlns:a16="http://schemas.microsoft.com/office/drawing/2014/main" id="{09EA3C2F-8B64-2DF0-2759-C785E486EADF}"/>
+          <p:cNvPr id="129" name="Straight Arrow Connector 128">
+            <a:extLst>
+              <a:ext uri="{FF2B5EF4-FFF2-40B4-BE49-F238E27FC236}">
+                <a16:creationId xmlns:a16="http://schemas.microsoft.com/office/drawing/2014/main" id="{F4AC04D3-FC1D-C978-5883-DFAEA0DE9698}"/>
               </a:ext>
             </a:extLst>
           </p:cNvPr>
           <p:cNvCxnSpPr>
             <a:cxnSpLocks/>
-            <a:stCxn id="12" idx="4"/>
-            <a:endCxn id="7" idx="0"/>
+            <a:stCxn id="126" idx="4"/>
+            <a:endCxn id="116" idx="0"/>
           </p:cNvCxnSpPr>
           <p:nvPr/>
         </p:nvCxnSpPr>
         <p:spPr>
           <a:xfrm flipH="1">
-            <a:off x="4522463" y="2236830"/>
+            <a:off x="4706478" y="8131513"/>
             <a:ext cx="2391332" cy="1354228"/>
           </a:xfrm>
           <a:prstGeom prst="straightConnector1">
@@ -7198,23 +6726,23 @@
       </p:cxnSp>
       <p:cxnSp>
         <p:nvCxnSpPr>
-          <p:cNvPr id="15" name="Straight Arrow Connector 14">
-            <a:extLst>
-              <a:ext uri="{FF2B5EF4-FFF2-40B4-BE49-F238E27FC236}">
-                <a16:creationId xmlns:a16="http://schemas.microsoft.com/office/drawing/2014/main" id="{9F46B787-0FBE-0B1B-2F5B-A707006BFFB5}"/>
+          <p:cNvPr id="137" name="Straight Arrow Connector 136">
+            <a:extLst>
+              <a:ext uri="{FF2B5EF4-FFF2-40B4-BE49-F238E27FC236}">
+                <a16:creationId xmlns:a16="http://schemas.microsoft.com/office/drawing/2014/main" id="{57776C8E-AFB3-23C8-41C6-AA3F35F8CDFB}"/>
               </a:ext>
             </a:extLst>
           </p:cNvPr>
           <p:cNvCxnSpPr>
             <a:cxnSpLocks/>
-            <a:stCxn id="12" idx="4"/>
-            <a:endCxn id="8" idx="0"/>
+            <a:stCxn id="126" idx="4"/>
+            <a:endCxn id="119" idx="0"/>
           </p:cNvCxnSpPr>
           <p:nvPr/>
         </p:nvCxnSpPr>
         <p:spPr>
           <a:xfrm flipH="1">
-            <a:off x="6001639" y="2236830"/>
+            <a:off x="6185654" y="8131513"/>
             <a:ext cx="912156" cy="1354228"/>
           </a:xfrm>
           <a:prstGeom prst="straightConnector1">
@@ -7244,23 +6772,23 @@
       </p:cxnSp>
       <p:cxnSp>
         <p:nvCxnSpPr>
-          <p:cNvPr id="16" name="Straight Arrow Connector 15">
-            <a:extLst>
-              <a:ext uri="{FF2B5EF4-FFF2-40B4-BE49-F238E27FC236}">
-                <a16:creationId xmlns:a16="http://schemas.microsoft.com/office/drawing/2014/main" id="{96D2EFCD-29D0-AA14-F549-C421F7BFD064}"/>
+          <p:cNvPr id="139" name="Straight Arrow Connector 138">
+            <a:extLst>
+              <a:ext uri="{FF2B5EF4-FFF2-40B4-BE49-F238E27FC236}">
+                <a16:creationId xmlns:a16="http://schemas.microsoft.com/office/drawing/2014/main" id="{55A8BFDF-56E2-6377-0B86-E07BFBC66949}"/>
               </a:ext>
             </a:extLst>
           </p:cNvPr>
           <p:cNvCxnSpPr>
             <a:cxnSpLocks/>
-            <a:stCxn id="12" idx="4"/>
-            <a:endCxn id="10" idx="0"/>
+            <a:stCxn id="126" idx="4"/>
+            <a:endCxn id="121" idx="0"/>
           </p:cNvCxnSpPr>
           <p:nvPr/>
         </p:nvCxnSpPr>
         <p:spPr>
           <a:xfrm>
-            <a:off x="6913795" y="2236830"/>
+            <a:off x="7097810" y="8131513"/>
             <a:ext cx="567020" cy="1354228"/>
           </a:xfrm>
           <a:prstGeom prst="straightConnector1">
@@ -7290,23 +6818,23 @@
       </p:cxnSp>
       <p:cxnSp>
         <p:nvCxnSpPr>
-          <p:cNvPr id="17" name="Straight Arrow Connector 16">
-            <a:extLst>
-              <a:ext uri="{FF2B5EF4-FFF2-40B4-BE49-F238E27FC236}">
-                <a16:creationId xmlns:a16="http://schemas.microsoft.com/office/drawing/2014/main" id="{E6486D98-DD83-91F9-069E-3507D837BE9E}"/>
+          <p:cNvPr id="140" name="Straight Arrow Connector 139">
+            <a:extLst>
+              <a:ext uri="{FF2B5EF4-FFF2-40B4-BE49-F238E27FC236}">
+                <a16:creationId xmlns:a16="http://schemas.microsoft.com/office/drawing/2014/main" id="{16A7F9A1-D65C-E85E-E28F-A51D9EFFCA34}"/>
               </a:ext>
             </a:extLst>
           </p:cNvPr>
           <p:cNvCxnSpPr>
             <a:cxnSpLocks/>
-            <a:stCxn id="12" idx="4"/>
-            <a:endCxn id="9" idx="0"/>
+            <a:stCxn id="126" idx="4"/>
+            <a:endCxn id="120" idx="0"/>
           </p:cNvCxnSpPr>
           <p:nvPr/>
         </p:nvCxnSpPr>
         <p:spPr>
           <a:xfrm>
-            <a:off x="6913795" y="2236830"/>
+            <a:off x="7097810" y="8131513"/>
             <a:ext cx="2046196" cy="1363192"/>
           </a:xfrm>
           <a:prstGeom prst="straightConnector1">
@@ -7336,23 +6864,23 @@
       </p:cxnSp>
       <p:cxnSp>
         <p:nvCxnSpPr>
-          <p:cNvPr id="18" name="Straight Arrow Connector 17">
-            <a:extLst>
-              <a:ext uri="{FF2B5EF4-FFF2-40B4-BE49-F238E27FC236}">
-                <a16:creationId xmlns:a16="http://schemas.microsoft.com/office/drawing/2014/main" id="{92D97B82-DE12-5746-9B73-67FEA59A0CD8}"/>
+          <p:cNvPr id="141" name="Straight Arrow Connector 140">
+            <a:extLst>
+              <a:ext uri="{FF2B5EF4-FFF2-40B4-BE49-F238E27FC236}">
+                <a16:creationId xmlns:a16="http://schemas.microsoft.com/office/drawing/2014/main" id="{0E92B7A9-0EE8-DBDE-8C71-4A451BD966E3}"/>
               </a:ext>
             </a:extLst>
           </p:cNvPr>
           <p:cNvCxnSpPr>
             <a:cxnSpLocks/>
-            <a:stCxn id="12" idx="4"/>
-            <a:endCxn id="11" idx="0"/>
+            <a:stCxn id="126" idx="4"/>
+            <a:endCxn id="123" idx="0"/>
           </p:cNvCxnSpPr>
           <p:nvPr/>
         </p:nvCxnSpPr>
         <p:spPr>
           <a:xfrm>
-            <a:off x="6913795" y="2236830"/>
+            <a:off x="7097810" y="8131513"/>
             <a:ext cx="3525371" cy="1354228"/>
           </a:xfrm>
           <a:prstGeom prst="straightConnector1">
@@ -7382,22 +6910,22 @@
       </p:cxnSp>
       <p:cxnSp>
         <p:nvCxnSpPr>
-          <p:cNvPr id="19" name="Straight Arrow Connector 18">
-            <a:extLst>
-              <a:ext uri="{FF2B5EF4-FFF2-40B4-BE49-F238E27FC236}">
-                <a16:creationId xmlns:a16="http://schemas.microsoft.com/office/drawing/2014/main" id="{452DA03D-8285-26D5-468E-B34E01ACDAFD}"/>
+          <p:cNvPr id="142" name="Straight Arrow Connector 141">
+            <a:extLst>
+              <a:ext uri="{FF2B5EF4-FFF2-40B4-BE49-F238E27FC236}">
+                <a16:creationId xmlns:a16="http://schemas.microsoft.com/office/drawing/2014/main" id="{C3D0F6CD-4D51-D99E-60A5-F4688A3353AF}"/>
               </a:ext>
             </a:extLst>
           </p:cNvPr>
           <p:cNvCxnSpPr>
             <a:cxnSpLocks/>
-            <a:endCxn id="6" idx="2"/>
+            <a:endCxn id="115" idx="2"/>
           </p:cNvCxnSpPr>
           <p:nvPr/>
         </p:nvCxnSpPr>
         <p:spPr>
           <a:xfrm flipV="1">
-            <a:off x="3043286" y="4182728"/>
+            <a:off x="3227301" y="10077411"/>
             <a:ext cx="0" cy="245837"/>
           </a:xfrm>
           <a:prstGeom prst="straightConnector1">
@@ -7427,10 +6955,10 @@
       </p:cxnSp>
       <p:cxnSp>
         <p:nvCxnSpPr>
-          <p:cNvPr id="20" name="Straight Arrow Connector 19">
-            <a:extLst>
-              <a:ext uri="{FF2B5EF4-FFF2-40B4-BE49-F238E27FC236}">
-                <a16:creationId xmlns:a16="http://schemas.microsoft.com/office/drawing/2014/main" id="{B41F2784-F1EB-53AB-051D-684244A90959}"/>
+          <p:cNvPr id="144" name="Straight Arrow Connector 143">
+            <a:extLst>
+              <a:ext uri="{FF2B5EF4-FFF2-40B4-BE49-F238E27FC236}">
+                <a16:creationId xmlns:a16="http://schemas.microsoft.com/office/drawing/2014/main" id="{884E9B23-37CB-87DC-B828-B2050B86D306}"/>
               </a:ext>
             </a:extLst>
           </p:cNvPr>
@@ -7441,7 +6969,7 @@
         </p:nvCxnSpPr>
         <p:spPr>
           <a:xfrm flipV="1">
-            <a:off x="4508784" y="4182728"/>
+            <a:off x="4692799" y="10077411"/>
             <a:ext cx="0" cy="245837"/>
           </a:xfrm>
           <a:prstGeom prst="straightConnector1">
@@ -7471,10 +6999,10 @@
       </p:cxnSp>
       <p:cxnSp>
         <p:nvCxnSpPr>
-          <p:cNvPr id="21" name="Straight Arrow Connector 20">
-            <a:extLst>
-              <a:ext uri="{FF2B5EF4-FFF2-40B4-BE49-F238E27FC236}">
-                <a16:creationId xmlns:a16="http://schemas.microsoft.com/office/drawing/2014/main" id="{D9DE1DC8-2290-290E-88E3-90455C954F4F}"/>
+          <p:cNvPr id="145" name="Straight Arrow Connector 144">
+            <a:extLst>
+              <a:ext uri="{FF2B5EF4-FFF2-40B4-BE49-F238E27FC236}">
+                <a16:creationId xmlns:a16="http://schemas.microsoft.com/office/drawing/2014/main" id="{1E58057D-EB39-8E2E-E28C-15A2B21E0C85}"/>
               </a:ext>
             </a:extLst>
           </p:cNvPr>
@@ -7485,7 +7013,7 @@
         </p:nvCxnSpPr>
         <p:spPr>
           <a:xfrm flipV="1">
-            <a:off x="6001639" y="4182728"/>
+            <a:off x="6185654" y="10077411"/>
             <a:ext cx="0" cy="245837"/>
           </a:xfrm>
           <a:prstGeom prst="straightConnector1">
@@ -7515,10 +7043,10 @@
       </p:cxnSp>
       <p:cxnSp>
         <p:nvCxnSpPr>
-          <p:cNvPr id="22" name="Straight Arrow Connector 21">
-            <a:extLst>
-              <a:ext uri="{FF2B5EF4-FFF2-40B4-BE49-F238E27FC236}">
-                <a16:creationId xmlns:a16="http://schemas.microsoft.com/office/drawing/2014/main" id="{7C6CCE9E-AB69-8170-B15D-982B56F2EEC6}"/>
+          <p:cNvPr id="146" name="Straight Arrow Connector 145">
+            <a:extLst>
+              <a:ext uri="{FF2B5EF4-FFF2-40B4-BE49-F238E27FC236}">
+                <a16:creationId xmlns:a16="http://schemas.microsoft.com/office/drawing/2014/main" id="{53484A25-98BE-DA25-8E0A-88E604EEE8A0}"/>
               </a:ext>
             </a:extLst>
           </p:cNvPr>
@@ -7529,7 +7057,7 @@
         </p:nvCxnSpPr>
         <p:spPr>
           <a:xfrm flipV="1">
-            <a:off x="7480815" y="4182728"/>
+            <a:off x="7664830" y="10077411"/>
             <a:ext cx="0" cy="245837"/>
           </a:xfrm>
           <a:prstGeom prst="straightConnector1">
@@ -7559,10 +7087,10 @@
       </p:cxnSp>
       <p:cxnSp>
         <p:nvCxnSpPr>
-          <p:cNvPr id="23" name="Straight Arrow Connector 22">
-            <a:extLst>
-              <a:ext uri="{FF2B5EF4-FFF2-40B4-BE49-F238E27FC236}">
-                <a16:creationId xmlns:a16="http://schemas.microsoft.com/office/drawing/2014/main" id="{D9F18868-E303-0A93-9EFA-AF6D0446C0BC}"/>
+          <p:cNvPr id="147" name="Straight Arrow Connector 146">
+            <a:extLst>
+              <a:ext uri="{FF2B5EF4-FFF2-40B4-BE49-F238E27FC236}">
+                <a16:creationId xmlns:a16="http://schemas.microsoft.com/office/drawing/2014/main" id="{C5A8B6D5-5110-680A-DA9D-97EB51179B78}"/>
               </a:ext>
             </a:extLst>
           </p:cNvPr>
@@ -7573,7 +7101,7 @@
         </p:nvCxnSpPr>
         <p:spPr>
           <a:xfrm flipV="1">
-            <a:off x="8959991" y="4191692"/>
+            <a:off x="9144006" y="10086375"/>
             <a:ext cx="0" cy="245837"/>
           </a:xfrm>
           <a:prstGeom prst="straightConnector1">
@@ -7603,10 +7131,10 @@
       </p:cxnSp>
       <p:cxnSp>
         <p:nvCxnSpPr>
-          <p:cNvPr id="24" name="Straight Arrow Connector 23">
-            <a:extLst>
-              <a:ext uri="{FF2B5EF4-FFF2-40B4-BE49-F238E27FC236}">
-                <a16:creationId xmlns:a16="http://schemas.microsoft.com/office/drawing/2014/main" id="{65D16D00-E37B-CE86-8BDF-BBDC74218287}"/>
+          <p:cNvPr id="148" name="Straight Arrow Connector 147">
+            <a:extLst>
+              <a:ext uri="{FF2B5EF4-FFF2-40B4-BE49-F238E27FC236}">
+                <a16:creationId xmlns:a16="http://schemas.microsoft.com/office/drawing/2014/main" id="{7F6D4776-CB31-28FA-FD5C-CA512515D22E}"/>
               </a:ext>
             </a:extLst>
           </p:cNvPr>
@@ -7617,7 +7145,7 @@
         </p:nvCxnSpPr>
         <p:spPr>
           <a:xfrm flipV="1">
-            <a:off x="10439166" y="4182728"/>
+            <a:off x="10623181" y="10077411"/>
             <a:ext cx="0" cy="245837"/>
           </a:xfrm>
           <a:prstGeom prst="straightConnector1">
@@ -7647,10 +7175,10 @@
       </p:cxnSp>
       <p:sp>
         <p:nvSpPr>
-          <p:cNvPr id="25" name="Oval 24">
-            <a:extLst>
-              <a:ext uri="{FF2B5EF4-FFF2-40B4-BE49-F238E27FC236}">
-                <a16:creationId xmlns:a16="http://schemas.microsoft.com/office/drawing/2014/main" id="{E39D5F20-3F23-27F2-0E92-609472ED27FE}"/>
+          <p:cNvPr id="151" name="Oval 150">
+            <a:extLst>
+              <a:ext uri="{FF2B5EF4-FFF2-40B4-BE49-F238E27FC236}">
+                <a16:creationId xmlns:a16="http://schemas.microsoft.com/office/drawing/2014/main" id="{FECF9F79-87CE-5230-11D5-19BB0D7E928B}"/>
               </a:ext>
             </a:extLst>
           </p:cNvPr>
@@ -7659,7 +7187,7 @@
         </p:nvSpPr>
         <p:spPr>
           <a:xfrm>
-            <a:off x="2893129" y="4437529"/>
+            <a:off x="3077144" y="10332212"/>
             <a:ext cx="300314" cy="301012"/>
           </a:xfrm>
           <a:prstGeom prst="ellipse">
@@ -7705,10 +7233,10 @@
       </p:sp>
       <p:sp>
         <p:nvSpPr>
-          <p:cNvPr id="26" name="Oval 25">
-            <a:extLst>
-              <a:ext uri="{FF2B5EF4-FFF2-40B4-BE49-F238E27FC236}">
-                <a16:creationId xmlns:a16="http://schemas.microsoft.com/office/drawing/2014/main" id="{38148B9D-8527-C494-0924-F34FB3AA153D}"/>
+          <p:cNvPr id="152" name="Oval 151">
+            <a:extLst>
+              <a:ext uri="{FF2B5EF4-FFF2-40B4-BE49-F238E27FC236}">
+                <a16:creationId xmlns:a16="http://schemas.microsoft.com/office/drawing/2014/main" id="{6FAFE95A-A519-7DB3-3837-24967713DAD9}"/>
               </a:ext>
             </a:extLst>
           </p:cNvPr>
@@ -7717,7 +7245,7 @@
         </p:nvSpPr>
         <p:spPr>
           <a:xfrm>
-            <a:off x="4358627" y="4437529"/>
+            <a:off x="4542642" y="10332212"/>
             <a:ext cx="300314" cy="301012"/>
           </a:xfrm>
           <a:prstGeom prst="ellipse">
@@ -7763,10 +7291,10 @@
       </p:sp>
       <p:sp>
         <p:nvSpPr>
-          <p:cNvPr id="27" name="Oval 26">
-            <a:extLst>
-              <a:ext uri="{FF2B5EF4-FFF2-40B4-BE49-F238E27FC236}">
-                <a16:creationId xmlns:a16="http://schemas.microsoft.com/office/drawing/2014/main" id="{C81837CA-0F08-C460-B02E-2B34FB655166}"/>
+          <p:cNvPr id="153" name="Oval 152">
+            <a:extLst>
+              <a:ext uri="{FF2B5EF4-FFF2-40B4-BE49-F238E27FC236}">
+                <a16:creationId xmlns:a16="http://schemas.microsoft.com/office/drawing/2014/main" id="{53600D17-91D1-FD8B-70A0-BF1A06625C21}"/>
               </a:ext>
             </a:extLst>
           </p:cNvPr>
@@ -7775,7 +7303,7 @@
         </p:nvSpPr>
         <p:spPr>
           <a:xfrm>
-            <a:off x="5851480" y="4437529"/>
+            <a:off x="6035495" y="10332212"/>
             <a:ext cx="300314" cy="301012"/>
           </a:xfrm>
           <a:prstGeom prst="ellipse">
@@ -7821,10 +7349,10 @@
       </p:sp>
       <p:sp>
         <p:nvSpPr>
-          <p:cNvPr id="28" name="Oval 27">
-            <a:extLst>
-              <a:ext uri="{FF2B5EF4-FFF2-40B4-BE49-F238E27FC236}">
-                <a16:creationId xmlns:a16="http://schemas.microsoft.com/office/drawing/2014/main" id="{149B0A8C-2361-1847-1587-A0F466246F33}"/>
+          <p:cNvPr id="154" name="Oval 153">
+            <a:extLst>
+              <a:ext uri="{FF2B5EF4-FFF2-40B4-BE49-F238E27FC236}">
+                <a16:creationId xmlns:a16="http://schemas.microsoft.com/office/drawing/2014/main" id="{F25EF8F1-1FB0-DC50-67F6-610FCF8F8769}"/>
               </a:ext>
             </a:extLst>
           </p:cNvPr>
@@ -7833,7 +7361,7 @@
         </p:nvSpPr>
         <p:spPr>
           <a:xfrm>
-            <a:off x="7330657" y="4428565"/>
+            <a:off x="7514672" y="10323248"/>
             <a:ext cx="300314" cy="301012"/>
           </a:xfrm>
           <a:prstGeom prst="ellipse">
@@ -7879,10 +7407,10 @@
       </p:sp>
       <p:sp>
         <p:nvSpPr>
-          <p:cNvPr id="29" name="Oval 28">
-            <a:extLst>
-              <a:ext uri="{FF2B5EF4-FFF2-40B4-BE49-F238E27FC236}">
-                <a16:creationId xmlns:a16="http://schemas.microsoft.com/office/drawing/2014/main" id="{DACAC252-5163-05F8-385B-4848CE425827}"/>
+          <p:cNvPr id="155" name="Oval 154">
+            <a:extLst>
+              <a:ext uri="{FF2B5EF4-FFF2-40B4-BE49-F238E27FC236}">
+                <a16:creationId xmlns:a16="http://schemas.microsoft.com/office/drawing/2014/main" id="{D5272FEA-5736-DCE1-30BA-12E7E9E35BD5}"/>
               </a:ext>
             </a:extLst>
           </p:cNvPr>
@@ -7891,7 +7419,7 @@
         </p:nvSpPr>
         <p:spPr>
           <a:xfrm>
-            <a:off x="8809834" y="4428565"/>
+            <a:off x="8993849" y="10323248"/>
             <a:ext cx="300314" cy="301012"/>
           </a:xfrm>
           <a:prstGeom prst="ellipse">
@@ -7937,10 +7465,10 @@
       </p:sp>
       <p:sp>
         <p:nvSpPr>
-          <p:cNvPr id="30" name="Oval 29">
-            <a:extLst>
-              <a:ext uri="{FF2B5EF4-FFF2-40B4-BE49-F238E27FC236}">
-                <a16:creationId xmlns:a16="http://schemas.microsoft.com/office/drawing/2014/main" id="{55B6B774-E381-CA3B-B8FE-4FE6BE7547E6}"/>
+          <p:cNvPr id="156" name="Oval 155">
+            <a:extLst>
+              <a:ext uri="{FF2B5EF4-FFF2-40B4-BE49-F238E27FC236}">
+                <a16:creationId xmlns:a16="http://schemas.microsoft.com/office/drawing/2014/main" id="{12E6A938-96A4-4C06-7F3E-340152FD3B93}"/>
               </a:ext>
             </a:extLst>
           </p:cNvPr>
@@ -7949,7 +7477,7 @@
         </p:nvSpPr>
         <p:spPr>
           <a:xfrm>
-            <a:off x="10289007" y="4428565"/>
+            <a:off x="10473022" y="10323248"/>
             <a:ext cx="300314" cy="301012"/>
           </a:xfrm>
           <a:prstGeom prst="ellipse">
@@ -7995,10 +7523,10 @@
       </p:sp>
       <p:sp>
         <p:nvSpPr>
-          <p:cNvPr id="31" name="Right Bracket 30">
-            <a:extLst>
-              <a:ext uri="{FF2B5EF4-FFF2-40B4-BE49-F238E27FC236}">
-                <a16:creationId xmlns:a16="http://schemas.microsoft.com/office/drawing/2014/main" id="{199C91AD-2721-1242-F2AF-CB8E8AED47AA}"/>
+          <p:cNvPr id="157" name="Right Bracket 156">
+            <a:extLst>
+              <a:ext uri="{FF2B5EF4-FFF2-40B4-BE49-F238E27FC236}">
+                <a16:creationId xmlns:a16="http://schemas.microsoft.com/office/drawing/2014/main" id="{8B6D19E6-876E-8843-680F-B8317689170A}"/>
               </a:ext>
             </a:extLst>
           </p:cNvPr>
@@ -8007,7 +7535,7 @@
         </p:nvSpPr>
         <p:spPr>
           <a:xfrm rot="5400000">
-            <a:off x="5807189" y="3493463"/>
+            <a:off x="5991204" y="9388146"/>
             <a:ext cx="376518" cy="2884602"/>
           </a:xfrm>
           <a:prstGeom prst="rightBracket">
@@ -8048,10 +7576,10 @@
       </p:sp>
       <p:sp>
         <p:nvSpPr>
-          <p:cNvPr id="32" name="Right Bracket 31">
-            <a:extLst>
-              <a:ext uri="{FF2B5EF4-FFF2-40B4-BE49-F238E27FC236}">
-                <a16:creationId xmlns:a16="http://schemas.microsoft.com/office/drawing/2014/main" id="{FF3003F7-37CD-CA12-F62C-02BC73558C57}"/>
+          <p:cNvPr id="158" name="Right Bracket 157">
+            <a:extLst>
+              <a:ext uri="{FF2B5EF4-FFF2-40B4-BE49-F238E27FC236}">
+                <a16:creationId xmlns:a16="http://schemas.microsoft.com/office/drawing/2014/main" id="{792AD277-DB38-ED5C-91B9-DC7082EBF1E5}"/>
               </a:ext>
             </a:extLst>
           </p:cNvPr>
@@ -8060,7 +7588,7 @@
         </p:nvSpPr>
         <p:spPr>
           <a:xfrm rot="5400000">
-            <a:off x="8022487" y="4229216"/>
+            <a:off x="8206502" y="10123899"/>
             <a:ext cx="376518" cy="1395168"/>
           </a:xfrm>
           <a:prstGeom prst="rightBracket">
@@ -8101,10 +7629,10 @@
       </p:sp>
       <p:sp>
         <p:nvSpPr>
-          <p:cNvPr id="33" name="Right Bracket 32">
-            <a:extLst>
-              <a:ext uri="{FF2B5EF4-FFF2-40B4-BE49-F238E27FC236}">
-                <a16:creationId xmlns:a16="http://schemas.microsoft.com/office/drawing/2014/main" id="{BFB8A26A-3608-FFEA-628C-CD4055CECB33}"/>
+          <p:cNvPr id="159" name="Right Bracket 158">
+            <a:extLst>
+              <a:ext uri="{FF2B5EF4-FFF2-40B4-BE49-F238E27FC236}">
+                <a16:creationId xmlns:a16="http://schemas.microsoft.com/office/drawing/2014/main" id="{334696E0-60DA-59E7-18AD-36C6732080F9}"/>
               </a:ext>
             </a:extLst>
           </p:cNvPr>
@@ -8113,7 +7641,7 @@
         </p:nvSpPr>
         <p:spPr>
           <a:xfrm rot="5400000">
-            <a:off x="9507209" y="4233932"/>
+            <a:off x="9691224" y="10128615"/>
             <a:ext cx="376518" cy="1385740"/>
           </a:xfrm>
           <a:prstGeom prst="rightBracket">
@@ -8154,10 +7682,10 @@
       </p:sp>
       <p:sp>
         <p:nvSpPr>
-          <p:cNvPr id="38" name="Arc 37">
-            <a:extLst>
-              <a:ext uri="{FF2B5EF4-FFF2-40B4-BE49-F238E27FC236}">
-                <a16:creationId xmlns:a16="http://schemas.microsoft.com/office/drawing/2014/main" id="{1AE04428-63ED-12AA-17FE-331DDBEE82E2}"/>
+          <p:cNvPr id="160" name="Arc 159">
+            <a:extLst>
+              <a:ext uri="{FF2B5EF4-FFF2-40B4-BE49-F238E27FC236}">
+                <a16:creationId xmlns:a16="http://schemas.microsoft.com/office/drawing/2014/main" id="{8F49BC36-D443-B17C-DA3E-D33C1C90435A}"/>
               </a:ext>
             </a:extLst>
           </p:cNvPr>
@@ -8166,7 +7694,7 @@
         </p:nvSpPr>
         <p:spPr>
           <a:xfrm rot="9393425">
-            <a:off x="2720775" y="4566835"/>
+            <a:off x="2904790" y="10461518"/>
             <a:ext cx="191174" cy="202634"/>
           </a:xfrm>
           <a:prstGeom prst="arc">
@@ -8208,10 +7736,10 @@
       </p:sp>
       <p:sp>
         <p:nvSpPr>
-          <p:cNvPr id="39" name="Arc 38">
-            <a:extLst>
-              <a:ext uri="{FF2B5EF4-FFF2-40B4-BE49-F238E27FC236}">
-                <a16:creationId xmlns:a16="http://schemas.microsoft.com/office/drawing/2014/main" id="{4AE0FCF5-9128-628F-E9FE-225BAA1D31F4}"/>
+          <p:cNvPr id="161" name="Arc 160">
+            <a:extLst>
+              <a:ext uri="{FF2B5EF4-FFF2-40B4-BE49-F238E27FC236}">
+                <a16:creationId xmlns:a16="http://schemas.microsoft.com/office/drawing/2014/main" id="{DB6E598A-FE70-3492-30C8-3078AF79654A}"/>
               </a:ext>
             </a:extLst>
           </p:cNvPr>
@@ -8220,7 +7748,7 @@
         </p:nvSpPr>
         <p:spPr>
           <a:xfrm rot="9393425">
-            <a:off x="4177800" y="4566836"/>
+            <a:off x="4361815" y="10461519"/>
             <a:ext cx="191174" cy="202634"/>
           </a:xfrm>
           <a:prstGeom prst="arc">
@@ -8262,10 +7790,10 @@
       </p:sp>
       <p:sp>
         <p:nvSpPr>
-          <p:cNvPr id="40" name="Arc 39">
-            <a:extLst>
-              <a:ext uri="{FF2B5EF4-FFF2-40B4-BE49-F238E27FC236}">
-                <a16:creationId xmlns:a16="http://schemas.microsoft.com/office/drawing/2014/main" id="{9CD90662-F84F-CA17-2B6D-9B21C6D4573C}"/>
+          <p:cNvPr id="162" name="Arc 161">
+            <a:extLst>
+              <a:ext uri="{FF2B5EF4-FFF2-40B4-BE49-F238E27FC236}">
+                <a16:creationId xmlns:a16="http://schemas.microsoft.com/office/drawing/2014/main" id="{E5B1B7E8-B155-9152-E79D-D26DBA977064}"/>
               </a:ext>
             </a:extLst>
           </p:cNvPr>
@@ -8274,7 +7802,7 @@
         </p:nvSpPr>
         <p:spPr>
           <a:xfrm rot="9393425">
-            <a:off x="5679185" y="4617700"/>
+            <a:off x="5863200" y="10512383"/>
             <a:ext cx="191174" cy="202634"/>
           </a:xfrm>
           <a:prstGeom prst="arc">
@@ -8316,10 +7844,10 @@
       </p:sp>
       <p:sp>
         <p:nvSpPr>
-          <p:cNvPr id="41" name="Arc 40">
-            <a:extLst>
-              <a:ext uri="{FF2B5EF4-FFF2-40B4-BE49-F238E27FC236}">
-                <a16:creationId xmlns:a16="http://schemas.microsoft.com/office/drawing/2014/main" id="{ABD72050-FD80-DB65-C736-0961FB8C5711}"/>
+          <p:cNvPr id="163" name="Arc 162">
+            <a:extLst>
+              <a:ext uri="{FF2B5EF4-FFF2-40B4-BE49-F238E27FC236}">
+                <a16:creationId xmlns:a16="http://schemas.microsoft.com/office/drawing/2014/main" id="{2386840D-4FC0-B099-7C4A-74AC05ABFF6A}"/>
               </a:ext>
             </a:extLst>
           </p:cNvPr>
@@ -8328,7 +7856,7 @@
         </p:nvSpPr>
         <p:spPr>
           <a:xfrm rot="9393425">
-            <a:off x="7171764" y="4562571"/>
+            <a:off x="7355779" y="10457254"/>
             <a:ext cx="191174" cy="202634"/>
           </a:xfrm>
           <a:prstGeom prst="arc">
@@ -8370,10 +7898,10 @@
       </p:sp>
       <p:sp>
         <p:nvSpPr>
-          <p:cNvPr id="42" name="Arc 41">
-            <a:extLst>
-              <a:ext uri="{FF2B5EF4-FFF2-40B4-BE49-F238E27FC236}">
-                <a16:creationId xmlns:a16="http://schemas.microsoft.com/office/drawing/2014/main" id="{021289FC-8D2B-5C82-F19C-5ECE1BE252D9}"/>
+          <p:cNvPr id="164" name="Arc 163">
+            <a:extLst>
+              <a:ext uri="{FF2B5EF4-FFF2-40B4-BE49-F238E27FC236}">
+                <a16:creationId xmlns:a16="http://schemas.microsoft.com/office/drawing/2014/main" id="{E2DC90EE-ABC5-BFC9-256B-1E863129AAF5}"/>
               </a:ext>
             </a:extLst>
           </p:cNvPr>
@@ -8382,7 +7910,7 @@
         </p:nvSpPr>
         <p:spPr>
           <a:xfrm rot="9393425">
-            <a:off x="8648074" y="4540948"/>
+            <a:off x="8832089" y="10435631"/>
             <a:ext cx="191174" cy="202634"/>
           </a:xfrm>
           <a:prstGeom prst="arc">
@@ -8424,10 +7952,10 @@
       </p:sp>
       <p:sp>
         <p:nvSpPr>
-          <p:cNvPr id="43" name="Arc 42">
-            <a:extLst>
-              <a:ext uri="{FF2B5EF4-FFF2-40B4-BE49-F238E27FC236}">
-                <a16:creationId xmlns:a16="http://schemas.microsoft.com/office/drawing/2014/main" id="{061F2B90-542F-70A1-DE85-B69E2603F9F1}"/>
+          <p:cNvPr id="165" name="Arc 164">
+            <a:extLst>
+              <a:ext uri="{FF2B5EF4-FFF2-40B4-BE49-F238E27FC236}">
+                <a16:creationId xmlns:a16="http://schemas.microsoft.com/office/drawing/2014/main" id="{760E9A41-319D-4765-285B-9146235BB8F7}"/>
               </a:ext>
             </a:extLst>
           </p:cNvPr>
@@ -8436,7 +7964,7 @@
         </p:nvSpPr>
         <p:spPr>
           <a:xfrm rot="9393425">
-            <a:off x="10119881" y="4550421"/>
+            <a:off x="10303896" y="10445104"/>
             <a:ext cx="191174" cy="202634"/>
           </a:xfrm>
           <a:prstGeom prst="arc">
@@ -8478,10 +8006,10 @@
       </p:sp>
       <p:sp>
         <p:nvSpPr>
-          <p:cNvPr id="44" name="TextBox 43">
-            <a:extLst>
-              <a:ext uri="{FF2B5EF4-FFF2-40B4-BE49-F238E27FC236}">
-                <a16:creationId xmlns:a16="http://schemas.microsoft.com/office/drawing/2014/main" id="{A1A86AA9-530A-4FE7-44F0-E248901ED0D0}"/>
+          <p:cNvPr id="166" name="TextBox 165">
+            <a:extLst>
+              <a:ext uri="{FF2B5EF4-FFF2-40B4-BE49-F238E27FC236}">
+                <a16:creationId xmlns:a16="http://schemas.microsoft.com/office/drawing/2014/main" id="{23494E82-BC2F-33CC-C2B2-DA23EB0CA241}"/>
               </a:ext>
             </a:extLst>
           </p:cNvPr>
@@ -8490,7 +8018,7 @@
         </p:nvSpPr>
         <p:spPr>
           <a:xfrm>
-            <a:off x="4422784" y="2858162"/>
+            <a:off x="4606799" y="8752845"/>
             <a:ext cx="636278" cy="292388"/>
           </a:xfrm>
           <a:prstGeom prst="rect">
@@ -8519,10 +8047,10 @@
       </p:sp>
       <p:sp>
         <p:nvSpPr>
-          <p:cNvPr id="45" name="TextBox 44">
-            <a:extLst>
-              <a:ext uri="{FF2B5EF4-FFF2-40B4-BE49-F238E27FC236}">
-                <a16:creationId xmlns:a16="http://schemas.microsoft.com/office/drawing/2014/main" id="{73B8186E-0571-CC7E-9750-B7541551A504}"/>
+          <p:cNvPr id="167" name="TextBox 166">
+            <a:extLst>
+              <a:ext uri="{FF2B5EF4-FFF2-40B4-BE49-F238E27FC236}">
+                <a16:creationId xmlns:a16="http://schemas.microsoft.com/office/drawing/2014/main" id="{1E5950A7-1553-AEDC-A14C-12CA983EF121}"/>
               </a:ext>
             </a:extLst>
           </p:cNvPr>
@@ -8531,7 +8059,7 @@
         </p:nvSpPr>
         <p:spPr>
           <a:xfrm>
-            <a:off x="5043861" y="2952190"/>
+            <a:off x="5227876" y="8846873"/>
             <a:ext cx="636278" cy="292388"/>
           </a:xfrm>
           <a:prstGeom prst="rect">
@@ -8560,10 +8088,10 @@
       </p:sp>
       <p:sp>
         <p:nvSpPr>
-          <p:cNvPr id="46" name="TextBox 45">
-            <a:extLst>
-              <a:ext uri="{FF2B5EF4-FFF2-40B4-BE49-F238E27FC236}">
-                <a16:creationId xmlns:a16="http://schemas.microsoft.com/office/drawing/2014/main" id="{64BD62CF-9459-EDF7-E726-610B64B50D49}"/>
+          <p:cNvPr id="168" name="TextBox 167">
+            <a:extLst>
+              <a:ext uri="{FF2B5EF4-FFF2-40B4-BE49-F238E27FC236}">
+                <a16:creationId xmlns:a16="http://schemas.microsoft.com/office/drawing/2014/main" id="{E4D5B179-5E99-A5F6-3A15-5F73E047A868}"/>
               </a:ext>
             </a:extLst>
           </p:cNvPr>
@@ -8572,7 +8100,7 @@
         </p:nvSpPr>
         <p:spPr>
           <a:xfrm>
-            <a:off x="5995448" y="2974554"/>
+            <a:off x="6179463" y="8869237"/>
             <a:ext cx="636278" cy="292388"/>
           </a:xfrm>
           <a:prstGeom prst="rect">
@@ -8601,10 +8129,10 @@
       </p:sp>
       <p:sp>
         <p:nvSpPr>
-          <p:cNvPr id="47" name="TextBox 46">
-            <a:extLst>
-              <a:ext uri="{FF2B5EF4-FFF2-40B4-BE49-F238E27FC236}">
-                <a16:creationId xmlns:a16="http://schemas.microsoft.com/office/drawing/2014/main" id="{326B12F1-BF05-17CF-4FC8-117BEC1156F6}"/>
+          <p:cNvPr id="169" name="TextBox 168">
+            <a:extLst>
+              <a:ext uri="{FF2B5EF4-FFF2-40B4-BE49-F238E27FC236}">
+                <a16:creationId xmlns:a16="http://schemas.microsoft.com/office/drawing/2014/main" id="{D4D36F5B-7843-CBF1-35DA-3DE7724ABEB0}"/>
               </a:ext>
             </a:extLst>
           </p:cNvPr>
@@ -8613,7 +8141,7 @@
         </p:nvSpPr>
         <p:spPr>
           <a:xfrm>
-            <a:off x="6917771" y="2969517"/>
+            <a:off x="7101786" y="8864200"/>
             <a:ext cx="636278" cy="292388"/>
           </a:xfrm>
           <a:prstGeom prst="rect">
@@ -8642,10 +8170,10 @@
       </p:sp>
       <p:sp>
         <p:nvSpPr>
-          <p:cNvPr id="48" name="TextBox 47">
-            <a:extLst>
-              <a:ext uri="{FF2B5EF4-FFF2-40B4-BE49-F238E27FC236}">
-                <a16:creationId xmlns:a16="http://schemas.microsoft.com/office/drawing/2014/main" id="{E5C9027F-7797-2465-7429-9594BA1263BC}"/>
+          <p:cNvPr id="170" name="TextBox 169">
+            <a:extLst>
+              <a:ext uri="{FF2B5EF4-FFF2-40B4-BE49-F238E27FC236}">
+                <a16:creationId xmlns:a16="http://schemas.microsoft.com/office/drawing/2014/main" id="{332B2E63-A4B4-F5AB-9359-1C57C4C4222E}"/>
               </a:ext>
             </a:extLst>
           </p:cNvPr>
@@ -8654,7 +8182,7 @@
         </p:nvSpPr>
         <p:spPr>
           <a:xfrm>
-            <a:off x="7889756" y="2948492"/>
+            <a:off x="8073771" y="8843175"/>
             <a:ext cx="636278" cy="292388"/>
           </a:xfrm>
           <a:prstGeom prst="rect">
@@ -8683,10 +8211,10 @@
       </p:sp>
       <p:sp>
         <p:nvSpPr>
-          <p:cNvPr id="49" name="TextBox 48">
-            <a:extLst>
-              <a:ext uri="{FF2B5EF4-FFF2-40B4-BE49-F238E27FC236}">
-                <a16:creationId xmlns:a16="http://schemas.microsoft.com/office/drawing/2014/main" id="{84AFD19F-A603-026E-FA20-E7883EA96258}"/>
+          <p:cNvPr id="171" name="TextBox 170">
+            <a:extLst>
+              <a:ext uri="{FF2B5EF4-FFF2-40B4-BE49-F238E27FC236}">
+                <a16:creationId xmlns:a16="http://schemas.microsoft.com/office/drawing/2014/main" id="{5F2AD143-281D-D23B-23CF-933AE4BD92C0}"/>
               </a:ext>
             </a:extLst>
           </p:cNvPr>
@@ -8695,7 +8223,7 @@
         </p:nvSpPr>
         <p:spPr>
           <a:xfrm>
-            <a:off x="8745161" y="2913944"/>
+            <a:off x="8929176" y="8808627"/>
             <a:ext cx="636278" cy="292388"/>
           </a:xfrm>
           <a:prstGeom prst="rect">
@@ -8724,10 +8252,10 @@
       </p:sp>
       <p:sp>
         <p:nvSpPr>
-          <p:cNvPr id="50" name="TextBox 49">
-            <a:extLst>
-              <a:ext uri="{FF2B5EF4-FFF2-40B4-BE49-F238E27FC236}">
-                <a16:creationId xmlns:a16="http://schemas.microsoft.com/office/drawing/2014/main" id="{DA630B73-93D5-CB8A-6228-D756B151152A}"/>
+          <p:cNvPr id="172" name="TextBox 171">
+            <a:extLst>
+              <a:ext uri="{FF2B5EF4-FFF2-40B4-BE49-F238E27FC236}">
+                <a16:creationId xmlns:a16="http://schemas.microsoft.com/office/drawing/2014/main" id="{BD541009-BC94-4530-A9D0-114750D261E7}"/>
               </a:ext>
             </a:extLst>
           </p:cNvPr>
@@ -8736,7 +8264,7 @@
         </p:nvSpPr>
         <p:spPr>
           <a:xfrm>
-            <a:off x="5246029" y="1162220"/>
+            <a:off x="5430044" y="7056903"/>
             <a:ext cx="636278" cy="292388"/>
           </a:xfrm>
           <a:prstGeom prst="rect">
@@ -8765,10 +8293,10 @@
       </p:sp>
       <p:sp>
         <p:nvSpPr>
-          <p:cNvPr id="51" name="Oval 50">
-            <a:extLst>
-              <a:ext uri="{FF2B5EF4-FFF2-40B4-BE49-F238E27FC236}">
-                <a16:creationId xmlns:a16="http://schemas.microsoft.com/office/drawing/2014/main" id="{C58E9684-2E9D-1729-5FE1-658C792A5321}"/>
+          <p:cNvPr id="173" name="Oval 172">
+            <a:extLst>
+              <a:ext uri="{FF2B5EF4-FFF2-40B4-BE49-F238E27FC236}">
+                <a16:creationId xmlns:a16="http://schemas.microsoft.com/office/drawing/2014/main" id="{AD991B87-210E-6392-804A-1BDA05191219}"/>
               </a:ext>
             </a:extLst>
           </p:cNvPr>
@@ -8777,7 +8305,7 @@
         </p:nvSpPr>
         <p:spPr>
           <a:xfrm>
-            <a:off x="7744451" y="746180"/>
+            <a:off x="7928466" y="6640863"/>
             <a:ext cx="300314" cy="301012"/>
           </a:xfrm>
           <a:prstGeom prst="ellipse">
@@ -8823,23 +8351,23 @@
       </p:sp>
       <p:cxnSp>
         <p:nvCxnSpPr>
-          <p:cNvPr id="52" name="Straight Arrow Connector 51">
-            <a:extLst>
-              <a:ext uri="{FF2B5EF4-FFF2-40B4-BE49-F238E27FC236}">
-                <a16:creationId xmlns:a16="http://schemas.microsoft.com/office/drawing/2014/main" id="{0935158B-2F02-6F73-223B-BD1898088A2B}"/>
+          <p:cNvPr id="174" name="Straight Arrow Connector 173">
+            <a:extLst>
+              <a:ext uri="{FF2B5EF4-FFF2-40B4-BE49-F238E27FC236}">
+                <a16:creationId xmlns:a16="http://schemas.microsoft.com/office/drawing/2014/main" id="{BAA07932-35BA-D8B8-76F9-4C191E01F87B}"/>
               </a:ext>
             </a:extLst>
           </p:cNvPr>
           <p:cNvCxnSpPr>
             <a:cxnSpLocks/>
-            <a:stCxn id="51" idx="3"/>
-            <a:endCxn id="12" idx="7"/>
+            <a:stCxn id="173" idx="3"/>
+            <a:endCxn id="126" idx="7"/>
           </p:cNvCxnSpPr>
           <p:nvPr/>
         </p:nvCxnSpPr>
         <p:spPr>
           <a:xfrm flipH="1">
-            <a:off x="7420915" y="1003110"/>
+            <a:off x="7604930" y="6897793"/>
             <a:ext cx="367516" cy="254282"/>
           </a:xfrm>
           <a:prstGeom prst="straightConnector1">
@@ -8870,10 +8398,10 @@
       </p:cxnSp>
       <p:sp>
         <p:nvSpPr>
-          <p:cNvPr id="53" name="Arc 52">
-            <a:extLst>
-              <a:ext uri="{FF2B5EF4-FFF2-40B4-BE49-F238E27FC236}">
-                <a16:creationId xmlns:a16="http://schemas.microsoft.com/office/drawing/2014/main" id="{8863EAD4-CCDE-0114-5618-C5932619B49E}"/>
+          <p:cNvPr id="175" name="Arc 174">
+            <a:extLst>
+              <a:ext uri="{FF2B5EF4-FFF2-40B4-BE49-F238E27FC236}">
+                <a16:creationId xmlns:a16="http://schemas.microsoft.com/office/drawing/2014/main" id="{684F9759-1EAE-D832-EBF8-93B5B4B026AC}"/>
               </a:ext>
             </a:extLst>
           </p:cNvPr>
@@ -8882,7 +8410,7 @@
         </p:nvSpPr>
         <p:spPr>
           <a:xfrm rot="947224">
-            <a:off x="8018796" y="885564"/>
+            <a:off x="8202811" y="6780247"/>
             <a:ext cx="191174" cy="202634"/>
           </a:xfrm>
           <a:prstGeom prst="arc">
@@ -8924,10 +8452,10 @@
       </p:sp>
       <p:sp>
         <p:nvSpPr>
-          <p:cNvPr id="54" name="TextBox 53">
-            <a:extLst>
-              <a:ext uri="{FF2B5EF4-FFF2-40B4-BE49-F238E27FC236}">
-                <a16:creationId xmlns:a16="http://schemas.microsoft.com/office/drawing/2014/main" id="{71522D94-E614-6F1E-6D9A-BA668E571F24}"/>
+          <p:cNvPr id="176" name="TextBox 175">
+            <a:extLst>
+              <a:ext uri="{FF2B5EF4-FFF2-40B4-BE49-F238E27FC236}">
+                <a16:creationId xmlns:a16="http://schemas.microsoft.com/office/drawing/2014/main" id="{42865796-592B-26D1-2449-CD5805F008F4}"/>
               </a:ext>
             </a:extLst>
           </p:cNvPr>
@@ -8936,7 +8464,7 @@
         </p:nvSpPr>
         <p:spPr>
           <a:xfrm>
-            <a:off x="8076211" y="865921"/>
+            <a:off x="8260226" y="6760604"/>
             <a:ext cx="1228587" cy="292388"/>
           </a:xfrm>
           <a:prstGeom prst="rect">
@@ -8964,10 +8492,10 @@
       </p:sp>
       <p:sp>
         <p:nvSpPr>
-          <p:cNvPr id="55" name="TextBox 54">
-            <a:extLst>
-              <a:ext uri="{FF2B5EF4-FFF2-40B4-BE49-F238E27FC236}">
-                <a16:creationId xmlns:a16="http://schemas.microsoft.com/office/drawing/2014/main" id="{C04CD404-158A-B640-21E5-4EDC77A7C461}"/>
+          <p:cNvPr id="177" name="TextBox 176">
+            <a:extLst>
+              <a:ext uri="{FF2B5EF4-FFF2-40B4-BE49-F238E27FC236}">
+                <a16:creationId xmlns:a16="http://schemas.microsoft.com/office/drawing/2014/main" id="{C37FFEBF-0A9D-1597-711C-5795FADA0E0D}"/>
               </a:ext>
             </a:extLst>
           </p:cNvPr>
@@ -8976,7 +8504,7 @@
         </p:nvSpPr>
         <p:spPr>
           <a:xfrm>
-            <a:off x="9257173" y="4533680"/>
+            <a:off x="9441188" y="10428363"/>
             <a:ext cx="991506" cy="292388"/>
           </a:xfrm>
           <a:prstGeom prst="rect">
@@ -9005,10 +8533,10 @@
       </p:sp>
       <p:sp>
         <p:nvSpPr>
-          <p:cNvPr id="58" name="TextBox 57">
-            <a:extLst>
-              <a:ext uri="{FF2B5EF4-FFF2-40B4-BE49-F238E27FC236}">
-                <a16:creationId xmlns:a16="http://schemas.microsoft.com/office/drawing/2014/main" id="{B1F60667-3433-D87F-6CEF-AAB27E5EC2E4}"/>
+          <p:cNvPr id="178" name="TextBox 177">
+            <a:extLst>
+              <a:ext uri="{FF2B5EF4-FFF2-40B4-BE49-F238E27FC236}">
+                <a16:creationId xmlns:a16="http://schemas.microsoft.com/office/drawing/2014/main" id="{D7987468-BCE0-53F4-DCF9-DB782EF959DB}"/>
               </a:ext>
             </a:extLst>
           </p:cNvPr>
@@ -9017,7 +8545,7 @@
         </p:nvSpPr>
         <p:spPr>
           <a:xfrm>
-            <a:off x="7804299" y="4520938"/>
+            <a:off x="7988314" y="10415621"/>
             <a:ext cx="991506" cy="292388"/>
           </a:xfrm>
           <a:prstGeom prst="rect">
@@ -9046,10 +8574,10 @@
       </p:sp>
       <p:sp>
         <p:nvSpPr>
-          <p:cNvPr id="59" name="TextBox 58">
-            <a:extLst>
-              <a:ext uri="{FF2B5EF4-FFF2-40B4-BE49-F238E27FC236}">
-                <a16:creationId xmlns:a16="http://schemas.microsoft.com/office/drawing/2014/main" id="{B921D287-E7D8-F7E9-6DB7-C5CA8CB03256}"/>
+          <p:cNvPr id="179" name="TextBox 178">
+            <a:extLst>
+              <a:ext uri="{FF2B5EF4-FFF2-40B4-BE49-F238E27FC236}">
+                <a16:creationId xmlns:a16="http://schemas.microsoft.com/office/drawing/2014/main" id="{5237D54F-456D-16F3-1870-686B8F30B81D}"/>
               </a:ext>
             </a:extLst>
           </p:cNvPr>
@@ -9058,7 +8586,7 @@
         </p:nvSpPr>
         <p:spPr>
           <a:xfrm>
-            <a:off x="6299357" y="4537502"/>
+            <a:off x="6483372" y="10432185"/>
             <a:ext cx="991506" cy="292388"/>
           </a:xfrm>
           <a:prstGeom prst="rect">
@@ -9087,10 +8615,10 @@
       </p:sp>
       <p:sp>
         <p:nvSpPr>
-          <p:cNvPr id="60" name="TextBox 59">
-            <a:extLst>
-              <a:ext uri="{FF2B5EF4-FFF2-40B4-BE49-F238E27FC236}">
-                <a16:creationId xmlns:a16="http://schemas.microsoft.com/office/drawing/2014/main" id="{1126102A-4612-3B2E-038A-6CD8B610AF6D}"/>
+          <p:cNvPr id="180" name="TextBox 179">
+            <a:extLst>
+              <a:ext uri="{FF2B5EF4-FFF2-40B4-BE49-F238E27FC236}">
+                <a16:creationId xmlns:a16="http://schemas.microsoft.com/office/drawing/2014/main" id="{6B2B730A-F347-A9D3-A828-59E53816F25A}"/>
               </a:ext>
             </a:extLst>
           </p:cNvPr>
@@ -9099,7 +8627,7 @@
         </p:nvSpPr>
         <p:spPr>
           <a:xfrm>
-            <a:off x="5090472" y="4564464"/>
+            <a:off x="5274487" y="10459147"/>
             <a:ext cx="723417" cy="292388"/>
           </a:xfrm>
           <a:prstGeom prst="rect">
@@ -9128,10 +8656,10 @@
       </p:sp>
       <p:sp>
         <p:nvSpPr>
-          <p:cNvPr id="61" name="TextBox 60">
-            <a:extLst>
-              <a:ext uri="{FF2B5EF4-FFF2-40B4-BE49-F238E27FC236}">
-                <a16:creationId xmlns:a16="http://schemas.microsoft.com/office/drawing/2014/main" id="{341A9C71-15F3-B707-CD29-06A3CF5352BA}"/>
+          <p:cNvPr id="181" name="TextBox 180">
+            <a:extLst>
+              <a:ext uri="{FF2B5EF4-FFF2-40B4-BE49-F238E27FC236}">
+                <a16:creationId xmlns:a16="http://schemas.microsoft.com/office/drawing/2014/main" id="{B6E502C9-4288-B88C-3DEC-598EDEABBC08}"/>
               </a:ext>
             </a:extLst>
           </p:cNvPr>
@@ -9140,7 +8668,7 @@
         </p:nvSpPr>
         <p:spPr>
           <a:xfrm>
-            <a:off x="3334832" y="4559038"/>
+            <a:off x="3518847" y="10453721"/>
             <a:ext cx="991506" cy="292388"/>
           </a:xfrm>
           <a:prstGeom prst="rect">
@@ -9169,10 +8697,10 @@
       </p:sp>
       <p:sp>
         <p:nvSpPr>
-          <p:cNvPr id="62" name="TextBox 61">
-            <a:extLst>
-              <a:ext uri="{FF2B5EF4-FFF2-40B4-BE49-F238E27FC236}">
-                <a16:creationId xmlns:a16="http://schemas.microsoft.com/office/drawing/2014/main" id="{D7D20110-58F3-0132-A43C-CD838CCB7978}"/>
+          <p:cNvPr id="182" name="TextBox 181">
+            <a:extLst>
+              <a:ext uri="{FF2B5EF4-FFF2-40B4-BE49-F238E27FC236}">
+                <a16:creationId xmlns:a16="http://schemas.microsoft.com/office/drawing/2014/main" id="{9A3F938C-F816-45E1-26CA-58E256B96921}"/>
               </a:ext>
             </a:extLst>
           </p:cNvPr>
@@ -9181,7 +8709,7 @@
         </p:nvSpPr>
         <p:spPr>
           <a:xfrm>
-            <a:off x="1867776" y="4537170"/>
+            <a:off x="2051791" y="10431853"/>
             <a:ext cx="991506" cy="292388"/>
           </a:xfrm>
           <a:prstGeom prst="rect">
@@ -9210,10 +8738,10 @@
       </p:sp>
       <p:sp>
         <p:nvSpPr>
-          <p:cNvPr id="63" name="TextBox 62">
-            <a:extLst>
-              <a:ext uri="{FF2B5EF4-FFF2-40B4-BE49-F238E27FC236}">
-                <a16:creationId xmlns:a16="http://schemas.microsoft.com/office/drawing/2014/main" id="{06556D8C-ED23-E94E-A03A-23CF899C3732}"/>
+          <p:cNvPr id="183" name="TextBox 182">
+            <a:extLst>
+              <a:ext uri="{FF2B5EF4-FFF2-40B4-BE49-F238E27FC236}">
+                <a16:creationId xmlns:a16="http://schemas.microsoft.com/office/drawing/2014/main" id="{F53E7651-6C51-9F7A-6510-F0C521209D96}"/>
               </a:ext>
             </a:extLst>
           </p:cNvPr>
@@ -9222,7 +8750,7 @@
         </p:nvSpPr>
         <p:spPr>
           <a:xfrm>
-            <a:off x="7936893" y="4966975"/>
+            <a:off x="8120908" y="10861658"/>
             <a:ext cx="529237" cy="292388"/>
           </a:xfrm>
           <a:prstGeom prst="rect">
@@ -9251,10 +8779,10 @@
       </p:sp>
       <p:sp>
         <p:nvSpPr>
-          <p:cNvPr id="64" name="TextBox 63">
-            <a:extLst>
-              <a:ext uri="{FF2B5EF4-FFF2-40B4-BE49-F238E27FC236}">
-                <a16:creationId xmlns:a16="http://schemas.microsoft.com/office/drawing/2014/main" id="{D74CAB63-C772-26E1-0A29-97DD69753AAB}"/>
+          <p:cNvPr id="184" name="TextBox 183">
+            <a:extLst>
+              <a:ext uri="{FF2B5EF4-FFF2-40B4-BE49-F238E27FC236}">
+                <a16:creationId xmlns:a16="http://schemas.microsoft.com/office/drawing/2014/main" id="{72C1D43B-A211-F75E-2F06-D81E7BC1F603}"/>
               </a:ext>
             </a:extLst>
           </p:cNvPr>
@@ -9263,7 +8791,7 @@
         </p:nvSpPr>
         <p:spPr>
           <a:xfrm>
-            <a:off x="9430849" y="4966975"/>
+            <a:off x="9614864" y="10861658"/>
             <a:ext cx="529237" cy="292388"/>
           </a:xfrm>
           <a:prstGeom prst="rect">
@@ -9292,10 +8820,10 @@
       </p:sp>
       <p:sp>
         <p:nvSpPr>
-          <p:cNvPr id="65" name="TextBox 64">
-            <a:extLst>
-              <a:ext uri="{FF2B5EF4-FFF2-40B4-BE49-F238E27FC236}">
-                <a16:creationId xmlns:a16="http://schemas.microsoft.com/office/drawing/2014/main" id="{FF3E2D47-62B7-551B-4B62-9ED6D39EAC7B}"/>
+          <p:cNvPr id="185" name="TextBox 184">
+            <a:extLst>
+              <a:ext uri="{FF2B5EF4-FFF2-40B4-BE49-F238E27FC236}">
+                <a16:creationId xmlns:a16="http://schemas.microsoft.com/office/drawing/2014/main" id="{1E186C1F-BF43-F25C-D943-321A067A39A4}"/>
               </a:ext>
             </a:extLst>
           </p:cNvPr>
@@ -9304,7 +8832,7 @@
         </p:nvSpPr>
         <p:spPr>
           <a:xfrm>
-            <a:off x="5631527" y="4969808"/>
+            <a:off x="5815542" y="10864491"/>
             <a:ext cx="652679" cy="292388"/>
           </a:xfrm>
           <a:prstGeom prst="rect">
@@ -9333,10 +8861,10 @@
       </p:sp>
       <p:sp>
         <p:nvSpPr>
-          <p:cNvPr id="68" name="Rectangle 67">
-            <a:extLst>
-              <a:ext uri="{FF2B5EF4-FFF2-40B4-BE49-F238E27FC236}">
-                <a16:creationId xmlns:a16="http://schemas.microsoft.com/office/drawing/2014/main" id="{73582CEC-0EF7-F1BF-E00D-4BA7C2C0D8DC}"/>
+          <p:cNvPr id="186" name="Rectangle 185">
+            <a:extLst>
+              <a:ext uri="{FF2B5EF4-FFF2-40B4-BE49-F238E27FC236}">
+                <a16:creationId xmlns:a16="http://schemas.microsoft.com/office/drawing/2014/main" id="{075AF44E-5113-CC28-68C5-5EE9D68A4529}"/>
               </a:ext>
             </a:extLst>
           </p:cNvPr>
@@ -9345,7 +8873,7 @@
         </p:nvSpPr>
         <p:spPr>
           <a:xfrm>
-            <a:off x="3665537" y="1546660"/>
+            <a:off x="3849552" y="7441343"/>
             <a:ext cx="1200303" cy="721322"/>
           </a:xfrm>
           <a:prstGeom prst="rect">
@@ -9405,22 +8933,22 @@
       </p:sp>
       <p:cxnSp>
         <p:nvCxnSpPr>
-          <p:cNvPr id="69" name="Straight Arrow Connector 68">
-            <a:extLst>
-              <a:ext uri="{FF2B5EF4-FFF2-40B4-BE49-F238E27FC236}">
-                <a16:creationId xmlns:a16="http://schemas.microsoft.com/office/drawing/2014/main" id="{A5D011E9-22EB-48A6-0794-B53CE60C3D74}"/>
+          <p:cNvPr id="187" name="Straight Arrow Connector 186">
+            <a:extLst>
+              <a:ext uri="{FF2B5EF4-FFF2-40B4-BE49-F238E27FC236}">
+                <a16:creationId xmlns:a16="http://schemas.microsoft.com/office/drawing/2014/main" id="{1EDD779A-F8DB-B72D-8CF1-65CD65ADF4F9}"/>
               </a:ext>
             </a:extLst>
           </p:cNvPr>
           <p:cNvCxnSpPr>
             <a:cxnSpLocks/>
-            <a:stCxn id="68" idx="3"/>
+            <a:stCxn id="186" idx="3"/>
           </p:cNvCxnSpPr>
           <p:nvPr/>
         </p:nvCxnSpPr>
         <p:spPr>
           <a:xfrm flipV="1">
-            <a:off x="4865840" y="1828800"/>
+            <a:off x="5049855" y="7723483"/>
             <a:ext cx="1353985" cy="78521"/>
           </a:xfrm>
           <a:prstGeom prst="straightConnector1">
@@ -9450,10 +8978,10 @@
       </p:cxnSp>
       <p:sp>
         <p:nvSpPr>
-          <p:cNvPr id="72" name="TextBox 71">
-            <a:extLst>
-              <a:ext uri="{FF2B5EF4-FFF2-40B4-BE49-F238E27FC236}">
-                <a16:creationId xmlns:a16="http://schemas.microsoft.com/office/drawing/2014/main" id="{AD433DC4-D081-887D-4117-B34228E6FED3}"/>
+          <p:cNvPr id="188" name="TextBox 187">
+            <a:extLst>
+              <a:ext uri="{FF2B5EF4-FFF2-40B4-BE49-F238E27FC236}">
+                <a16:creationId xmlns:a16="http://schemas.microsoft.com/office/drawing/2014/main" id="{7098024E-EA7D-4641-108C-7A842818FA3A}"/>
               </a:ext>
             </a:extLst>
           </p:cNvPr>
@@ -9462,7 +8990,7 @@
         </p:nvSpPr>
         <p:spPr>
           <a:xfrm>
-            <a:off x="5224693" y="1716253"/>
+            <a:off x="5408708" y="7610936"/>
             <a:ext cx="636278" cy="292388"/>
           </a:xfrm>
           <a:prstGeom prst="rect">
@@ -9491,10 +9019,10 @@
       </p:sp>
       <p:sp>
         <p:nvSpPr>
-          <p:cNvPr id="77" name="Free-form: Shape 76">
-            <a:extLst>
-              <a:ext uri="{FF2B5EF4-FFF2-40B4-BE49-F238E27FC236}">
-                <a16:creationId xmlns:a16="http://schemas.microsoft.com/office/drawing/2014/main" id="{1A152B15-890E-3DF9-4F14-78D49D8686F0}"/>
+          <p:cNvPr id="189" name="Free-form: Shape 188">
+            <a:extLst>
+              <a:ext uri="{FF2B5EF4-FFF2-40B4-BE49-F238E27FC236}">
+                <a16:creationId xmlns:a16="http://schemas.microsoft.com/office/drawing/2014/main" id="{1943DF65-B7E9-A638-BCDE-46E048340277}"/>
               </a:ext>
             </a:extLst>
           </p:cNvPr>
@@ -9503,7 +9031,7 @@
         </p:nvSpPr>
         <p:spPr>
           <a:xfrm>
-            <a:off x="4047695" y="2276475"/>
+            <a:off x="4231710" y="8171158"/>
             <a:ext cx="209979" cy="1314450"/>
           </a:xfrm>
           <a:custGeom>
@@ -9583,10 +9111,10 @@
       </p:sp>
       <p:sp>
         <p:nvSpPr>
-          <p:cNvPr id="79" name="Free-form: Shape 78">
-            <a:extLst>
-              <a:ext uri="{FF2B5EF4-FFF2-40B4-BE49-F238E27FC236}">
-                <a16:creationId xmlns:a16="http://schemas.microsoft.com/office/drawing/2014/main" id="{DDCB45C0-673D-5826-2804-7CB791FE79E9}"/>
+          <p:cNvPr id="190" name="Free-form: Shape 189">
+            <a:extLst>
+              <a:ext uri="{FF2B5EF4-FFF2-40B4-BE49-F238E27FC236}">
+                <a16:creationId xmlns:a16="http://schemas.microsoft.com/office/drawing/2014/main" id="{3B133344-D3E6-F3F4-DDFA-DC3F8D12D33E}"/>
               </a:ext>
             </a:extLst>
           </p:cNvPr>
@@ -9595,7 +9123,7 @@
         </p:nvSpPr>
         <p:spPr>
           <a:xfrm>
-            <a:off x="4513098" y="2266950"/>
+            <a:off x="4697113" y="8161633"/>
             <a:ext cx="6259677" cy="1314450"/>
           </a:xfrm>
           <a:custGeom>
@@ -9685,10 +9213,10 @@
       </p:sp>
       <p:sp>
         <p:nvSpPr>
-          <p:cNvPr id="80" name="TextBox 79">
-            <a:extLst>
-              <a:ext uri="{FF2B5EF4-FFF2-40B4-BE49-F238E27FC236}">
-                <a16:creationId xmlns:a16="http://schemas.microsoft.com/office/drawing/2014/main" id="{64289CA4-EF04-BA42-9B27-D95C5F870DA1}"/>
+          <p:cNvPr id="191" name="TextBox 190">
+            <a:extLst>
+              <a:ext uri="{FF2B5EF4-FFF2-40B4-BE49-F238E27FC236}">
+                <a16:creationId xmlns:a16="http://schemas.microsoft.com/office/drawing/2014/main" id="{707CF5C4-FF98-1D2F-0C4D-D98BB0CD5529}"/>
               </a:ext>
             </a:extLst>
           </p:cNvPr>
@@ -9697,7 +9225,7 @@
         </p:nvSpPr>
         <p:spPr>
           <a:xfrm>
-            <a:off x="3752382" y="2628884"/>
+            <a:off x="3936397" y="8523567"/>
             <a:ext cx="636278" cy="292388"/>
           </a:xfrm>
           <a:prstGeom prst="rect">
@@ -9726,10 +9254,10 @@
       </p:sp>
       <p:sp>
         <p:nvSpPr>
-          <p:cNvPr id="81" name="TextBox 80">
-            <a:extLst>
-              <a:ext uri="{FF2B5EF4-FFF2-40B4-BE49-F238E27FC236}">
-                <a16:creationId xmlns:a16="http://schemas.microsoft.com/office/drawing/2014/main" id="{8B0C923C-D203-8FF4-F9B9-C241FF55D524}"/>
+          <p:cNvPr id="192" name="TextBox 191">
+            <a:extLst>
+              <a:ext uri="{FF2B5EF4-FFF2-40B4-BE49-F238E27FC236}">
+                <a16:creationId xmlns:a16="http://schemas.microsoft.com/office/drawing/2014/main" id="{81EFD794-43CE-1665-EACB-D8AE98F9227C}"/>
               </a:ext>
             </a:extLst>
           </p:cNvPr>
@@ -9738,7 +9266,7 @@
         </p:nvSpPr>
         <p:spPr>
           <a:xfrm>
-            <a:off x="4878992" y="2363157"/>
+            <a:off x="5063007" y="8257840"/>
             <a:ext cx="562057" cy="292388"/>
           </a:xfrm>
           <a:prstGeom prst="rect">
@@ -9767,88 +9295,112 @@
       </p:sp>
       <p:sp>
         <p:nvSpPr>
-          <p:cNvPr id="2" name="TextBox 1">
-            <a:extLst>
-              <a:ext uri="{FF2B5EF4-FFF2-40B4-BE49-F238E27FC236}">
-                <a16:creationId xmlns:a16="http://schemas.microsoft.com/office/drawing/2014/main" id="{CE52AC3B-8124-7CAF-EC3D-7BD86665CC6C}"/>
-              </a:ext>
-            </a:extLst>
-          </p:cNvPr>
-          <p:cNvSpPr txBox="1"/>
-          <p:nvPr/>
-        </p:nvSpPr>
-        <p:spPr>
-          <a:xfrm>
-            <a:off x="0" y="0"/>
-            <a:ext cx="3078706" cy="292388"/>
+          <p:cNvPr id="193" name="Rectangle 192">
+            <a:extLst>
+              <a:ext uri="{FF2B5EF4-FFF2-40B4-BE49-F238E27FC236}">
+                <a16:creationId xmlns:a16="http://schemas.microsoft.com/office/drawing/2014/main" id="{656B5C67-9091-1AC2-8AAC-EDFDAB061DF3}"/>
+              </a:ext>
+            </a:extLst>
+          </p:cNvPr>
+          <p:cNvSpPr/>
+          <p:nvPr/>
+        </p:nvSpPr>
+        <p:spPr>
+          <a:xfrm>
+            <a:off x="1406164" y="534373"/>
+            <a:ext cx="5120770" cy="721322"/>
           </a:xfrm>
           <a:prstGeom prst="rect">
             <a:avLst/>
           </a:prstGeom>
-          <a:solidFill>
-            <a:schemeClr val="bg1"/>
-          </a:solidFill>
-          <a:effectLst>
-            <a:softEdge rad="63500"/>
-          </a:effectLst>
-        </p:spPr>
-        <p:txBody>
-          <a:bodyPr wrap="square" rtlCol="0">
-            <a:spAutoFit/>
-          </a:bodyPr>
-          <a:lstStyle/>
-          <a:p>
-            <a:r>
-              <a:rPr lang="en-GB" sz="1300" dirty="0"/>
-              <a:t>NOT standardized coefficients</a:t>
-            </a:r>
-          </a:p>
-        </p:txBody>
-      </p:sp>
-      <p:sp>
-        <p:nvSpPr>
-          <p:cNvPr id="3" name="TextBox 2">
-            <a:extLst>
-              <a:ext uri="{FF2B5EF4-FFF2-40B4-BE49-F238E27FC236}">
-                <a16:creationId xmlns:a16="http://schemas.microsoft.com/office/drawing/2014/main" id="{27B7640B-5868-F6A1-1049-6A65F026678C}"/>
-              </a:ext>
-            </a:extLst>
-          </p:cNvPr>
-          <p:cNvSpPr txBox="1"/>
-          <p:nvPr/>
-        </p:nvSpPr>
-        <p:spPr>
-          <a:xfrm>
-            <a:off x="155405" y="6229350"/>
-            <a:ext cx="4710435" cy="292388"/>
+          <a:noFill/>
+          <a:ln>
+            <a:noFill/>
+          </a:ln>
+        </p:spPr>
+        <p:style>
+          <a:lnRef idx="2">
+            <a:schemeClr val="accent1">
+              <a:shade val="15000"/>
+            </a:schemeClr>
+          </a:lnRef>
+          <a:fillRef idx="1">
+            <a:schemeClr val="accent1"/>
+          </a:fillRef>
+          <a:effectRef idx="0">
+            <a:schemeClr val="accent1"/>
+          </a:effectRef>
+          <a:fontRef idx="minor">
+            <a:schemeClr val="lt1"/>
+          </a:fontRef>
+        </p:style>
+        <p:txBody>
+          <a:bodyPr rtlCol="0" anchor="ctr"/>
+          <a:lstStyle/>
+          <a:p>
+            <a:r>
+              <a:rPr lang="en-GB" dirty="0">
+                <a:solidFill>
+                  <a:schemeClr val="tx1"/>
+                </a:solidFill>
+              </a:rPr>
+              <a:t>A) MULTIGROUP INVARIANCE APPROACH </a:t>
+            </a:r>
+          </a:p>
+        </p:txBody>
+      </p:sp>
+      <p:sp>
+        <p:nvSpPr>
+          <p:cNvPr id="194" name="Rectangle 193">
+            <a:extLst>
+              <a:ext uri="{FF2B5EF4-FFF2-40B4-BE49-F238E27FC236}">
+                <a16:creationId xmlns:a16="http://schemas.microsoft.com/office/drawing/2014/main" id="{9D9AF14E-B7B9-0AB1-32B3-F002E5386317}"/>
+              </a:ext>
+            </a:extLst>
+          </p:cNvPr>
+          <p:cNvSpPr/>
+          <p:nvPr/>
+        </p:nvSpPr>
+        <p:spPr>
+          <a:xfrm>
+            <a:off x="1393269" y="5695696"/>
+            <a:ext cx="5120770" cy="721322"/>
           </a:xfrm>
           <a:prstGeom prst="rect">
             <a:avLst/>
           </a:prstGeom>
-          <a:solidFill>
-            <a:schemeClr val="bg1"/>
-          </a:solidFill>
-          <a:effectLst>
-            <a:softEdge rad="63500"/>
-          </a:effectLst>
-        </p:spPr>
-        <p:txBody>
-          <a:bodyPr wrap="square" rtlCol="0">
-            <a:spAutoFit/>
-          </a:bodyPr>
-          <a:lstStyle/>
-          <a:p>
-            <a:r>
-              <a:rPr lang="el-GR" sz="1300" dirty="0"/>
-              <a:t>χ</a:t>
-            </a:r>
-            <a:r>
-              <a:rPr lang="en-GB" sz="1300" baseline="30000" dirty="0"/>
-              <a:t>2</a:t>
-            </a:r>
-            <a:r>
-              <a:rPr lang="en-GB" sz="1300" dirty="0"/>
-              <a:t>(29) = 54.324; p = 0.003; RMSEA = 0.027; CFI = 0.979</a:t>
+          <a:noFill/>
+          <a:ln>
+            <a:noFill/>
+          </a:ln>
+        </p:spPr>
+        <p:style>
+          <a:lnRef idx="2">
+            <a:schemeClr val="accent1">
+              <a:shade val="15000"/>
+            </a:schemeClr>
+          </a:lnRef>
+          <a:fillRef idx="1">
+            <a:schemeClr val="accent1"/>
+          </a:fillRef>
+          <a:effectRef idx="0">
+            <a:schemeClr val="accent1"/>
+          </a:effectRef>
+          <a:fontRef idx="minor">
+            <a:schemeClr val="lt1"/>
+          </a:fontRef>
+        </p:style>
+        <p:txBody>
+          <a:bodyPr rtlCol="0" anchor="ctr"/>
+          <a:lstStyle/>
+          <a:p>
+            <a:r>
+              <a:rPr lang="en-GB" dirty="0">
+                <a:solidFill>
+                  <a:schemeClr val="tx1"/>
+                </a:solidFill>
+              </a:rPr>
+              <a:t>B) MULTILEVEL SEM APPROACH</a:t>
             </a:r>
           </a:p>
         </p:txBody>
@@ -9856,7 +9408,7 @@
     </p:spTree>
     <p:extLst>
       <p:ext uri="{BB962C8B-B14F-4D97-AF65-F5344CB8AC3E}">
-        <p14:creationId xmlns:p14="http://schemas.microsoft.com/office/powerpoint/2010/main" val="2747345635"/>
+        <p14:creationId xmlns:p14="http://schemas.microsoft.com/office/powerpoint/2010/main" val="2466163990"/>
       </p:ext>
     </p:extLst>
   </p:cSld>
@@ -9869,7 +9421,7 @@
 <file path=ppt/theme/theme1.xml><?xml version="1.0" encoding="utf-8"?>
 <a:theme xmlns:a="http://schemas.openxmlformats.org/drawingml/2006/main" name="Office Theme">
   <a:themeElements>
-    <a:clrScheme name="Office">
+    <a:clrScheme name="Office Theme">
       <a:dk1>
         <a:sysClr val="windowText" lastClr="000000"/>
       </a:dk1>
@@ -9907,7 +9459,7 @@
         <a:srgbClr val="96607D"/>
       </a:folHlink>
     </a:clrScheme>
-    <a:fontScheme name="Office">
+    <a:fontScheme name="Office Theme">
       <a:majorFont>
         <a:latin typeface="Aptos Display" panose="02110004020202020204"/>
         <a:ea typeface=""/>
@@ -10013,7 +9565,7 @@
         <a:font script="Tfng" typeface="Ebrima"/>
       </a:minorFont>
     </a:fontScheme>
-    <a:fmtScheme name="Office">
+    <a:fmtScheme name="Office Theme">
       <a:fillStyleLst>
         <a:solidFill>
           <a:schemeClr val="phClr"/>
